--- a/system-design-101/vi/lessons/sd-14-020/slides/sd-14-020.pptx
+++ b/system-design-101/vi/lessons/sd-14-020/slides/sd-14-020.pptx
@@ -2695,6 +2695,28 @@
               </a:rPr>
               <a:t> JWT</a:t>
             </a:r>
+            <a:r>
+              <a:rPr lang="en-US" sz="1650" b="1" spc="212" kern="0" dirty="0">
+                <a:solidFill>
+                  <a:srgbClr val="9A98A0"/>
+                </a:solidFill>
+                <a:latin typeface="Be Vietnam Pro" pitchFamily="34" charset="0"/>
+                <a:ea typeface="Be Vietnam Pro" pitchFamily="34" charset="-122"/>
+                <a:cs typeface="Be Vietnam Pro" pitchFamily="34" charset="-120"/>
+              </a:rPr>
+              <a:t> DẠNG</a:t>
+            </a:r>
+            <a:r>
+              <a:rPr lang="en-US" sz="1650" b="1" spc="224" kern="0" dirty="0">
+                <a:solidFill>
+                  <a:srgbClr val="9A98A0"/>
+                </a:solidFill>
+                <a:latin typeface="Be Vietnam Pro" pitchFamily="34" charset="0"/>
+                <a:ea typeface="Be Vietnam Pro" pitchFamily="34" charset="-122"/>
+                <a:cs typeface="Be Vietnam Pro" pitchFamily="34" charset="-120"/>
+              </a:rPr>
+              <a:t> KÝ</a:t>
+            </a:r>
             <a:endParaRPr lang="en-US" sz="1650" dirty="0"/>
           </a:p>
         </p:txBody>
@@ -3866,7 +3888,7 @@
       </p:sp>
       <p:sp>
         <p:nvSpPr>
-          <p:cNvPr id="6" name="Connector line-1792334639533-642620684"/>
+          <p:cNvPr id="6" name="Connector line-1792337941650-437097555"/>
           <p:cNvSpPr/>
           <p:nvPr/>
         </p:nvSpPr>
@@ -4039,6 +4061,72 @@
               <a:t> chữ</a:t>
             </a:r>
             <a:r>
+              <a:rPr lang="en-US" sz="1800" dirty="0" spc="-2" kern="0">
+                <a:solidFill>
+                  <a:srgbClr val="D8D3C4"/>
+                </a:solidFill>
+                <a:latin typeface="Be Vietnam Pro" pitchFamily="34" charset="0"/>
+                <a:ea typeface="Be Vietnam Pro" pitchFamily="34" charset="-122"/>
+                <a:cs typeface="Be Vietnam Pro" pitchFamily="34" charset="-120"/>
+              </a:rPr>
+              <a:t> mang</a:t>
+            </a:r>
+            <a:r>
+              <a:rPr lang="en-US" sz="1800" dirty="0" spc="2" kern="0">
+                <a:solidFill>
+                  <a:srgbClr val="D8D3C4"/>
+                </a:solidFill>
+                <a:latin typeface="Be Vietnam Pro" pitchFamily="34" charset="0"/>
+                <a:ea typeface="Be Vietnam Pro" pitchFamily="34" charset="-122"/>
+                <a:cs typeface="Be Vietnam Pro" pitchFamily="34" charset="-120"/>
+              </a:rPr>
+              <a:t> các</a:t>
+            </a:r>
+            <a:r>
+              <a:rPr lang="en-US" sz="1800" dirty="0" spc="1" kern="0">
+                <a:solidFill>
+                  <a:srgbClr val="D8D3C4"/>
+                </a:solidFill>
+                <a:latin typeface="Be Vietnam Pro" pitchFamily="34" charset="0"/>
+                <a:ea typeface="Be Vietnam Pro" pitchFamily="34" charset="-122"/>
+                <a:cs typeface="Be Vietnam Pro" pitchFamily="34" charset="-120"/>
+              </a:rPr>
+              <a:t> claim</a:t>
+            </a:r>
+            <a:r>
+              <a:rPr lang="en-US" sz="1800" dirty="0" spc="-14" kern="0">
+                <a:solidFill>
+                  <a:srgbClr val="D8D3C4"/>
+                </a:solidFill>
+                <a:latin typeface="Be Vietnam Pro" pitchFamily="34" charset="0"/>
+                <a:ea typeface="Be Vietnam Pro" pitchFamily="34" charset="-122"/>
+                <a:cs typeface="Be Vietnam Pro" pitchFamily="34" charset="-120"/>
+              </a:rPr>
+              <a:t> về</a:t>
+            </a:r>
+            <a:r>
+              <a:rPr lang="en-US" sz="1800" dirty="0" spc="-7" kern="0">
+                <a:solidFill>
+                  <a:srgbClr val="D8D3C4"/>
+                </a:solidFill>
+                <a:latin typeface="Be Vietnam Pro" pitchFamily="34" charset="0"/>
+                <a:ea typeface="Be Vietnam Pro" pitchFamily="34" charset="-122"/>
+                <a:cs typeface="Be Vietnam Pro" pitchFamily="34" charset="-120"/>
+              </a:rPr>
+              <a:t> một</a:t>
+            </a:r>
+            <a:r>
+              <a:rPr lang="en-US" sz="1800" dirty="0" spc="2" kern="0">
+                <a:solidFill>
+                  <a:srgbClr val="D8D3C4"/>
+                </a:solidFill>
+                <a:latin typeface="Be Vietnam Pro" pitchFamily="34" charset="0"/>
+                <a:ea typeface="Be Vietnam Pro" pitchFamily="34" charset="-122"/>
+                <a:cs typeface="Be Vietnam Pro" pitchFamily="34" charset="-120"/>
+              </a:rPr>
+              <a:t> chủ</a:t>
+            </a:r>
+            <a:r>
               <a:rPr lang="en-US" sz="1800" dirty="0" spc="-1" kern="0">
                 <a:solidFill>
                   <a:srgbClr val="D8D3C4"/>
@@ -4047,51 +4135,7 @@
                 <a:ea typeface="Be Vietnam Pro" pitchFamily="34" charset="-122"/>
                 <a:cs typeface="Be Vietnam Pro" pitchFamily="34" charset="-120"/>
               </a:rPr>
-              <a:t> ba phần</a:t>
-            </a:r>
-            <a:r>
-              <a:rPr lang="en-US" sz="1800" dirty="0" spc="-2" kern="0">
-                <a:solidFill>
-                  <a:srgbClr val="D8D3C4"/>
-                </a:solidFill>
-                <a:latin typeface="Be Vietnam Pro" pitchFamily="34" charset="0"/>
-                <a:ea typeface="Be Vietnam Pro" pitchFamily="34" charset="-122"/>
-                <a:cs typeface="Be Vietnam Pro" pitchFamily="34" charset="-120"/>
-              </a:rPr>
-              <a:t> nối</a:t>
-            </a:r>
-            <a:r>
-              <a:rPr lang="en-US" sz="1800" dirty="0" spc="-4" kern="0">
-                <a:solidFill>
-                  <a:srgbClr val="D8D3C4"/>
-                </a:solidFill>
-                <a:latin typeface="Be Vietnam Pro" pitchFamily="34" charset="0"/>
-                <a:ea typeface="Be Vietnam Pro" pitchFamily="34" charset="-122"/>
-                <a:cs typeface="Be Vietnam Pro" pitchFamily="34" charset="-120"/>
-              </a:rPr>
-              <a:t> bằng</a:t>
-            </a:r>
-            <a:r>
-              <a:rPr lang="en-US" sz="1800" dirty="0" spc="-1" kern="0">
-                <a:solidFill>
-                  <a:srgbClr val="D8D3C4"/>
-                </a:solidFill>
-                <a:latin typeface="Be Vietnam Pro" pitchFamily="34" charset="0"/>
-                <a:ea typeface="Be Vietnam Pro" pitchFamily="34" charset="-122"/>
-                <a:cs typeface="Be Vietnam Pro" pitchFamily="34" charset="-120"/>
-              </a:rPr>
-              <a:t> dấu</a:t>
-            </a:r>
-            <a:r>
-              <a:rPr lang="en-US" sz="1800" dirty="0" spc="0" kern="0">
-                <a:solidFill>
-                  <a:srgbClr val="D8D3C4"/>
-                </a:solidFill>
-                <a:latin typeface="Be Vietnam Pro" pitchFamily="34" charset="0"/>
-                <a:ea typeface="Be Vietnam Pro" pitchFamily="34" charset="-122"/>
-                <a:cs typeface="Be Vietnam Pro" pitchFamily="34" charset="-120"/>
-              </a:rPr>
-              <a:t> chấm.</a:t>
+              <a:t> thể.</a:t>
             </a:r>
             <a:endParaRPr lang="en-US" sz="1800" dirty="0"/>
           </a:p>
@@ -4138,7 +4182,7 @@
           </a:solidFill>
           <a:ln w="28575">
             <a:solidFill>
-              <a:srgbClr val="9A98A0"/>
+              <a:srgbClr val="3DD6A0"/>
             </a:solidFill>
             <a:prstDash val="solid"/>
           </a:ln>
@@ -4146,7 +4190,7 @@
       </p:sp>
       <p:sp>
         <p:nvSpPr>
-          <p:cNvPr id="12" name="Connector line-1792334639541-527508169"/>
+          <p:cNvPr id="12" name="Connector line-1792337941659-702454031"/>
           <p:cNvSpPr/>
           <p:nvPr/>
         </p:nvSpPr>
@@ -4161,7 +4205,7 @@
           <a:noFill/>
           <a:ln w="28575">
             <a:solidFill>
-              <a:srgbClr val="9A98A0"/>
+              <a:srgbClr val="3DD6A0"/>
             </a:solidFill>
             <a:prstDash val="solid"/>
             <a:headEnd type="none"/>
@@ -4194,15 +4238,15 @@
               <a:buNone/>
             </a:pPr>
             <a:r>
-              <a:rPr lang="en-US" sz="3900" dirty="0" spc="-3" kern="0">
-                <a:solidFill>
-                  <a:srgbClr val="F3EEE3"/>
+              <a:rPr lang="en-US" sz="3900" dirty="0" spc="-13" kern="0">
+                <a:solidFill>
+                  <a:srgbClr val="3DD6A0"/>
                 </a:solidFill>
                 <a:latin typeface="Bricolage Grotesque ExtraBold" pitchFamily="34" charset="0"/>
                 <a:ea typeface="Bricolage Grotesque ExtraBold" pitchFamily="34" charset="-122"/>
                 <a:cs typeface="Bricolage Grotesque ExtraBold" pitchFamily="34" charset="-120"/>
               </a:rPr>
-              <a:t>JSON</a:t>
+              <a:t>JWS</a:t>
             </a:r>
             <a:endParaRPr lang="en-US" sz="3900" dirty="0"/>
           </a:p>
@@ -4233,7 +4277,7 @@
               <a:buNone/>
             </a:pPr>
             <a:r>
-              <a:rPr lang="en-US" sz="1650" dirty="0" spc="-5" kern="0">
+              <a:rPr lang="en-US" sz="1650" dirty="0" spc="6" kern="0">
                 <a:solidFill>
                   <a:srgbClr val="9A98A0"/>
                 </a:solidFill>
@@ -4241,10 +4285,10 @@
                 <a:ea typeface="Be Vietnam Pro" pitchFamily="34" charset="-122"/>
                 <a:cs typeface="Be Vietnam Pro" pitchFamily="34" charset="-120"/>
               </a:rPr>
-              <a:t>JavaScript</a:t>
-            </a:r>
-            <a:r>
-              <a:rPr lang="en-US" sz="1650" dirty="0" spc="-9" kern="0">
+              <a:t>JSON</a:t>
+            </a:r>
+            <a:r>
+              <a:rPr lang="en-US" sz="1650" dirty="0" spc="-18" kern="0">
                 <a:solidFill>
                   <a:srgbClr val="9A98A0"/>
                 </a:solidFill>
@@ -4252,10 +4296,10 @@
                 <a:ea typeface="Be Vietnam Pro" pitchFamily="34" charset="-122"/>
                 <a:cs typeface="Be Vietnam Pro" pitchFamily="34" charset="-120"/>
               </a:rPr>
-              <a:t> Object</a:t>
-            </a:r>
-            <a:r>
-              <a:rPr lang="en-US" sz="1650" dirty="0" spc="-10" kern="0">
+              <a:t> Web</a:t>
+            </a:r>
+            <a:r>
+              <a:rPr lang="en-US" sz="1650" dirty="0" spc="-11" kern="0">
                 <a:solidFill>
                   <a:srgbClr val="9A98A0"/>
                 </a:solidFill>
@@ -4263,7 +4307,7 @@
                 <a:ea typeface="Be Vietnam Pro" pitchFamily="34" charset="-122"/>
                 <a:cs typeface="Be Vietnam Pro" pitchFamily="34" charset="-120"/>
               </a:rPr>
-              <a:t> Notation</a:t>
+              <a:t> Signature</a:t>
             </a:r>
             <a:endParaRPr lang="en-US" sz="1650" dirty="0"/>
           </a:p>
@@ -4297,6 +4341,28 @@
               <a:buNone/>
             </a:pPr>
             <a:r>
+              <a:rPr lang="en-US" sz="1800" dirty="0" spc="-3" kern="0">
+                <a:solidFill>
+                  <a:srgbClr val="D8D3C4"/>
+                </a:solidFill>
+                <a:latin typeface="Be Vietnam Pro" pitchFamily="34" charset="0"/>
+                <a:ea typeface="Be Vietnam Pro" pitchFamily="34" charset="-122"/>
+                <a:cs typeface="Be Vietnam Pro" pitchFamily="34" charset="-120"/>
+              </a:rPr>
+              <a:t>dạng</a:t>
+            </a:r>
+            <a:r>
+              <a:rPr lang="en-US" sz="1800" dirty="0" spc="7" kern="0">
+                <a:solidFill>
+                  <a:srgbClr val="D8D3C4"/>
+                </a:solidFill>
+                <a:latin typeface="Be Vietnam Pro" pitchFamily="34" charset="0"/>
+                <a:ea typeface="Be Vietnam Pro" pitchFamily="34" charset="-122"/>
+                <a:cs typeface="Be Vietnam Pro" pitchFamily="34" charset="-120"/>
+              </a:rPr>
+              <a:t> JWT được</a:t>
+            </a:r>
+            <a:r>
               <a:rPr lang="en-US" sz="1800" dirty="0" spc="-1" kern="0">
                 <a:solidFill>
                   <a:srgbClr val="D8D3C4"/>
@@ -4305,10 +4371,10 @@
                 <a:ea typeface="Be Vietnam Pro" pitchFamily="34" charset="-122"/>
                 <a:cs typeface="Be Vietnam Pro" pitchFamily="34" charset="-120"/>
               </a:rPr>
-              <a:t>Ghi</a:t>
-            </a:r>
-            <a:r>
-              <a:rPr lang="en-US" sz="1800" dirty="0" spc="0" kern="0">
+              <a:t> ký,</a:t>
+            </a:r>
+            <a:r>
+              <a:rPr lang="en-US" sz="1800" dirty="0" spc="-2" kern="0">
                 <a:solidFill>
                   <a:srgbClr val="D8D3C4"/>
                 </a:solidFill>
@@ -4316,10 +4382,10 @@
                 <a:ea typeface="Be Vietnam Pro" pitchFamily="34" charset="-122"/>
                 <a:cs typeface="Be Vietnam Pro" pitchFamily="34" charset="-120"/>
               </a:rPr>
-              <a:t> dữ</a:t>
-            </a:r>
-            <a:r>
-              <a:rPr lang="en-US" sz="1800" dirty="0" spc="-2" kern="0">
+              <a:t> không mã</a:t>
+            </a:r>
+            <a:r>
+              <a:rPr lang="en-US" sz="1800" dirty="0" spc="-1" kern="0">
                 <a:solidFill>
                   <a:srgbClr val="D8D3C4"/>
                 </a:solidFill>
@@ -4327,51 +4393,7 @@
                 <a:ea typeface="Be Vietnam Pro" pitchFamily="34" charset="-122"/>
                 <a:cs typeface="Be Vietnam Pro" pitchFamily="34" charset="-120"/>
               </a:rPr>
-              <a:t> liệu thành</a:t>
-            </a:r>
-            <a:r>
-              <a:rPr lang="en-US" sz="1800" dirty="0" spc="1" kern="0">
-                <a:solidFill>
-                  <a:srgbClr val="D8D3C4"/>
-                </a:solidFill>
-                <a:latin typeface="Be Vietnam Pro" pitchFamily="34" charset="0"/>
-                <a:ea typeface="Be Vietnam Pro" pitchFamily="34" charset="-122"/>
-                <a:cs typeface="Be Vietnam Pro" pitchFamily="34" charset="-120"/>
-              </a:rPr>
-              <a:t> cặp</a:t>
-            </a:r>
-            <a:r>
-              <a:rPr lang="en-US" sz="1800" dirty="0" spc="-12" kern="0">
-                <a:solidFill>
-                  <a:srgbClr val="D8D3C4"/>
-                </a:solidFill>
-                <a:latin typeface="Be Vietnam Pro" pitchFamily="34" charset="0"/>
-                <a:ea typeface="Be Vietnam Pro" pitchFamily="34" charset="-122"/>
-                <a:cs typeface="Be Vietnam Pro" pitchFamily="34" charset="-120"/>
-              </a:rPr>
-              <a:t> tên và</a:t>
-            </a:r>
-            <a:r>
-              <a:rPr lang="en-US" sz="1800" dirty="0" spc="0" kern="0">
-                <a:solidFill>
-                  <a:srgbClr val="D8D3C4"/>
-                </a:solidFill>
-                <a:latin typeface="Be Vietnam Pro" pitchFamily="34" charset="0"/>
-                <a:ea typeface="Be Vietnam Pro" pitchFamily="34" charset="-122"/>
-                <a:cs typeface="Be Vietnam Pro" pitchFamily="34" charset="-120"/>
-              </a:rPr>
-              <a:t> giá</a:t>
-            </a:r>
-            <a:r>
-              <a:rPr lang="en-US" sz="1800" dirty="0" spc="7" kern="0">
-                <a:solidFill>
-                  <a:srgbClr val="D8D3C4"/>
-                </a:solidFill>
-                <a:latin typeface="Be Vietnam Pro" pitchFamily="34" charset="0"/>
-                <a:ea typeface="Be Vietnam Pro" pitchFamily="34" charset="-122"/>
-                <a:cs typeface="Be Vietnam Pro" pitchFamily="34" charset="-120"/>
-              </a:rPr>
-              <a:t> trị.</a:t>
+              <a:t> hóa</a:t>
             </a:r>
             <a:endParaRPr lang="en-US" sz="1800" dirty="0"/>
           </a:p>
@@ -4426,7 +4448,7 @@
       </p:sp>
       <p:sp>
         <p:nvSpPr>
-          <p:cNvPr id="18" name="Connector line-1792334639548-91918641"/>
+          <p:cNvPr id="18" name="Connector line-1792337941665-527907506"/>
           <p:cNvSpPr/>
           <p:nvPr/>
         </p:nvSpPr>
@@ -4728,7 +4750,7 @@
       </p:sp>
       <p:sp>
         <p:nvSpPr>
-          <p:cNvPr id="24" name="Connector line-1792334639555-819167446"/>
+          <p:cNvPr id="24" name="Connector line-1792337941671-534532566"/>
           <p:cNvSpPr/>
           <p:nvPr/>
         </p:nvSpPr>
@@ -5019,7 +5041,7 @@
       </p:sp>
       <p:sp>
         <p:nvSpPr>
-          <p:cNvPr id="30" name="Connector line-1792334639562-530265973"/>
+          <p:cNvPr id="30" name="Connector line-1792337941678-711601852"/>
           <p:cNvSpPr/>
           <p:nvPr/>
         </p:nvSpPr>
@@ -5244,7 +5266,7 @@
       </p:sp>
       <p:sp>
         <p:nvSpPr>
-          <p:cNvPr id="36" name="Connector line-1792334639567-250634688"/>
+          <p:cNvPr id="36" name="Connector line-1792337941682-985762907"/>
           <p:cNvSpPr/>
           <p:nvPr/>
         </p:nvSpPr>
@@ -5568,7 +5590,7 @@
       </p:sp>
       <p:sp>
         <p:nvSpPr>
-          <p:cNvPr id="42" name="Connector line-1792334639573-119378303"/>
+          <p:cNvPr id="42" name="Connector line-1792337941687-17608542"/>
           <p:cNvSpPr/>
           <p:nvPr/>
         </p:nvSpPr>
@@ -5727,10 +5749,10 @@
                 <a:ea typeface="Be Vietnam Pro" pitchFamily="34" charset="-122"/>
                 <a:cs typeface="Be Vietnam Pro" pitchFamily="34" charset="-120"/>
               </a:rPr>
-              <a:t>Dạng</a:t>
-            </a:r>
-            <a:r>
-              <a:rPr lang="en-US" sz="1800" dirty="0" spc="-20" kern="0">
+              <a:t>dạng</a:t>
+            </a:r>
+            <a:r>
+              <a:rPr lang="en-US" sz="1800" dirty="0" spc="7" kern="0">
                 <a:solidFill>
                   <a:srgbClr val="D8D3C4"/>
                 </a:solidFill>
@@ -5738,10 +5760,10 @@
                 <a:ea typeface="Be Vietnam Pro" pitchFamily="34" charset="-122"/>
                 <a:cs typeface="Be Vietnam Pro" pitchFamily="34" charset="-120"/>
               </a:rPr>
-              <a:t> token</a:t>
-            </a:r>
-            <a:r>
-              <a:rPr lang="en-US" sz="1800" dirty="0" spc="1" kern="0">
+              <a:t> JWT</a:t>
+            </a:r>
+            <a:r>
+              <a:rPr lang="en-US" sz="1800" dirty="0" spc="-1" kern="0">
                 <a:solidFill>
                   <a:srgbClr val="D8D3C4"/>
                 </a:solidFill>
@@ -5749,10 +5771,10 @@
                 <a:ea typeface="Be Vietnam Pro" pitchFamily="34" charset="-122"/>
                 <a:cs typeface="Be Vietnam Pro" pitchFamily="34" charset="-120"/>
               </a:rPr>
-              <a:t> có</a:t>
-            </a:r>
-            <a:r>
-              <a:rPr lang="en-US" sz="1800" dirty="0" spc="-4" kern="0">
+              <a:t> mã</a:t>
+            </a:r>
+            <a:r>
+              <a:rPr lang="en-US" sz="1800" dirty="0" spc="-2" kern="0">
                 <a:solidFill>
                   <a:srgbClr val="D8D3C4"/>
                 </a:solidFill>
@@ -5760,10 +5782,10 @@
                 <a:ea typeface="Be Vietnam Pro" pitchFamily="34" charset="-122"/>
                 <a:cs typeface="Be Vietnam Pro" pitchFamily="34" charset="-120"/>
               </a:rPr>
-              <a:t> payload</a:t>
-            </a:r>
-            <a:r>
-              <a:rPr lang="en-US" sz="1800" dirty="0" spc="7" kern="0">
+              <a:t> hóa,</a:t>
+            </a:r>
+            <a:r>
+              <a:rPr lang="en-US" sz="1800" dirty="0" spc="0" kern="0">
                 <a:solidFill>
                   <a:srgbClr val="D8D3C4"/>
                 </a:solidFill>
@@ -5771,10 +5793,10 @@
                 <a:ea typeface="Be Vietnam Pro" pitchFamily="34" charset="-122"/>
                 <a:cs typeface="Be Vietnam Pro" pitchFamily="34" charset="-120"/>
               </a:rPr>
-              <a:t> được</a:t>
-            </a:r>
-            <a:r>
-              <a:rPr lang="en-US" sz="1800" dirty="0" spc="-2" kern="0">
+              <a:t> cấu</a:t>
+            </a:r>
+            <a:r>
+              <a:rPr lang="en-US" sz="1800" dirty="0" spc="2" kern="0">
                 <a:solidFill>
                   <a:srgbClr val="D8D3C4"/>
                 </a:solidFill>
@@ -5782,7 +5804,7 @@
                 <a:ea typeface="Be Vietnam Pro" pitchFamily="34" charset="-122"/>
                 <a:cs typeface="Be Vietnam Pro" pitchFamily="34" charset="-120"/>
               </a:rPr>
-              <a:t> mã</a:t>
+              <a:t> trúc</a:t>
             </a:r>
             <a:r>
               <a:rPr lang="en-US" sz="1800" dirty="0" spc="0" kern="0">
@@ -5793,7 +5815,7 @@
                 <a:ea typeface="Be Vietnam Pro" pitchFamily="34" charset="-122"/>
                 <a:cs typeface="Be Vietnam Pro" pitchFamily="34" charset="-120"/>
               </a:rPr>
-              <a:t> hóa.</a:t>
+              <a:t> khác</a:t>
             </a:r>
             <a:endParaRPr lang="en-US" sz="1800" dirty="0"/>
           </a:p>
@@ -5848,7 +5870,7 @@
       </p:sp>
       <p:sp>
         <p:nvSpPr>
-          <p:cNvPr id="48" name="Connector line-1792334639579-309930675"/>
+          <p:cNvPr id="48" name="Connector line-1792337941693-310185199"/>
           <p:cNvSpPr/>
           <p:nvPr/>
         </p:nvSpPr>
@@ -6495,7 +6517,7 @@
       </p:sp>
       <p:sp>
         <p:nvSpPr>
-          <p:cNvPr id="55" name="Connector line-1792334639591-260985818"/>
+          <p:cNvPr id="55" name="Connector line-1792337941703-700982757"/>
           <p:cNvSpPr/>
           <p:nvPr/>
         </p:nvSpPr>
@@ -7206,7 +7228,7 @@
               <a:t>Một</a:t>
             </a:r>
             <a:r>
-              <a:rPr lang="en-US" sz="2700" dirty="0" spc="-29" kern="0">
+              <a:rPr lang="en-US" sz="2700" dirty="0" spc="16" kern="0">
                 <a:solidFill>
                   <a:srgbClr val="14161C"/>
                 </a:solidFill>
@@ -7214,7 +7236,7 @@
                 <a:ea typeface="Be Vietnam Pro" pitchFamily="34" charset="-122"/>
                 <a:cs typeface="Be Vietnam Pro" pitchFamily="34" charset="-120"/>
               </a:rPr>
-              <a:t> token</a:t>
+              <a:t> JWT</a:t>
             </a:r>
             <a:r>
               <a:rPr lang="en-US" sz="2700" dirty="0" spc="-2" kern="0">
@@ -7225,21 +7247,43 @@
                 <a:ea typeface="Be Vietnam Pro" pitchFamily="34" charset="-122"/>
                 <a:cs typeface="Be Vietnam Pro" pitchFamily="34" charset="-120"/>
               </a:rPr>
+              <a:t> dạng</a:t>
+            </a:r>
+            <a:r>
+              <a:rPr lang="en-US" sz="2700" dirty="0" spc="-3" kern="0">
+                <a:solidFill>
+                  <a:srgbClr val="14161C"/>
+                </a:solidFill>
+                <a:latin typeface="Be Vietnam Pro" pitchFamily="34" charset="0"/>
+                <a:ea typeface="Be Vietnam Pro" pitchFamily="34" charset="-122"/>
+                <a:cs typeface="Be Vietnam Pro" pitchFamily="34" charset="-120"/>
+              </a:rPr>
+              <a:t> ký</a:t>
+            </a:r>
+            <a:r>
+              <a:rPr lang="en-US" sz="2700" dirty="0" spc="-1" kern="0">
+                <a:solidFill>
+                  <a:srgbClr val="14161C"/>
+                </a:solidFill>
+                <a:latin typeface="Be Vietnam Pro" pitchFamily="34" charset="0"/>
+                <a:ea typeface="Be Vietnam Pro" pitchFamily="34" charset="-122"/>
+                <a:cs typeface="Be Vietnam Pro" pitchFamily="34" charset="-120"/>
+              </a:rPr>
               <a:t> là</a:t>
             </a:r>
             <a:r>
+              <a:rPr lang="en-US" sz="2700" dirty="0" spc="1" kern="0">
+                <a:solidFill>
+                  <a:srgbClr val="14161C"/>
+                </a:solidFill>
+                <a:latin typeface="Be Vietnam Pro" pitchFamily="34" charset="0"/>
+                <a:ea typeface="Be Vietnam Pro" pitchFamily="34" charset="-122"/>
+                <a:cs typeface="Be Vietnam Pro" pitchFamily="34" charset="-120"/>
+              </a:rPr>
+              <a:t> chuỗi</a:t>
+            </a:r>
+            <a:r>
               <a:rPr lang="en-US" sz="2700" dirty="0" spc="0" kern="0">
-                <a:solidFill>
-                  <a:srgbClr val="14161C"/>
-                </a:solidFill>
-                <a:latin typeface="Be Vietnam Pro" pitchFamily="34" charset="0"/>
-                <a:ea typeface="Be Vietnam Pro" pitchFamily="34" charset="-122"/>
-                <a:cs typeface="Be Vietnam Pro" pitchFamily="34" charset="-120"/>
-              </a:rPr>
-              <a:t> chuỗi</a:t>
-            </a:r>
-            <a:r>
-              <a:rPr lang="en-US" sz="2700" dirty="0" spc="1" kern="0">
                 <a:solidFill>
                   <a:srgbClr val="14161C"/>
                 </a:solidFill>
@@ -8907,7 +8951,7 @@
         <p:spPr>
           <a:xfrm>
             <a:off x="914400" y="1333500"/>
-            <a:ext cx="16459200" cy="1428750"/>
+            <a:ext cx="16459200" cy="1238250"/>
           </a:xfrm>
           <a:prstGeom prst="rect">
             <a:avLst/>
@@ -8916,17 +8960,17 @@
           <a:ln/>
         </p:spPr>
         <p:txBody>
-          <a:bodyPr wrap="square" lIns="0" tIns="64294" rIns="0" bIns="-64294" rtlCol="0" anchor="t"/>
+          <a:bodyPr wrap="square" lIns="0" tIns="59150" rIns="0" bIns="-59150" rtlCol="0" anchor="t"/>
           <a:lstStyle/>
           <a:p>
             <a:pPr algn="l" indent="0" marL="0">
               <a:lnSpc>
-                <a:spcPts val="7875"/>
+                <a:spcPts val="7245"/>
               </a:lnSpc>
               <a:buNone/>
             </a:pPr>
             <a:r>
-              <a:rPr lang="en-US" sz="7500" dirty="0" spc="-2" kern="0">
+              <a:rPr lang="en-US" sz="6900" dirty="0" spc="22" kern="0">
                 <a:solidFill>
                   <a:srgbClr val="14161C"/>
                 </a:solidFill>
@@ -8934,10 +8978,10 @@
                 <a:ea typeface="Bricolage Grotesque ExtraBold" pitchFamily="34" charset="-122"/>
                 <a:cs typeface="Bricolage Grotesque ExtraBold" pitchFamily="34" charset="-120"/>
               </a:rPr>
-              <a:t>Ba</a:t>
-            </a:r>
-            <a:r>
-              <a:rPr lang="en-US" sz="7500" dirty="0" spc="4" kern="0">
+              <a:t>JWT</a:t>
+            </a:r>
+            <a:r>
+              <a:rPr lang="en-US" sz="6900" dirty="0" spc="0" kern="0">
                 <a:solidFill>
                   <a:srgbClr val="14161C"/>
                 </a:solidFill>
@@ -8945,10 +8989,10 @@
                 <a:ea typeface="Bricolage Grotesque ExtraBold" pitchFamily="34" charset="-122"/>
                 <a:cs typeface="Bricolage Grotesque ExtraBold" pitchFamily="34" charset="-120"/>
               </a:rPr>
-              <a:t> phần</a:t>
-            </a:r>
-            <a:r>
-              <a:rPr lang="en-US" sz="7500" dirty="0" spc="2" kern="0">
+              <a:t> dạng</a:t>
+            </a:r>
+            <a:r>
+              <a:rPr lang="en-US" sz="6900" dirty="0" spc="1" kern="0">
                 <a:solidFill>
                   <a:srgbClr val="14161C"/>
                 </a:solidFill>
@@ -8956,10 +9000,10 @@
                 <a:ea typeface="Bricolage Grotesque ExtraBold" pitchFamily="34" charset="-122"/>
                 <a:cs typeface="Bricolage Grotesque ExtraBold" pitchFamily="34" charset="-120"/>
               </a:rPr>
-              <a:t> nối</a:t>
-            </a:r>
-            <a:r>
-              <a:rPr lang="en-US" sz="7500" dirty="0" spc="-4" kern="0">
+              <a:t> ký:</a:t>
+            </a:r>
+            <a:r>
+              <a:rPr lang="en-US" sz="6900" dirty="0" spc="-6" kern="0">
                 <a:solidFill>
                   <a:srgbClr val="14161C"/>
                 </a:solidFill>
@@ -8967,10 +9011,10 @@
                 <a:ea typeface="Bricolage Grotesque ExtraBold" pitchFamily="34" charset="-122"/>
                 <a:cs typeface="Bricolage Grotesque ExtraBold" pitchFamily="34" charset="-120"/>
               </a:rPr>
-              <a:t> bằng</a:t>
-            </a:r>
-            <a:r>
-              <a:rPr lang="en-US" sz="7500" dirty="0" spc="-2" kern="0">
+              <a:t> ba</a:t>
+            </a:r>
+            <a:r>
+              <a:rPr lang="en-US" sz="6900" dirty="0" spc="3" kern="0">
                 <a:solidFill>
                   <a:srgbClr val="14161C"/>
                 </a:solidFill>
@@ -8978,10 +9022,10 @@
                 <a:ea typeface="Bricolage Grotesque ExtraBold" pitchFamily="34" charset="-122"/>
                 <a:cs typeface="Bricolage Grotesque ExtraBold" pitchFamily="34" charset="-120"/>
               </a:rPr>
-              <a:t> dấu</a:t>
-            </a:r>
-            <a:r>
-              <a:rPr lang="en-US" sz="7500" dirty="0" spc="1" kern="0">
+              <a:t> phần</a:t>
+            </a:r>
+            <a:r>
+              <a:rPr lang="en-US" sz="6900" dirty="0" spc="1" kern="0">
                 <a:solidFill>
                   <a:srgbClr val="14161C"/>
                 </a:solidFill>
@@ -8989,9 +9033,42 @@
                 <a:ea typeface="Bricolage Grotesque ExtraBold" pitchFamily="34" charset="-122"/>
                 <a:cs typeface="Bricolage Grotesque ExtraBold" pitchFamily="34" charset="-120"/>
               </a:rPr>
+              <a:t> nối</a:t>
+            </a:r>
+            <a:r>
+              <a:rPr lang="en-US" sz="6900" dirty="0" spc="-2" kern="0">
+                <a:solidFill>
+                  <a:srgbClr val="14161C"/>
+                </a:solidFill>
+                <a:latin typeface="Bricolage Grotesque ExtraBold" pitchFamily="34" charset="0"/>
+                <a:ea typeface="Bricolage Grotesque ExtraBold" pitchFamily="34" charset="-122"/>
+                <a:cs typeface="Bricolage Grotesque ExtraBold" pitchFamily="34" charset="-120"/>
+              </a:rPr>
+              <a:t> bằng</a:t>
+            </a:r>
+            <a:r>
+              <a:rPr lang="en-US" sz="6900" dirty="0" spc="0" kern="0">
+                <a:solidFill>
+                  <a:srgbClr val="14161C"/>
+                </a:solidFill>
+                <a:latin typeface="Bricolage Grotesque ExtraBold" pitchFamily="34" charset="0"/>
+                <a:ea typeface="Bricolage Grotesque ExtraBold" pitchFamily="34" charset="-122"/>
+                <a:cs typeface="Bricolage Grotesque ExtraBold" pitchFamily="34" charset="-120"/>
+              </a:rPr>
+              <a:t> dấu</a:t>
+            </a:r>
+            <a:r>
+              <a:rPr lang="en-US" sz="6900" dirty="0" spc="-2" kern="0">
+                <a:solidFill>
+                  <a:srgbClr val="14161C"/>
+                </a:solidFill>
+                <a:latin typeface="Bricolage Grotesque ExtraBold" pitchFamily="34" charset="0"/>
+                <a:ea typeface="Bricolage Grotesque ExtraBold" pitchFamily="34" charset="-122"/>
+                <a:cs typeface="Bricolage Grotesque ExtraBold" pitchFamily="34" charset="-120"/>
+              </a:rPr>
               <a:t> chấm</a:t>
             </a:r>
-            <a:endParaRPr lang="en-US" sz="7500" dirty="0"/>
+            <a:endParaRPr lang="en-US" sz="6900" dirty="0"/>
           </a:p>
         </p:txBody>
       </p:sp>
@@ -20140,7 +20217,7 @@
       </p:sp>
       <p:sp>
         <p:nvSpPr>
-          <p:cNvPr id="6" name="Connector line-1792334537293-955975268"/>
+          <p:cNvPr id="6" name="Connector line-1792337919329-461996490"/>
           <p:cNvSpPr/>
           <p:nvPr/>
         </p:nvSpPr>
@@ -20237,7 +20314,7 @@
       </p:sp>
       <p:sp>
         <p:nvSpPr>
-          <p:cNvPr id="8" name="Text richtext-1792334537298-84067338"/>
+          <p:cNvPr id="8" name="Text richtext-1792337919332-799757048"/>
           <p:cNvSpPr/>
           <p:nvPr/>
         </p:nvSpPr>
@@ -20474,7 +20551,7 @@
       </p:sp>
       <p:sp>
         <p:nvSpPr>
-          <p:cNvPr id="11" name="Connector line-1792334537321-714628464"/>
+          <p:cNvPr id="11" name="Connector line-1792337919350-264910377"/>
           <p:cNvSpPr/>
           <p:nvPr/>
         </p:nvSpPr>
@@ -20571,7 +20648,7 @@
       </p:sp>
       <p:sp>
         <p:nvSpPr>
-          <p:cNvPr id="13" name="Text richtext-1792334537323-449620004"/>
+          <p:cNvPr id="13" name="Text richtext-1792337919353-41439967"/>
           <p:cNvSpPr/>
           <p:nvPr/>
         </p:nvSpPr>
@@ -20610,7 +20687,7 @@
                 <a:ea typeface="Be Vietnam Pro" pitchFamily="34" charset="-122"/>
                 <a:cs typeface="Be Vietnam Pro" pitchFamily="34" charset="-120"/>
               </a:rPr>
-              <a:t>Không</a:t>
+              <a:t>Dạng</a:t>
             </a:r>
             <a:r>
               <a:rPr lang="en-US" sz="2550" dirty="0" spc="1" kern="0">
@@ -20621,7 +20698,40 @@
                 <a:ea typeface="Be Vietnam Pro" pitchFamily="34" charset="-122"/>
                 <a:cs typeface="Be Vietnam Pro" pitchFamily="34" charset="-120"/>
               </a:rPr>
-              <a:t> giấu</a:t>
+              <a:t> ký</a:t>
+            </a:r>
+            <a:r>
+              <a:rPr lang="en-US" sz="2550" dirty="0" spc="0" kern="0">
+                <a:solidFill>
+                  <a:srgbClr val="F3EEE3"/>
+                </a:solidFill>
+                <a:latin typeface="Be Vietnam Pro" pitchFamily="34" charset="0"/>
+                <a:ea typeface="Be Vietnam Pro" pitchFamily="34" charset="-122"/>
+                <a:cs typeface="Be Vietnam Pro" pitchFamily="34" charset="-120"/>
+              </a:rPr>
+              <a:t> không</a:t>
+            </a:r>
+            <a:r>
+              <a:rPr lang="en-US" sz="2550" dirty="0" spc="2" kern="0">
+                <a:solidFill>
+                  <a:srgbClr val="F3EEE3"/>
+                </a:solidFill>
+                <a:latin typeface="Be Vietnam Pro" pitchFamily="34" charset="0"/>
+                <a:ea typeface="Be Vietnam Pro" pitchFamily="34" charset="-122"/>
+                <a:cs typeface="Be Vietnam Pro" pitchFamily="34" charset="-120"/>
+              </a:rPr>
+              <a:t> mã</a:t>
+            </a:r>
+            <a:r>
+              <a:rPr lang="en-US" sz="2550" dirty="0" spc="-4" kern="0">
+                <a:solidFill>
+                  <a:srgbClr val="F3EEE3"/>
+                </a:solidFill>
+                <a:latin typeface="Be Vietnam Pro" pitchFamily="34" charset="0"/>
+                <a:ea typeface="Be Vietnam Pro" pitchFamily="34" charset="-122"/>
+                <a:cs typeface="Be Vietnam Pro" pitchFamily="34" charset="-120"/>
+              </a:rPr>
+              <a:t> hóa</a:t>
             </a:r>
             <a:r>
               <a:rPr lang="en-US" sz="2550" dirty="0" spc="-8" kern="0">
@@ -20786,7 +20896,7 @@
       </p:sp>
       <p:sp>
         <p:nvSpPr>
-          <p:cNvPr id="16" name="Connector line-1792334537330-318318221"/>
+          <p:cNvPr id="16" name="Connector line-1792337919360-669410829"/>
           <p:cNvSpPr/>
           <p:nvPr/>
         </p:nvSpPr>
@@ -21045,7 +21155,7 @@
       </p:sp>
       <p:sp>
         <p:nvSpPr>
-          <p:cNvPr id="20" name="Connector line-1792334537337-417356765"/>
+          <p:cNvPr id="20" name="Connector line-1792337919368-471947033"/>
           <p:cNvSpPr/>
           <p:nvPr/>
         </p:nvSpPr>
@@ -21070,7 +21180,7 @@
       </p:sp>
       <p:sp>
         <p:nvSpPr>
-          <p:cNvPr id="21" name="Connector line-1792334537338-707370746"/>
+          <p:cNvPr id="21" name="Connector line-1792337919368-51346378"/>
           <p:cNvSpPr/>
           <p:nvPr/>
         </p:nvSpPr>
@@ -21095,7 +21205,7 @@
       </p:sp>
       <p:sp>
         <p:nvSpPr>
-          <p:cNvPr id="22" name="Connector line-1792334537338-620879962"/>
+          <p:cNvPr id="22" name="Connector line-1792337919368-135557334"/>
           <p:cNvSpPr/>
           <p:nvPr/>
         </p:nvSpPr>
@@ -21369,7 +21479,7 @@
         </p:nvSpPr>
         <p:spPr>
           <a:xfrm>
-            <a:off x="9334500" y="6953250"/>
+            <a:off x="9334500" y="6810375"/>
             <a:ext cx="7658100" cy="952500"/>
           </a:xfrm>
           <a:prstGeom prst="roundRect">
@@ -21489,8 +21599,8 @@
         </p:nvSpPr>
         <p:spPr>
           <a:xfrm>
-            <a:off x="9334500" y="8143875"/>
-            <a:ext cx="7658100" cy="381000"/>
+            <a:off x="9334500" y="7953375"/>
+            <a:ext cx="7658100" cy="800100"/>
           </a:xfrm>
           <a:prstGeom prst="rect">
             <a:avLst/>
@@ -21499,10 +21609,13 @@
           <a:ln/>
         </p:spPr>
         <p:txBody>
-          <a:bodyPr wrap="square" lIns="0" tIns="0" rIns="0" bIns="0" rtlCol="0" anchor="t"/>
+          <a:bodyPr wrap="square" lIns="0" tIns="11335" rIns="0" bIns="-11335" rtlCol="0" anchor="t"/>
           <a:lstStyle/>
           <a:p>
             <a:pPr algn="l" indent="0" marL="0">
+              <a:lnSpc>
+                <a:spcPts val="2730"/>
+              </a:lnSpc>
               <a:buNone/>
             </a:pPr>
             <a:r>
@@ -21539,7 +21652,7 @@
               <a:t> kín:</a:t>
             </a:r>
             <a:r>
-              <a:rPr lang="en-US" sz="2100" dirty="0" spc="7" kern="0">
+              <a:rPr lang="en-US" sz="2100" dirty="0" spc="-1" kern="0">
                 <a:solidFill>
                   <a:srgbClr val="D8D3C4"/>
                 </a:solidFill>
@@ -21547,7 +21660,106 @@
                 <a:ea typeface="Be Vietnam Pro" pitchFamily="34" charset="-122"/>
                 <a:cs typeface="Be Vietnam Pro" pitchFamily="34" charset="-120"/>
               </a:rPr>
-              <a:t> JWE,</a:t>
+              <a:t> dùng</a:t>
+            </a:r>
+            <a:r>
+              <a:rPr lang="en-US" sz="2100" dirty="0" spc="10" kern="0">
+                <a:solidFill>
+                  <a:srgbClr val="D8D3C4"/>
+                </a:solidFill>
+                <a:latin typeface="Be Vietnam Pro" pitchFamily="34" charset="0"/>
+                <a:ea typeface="Be Vietnam Pro" pitchFamily="34" charset="-122"/>
+                <a:cs typeface="Be Vietnam Pro" pitchFamily="34" charset="-120"/>
+              </a:rPr>
+              <a:t> JWT</a:t>
+            </a:r>
+            <a:r>
+              <a:rPr lang="en-US" sz="2100" dirty="0" spc="-3" kern="0">
+                <a:solidFill>
+                  <a:srgbClr val="D8D3C4"/>
+                </a:solidFill>
+                <a:latin typeface="Be Vietnam Pro" pitchFamily="34" charset="0"/>
+                <a:ea typeface="Be Vietnam Pro" pitchFamily="34" charset="-122"/>
+                <a:cs typeface="Be Vietnam Pro" pitchFamily="34" charset="-120"/>
+              </a:rPr>
+              <a:t> mã</a:t>
+            </a:r>
+            <a:r>
+              <a:rPr lang="en-US" sz="2100" dirty="0" spc="-6" kern="0">
+                <a:solidFill>
+                  <a:srgbClr val="D8D3C4"/>
+                </a:solidFill>
+                <a:latin typeface="Be Vietnam Pro" pitchFamily="34" charset="0"/>
+                <a:ea typeface="Be Vietnam Pro" pitchFamily="34" charset="-122"/>
+                <a:cs typeface="Be Vietnam Pro" pitchFamily="34" charset="-120"/>
+              </a:rPr>
+              <a:t> hóa</a:t>
+            </a:r>
+            <a:r>
+              <a:rPr lang="en-US" sz="2100" dirty="0" spc="5" kern="0">
+                <a:solidFill>
+                  <a:srgbClr val="D8D3C4"/>
+                </a:solidFill>
+                <a:latin typeface="Be Vietnam Pro" pitchFamily="34" charset="0"/>
+                <a:ea typeface="Be Vietnam Pro" pitchFamily="34" charset="-122"/>
+                <a:cs typeface="Be Vietnam Pro" pitchFamily="34" charset="-120"/>
+              </a:rPr>
+              <a:t> (JWE),</a:t>
+            </a:r>
+            <a:r>
+              <a:rPr lang="en-US" sz="2100" dirty="0" spc="-8" kern="0">
+                <a:solidFill>
+                  <a:srgbClr val="D8D3C4"/>
+                </a:solidFill>
+                <a:latin typeface="Be Vietnam Pro" pitchFamily="34" charset="0"/>
+                <a:ea typeface="Be Vietnam Pro" pitchFamily="34" charset="-122"/>
+                <a:cs typeface="Be Vietnam Pro" pitchFamily="34" charset="-120"/>
+              </a:rPr>
+              <a:t> một</a:t>
+            </a:r>
+            <a:r>
+              <a:rPr lang="en-US" sz="2100" dirty="0" spc="-2" kern="0">
+                <a:solidFill>
+                  <a:srgbClr val="D8D3C4"/>
+                </a:solidFill>
+                <a:latin typeface="Be Vietnam Pro" pitchFamily="34" charset="0"/>
+                <a:ea typeface="Be Vietnam Pro" pitchFamily="34" charset="-122"/>
+                <a:cs typeface="Be Vietnam Pro" pitchFamily="34" charset="-120"/>
+              </a:rPr>
+              <a:t> dạng khác</a:t>
+            </a:r>
+            <a:r>
+              <a:rPr lang="en-US" sz="2100" dirty="0" spc="-3" kern="0">
+                <a:solidFill>
+                  <a:srgbClr val="D8D3C4"/>
+                </a:solidFill>
+                <a:latin typeface="Be Vietnam Pro" pitchFamily="34" charset="0"/>
+                <a:ea typeface="Be Vietnam Pro" pitchFamily="34" charset="-122"/>
+                <a:cs typeface="Be Vietnam Pro" pitchFamily="34" charset="-120"/>
+              </a:rPr>
+              <a:t> có</a:t>
+            </a:r>
+            <a:r>
+              <a:rPr lang="en-US" sz="2100" dirty="0" spc="-2" kern="0">
+                <a:solidFill>
+                  <a:srgbClr val="D8D3C4"/>
+                </a:solidFill>
+                <a:latin typeface="Be Vietnam Pro" pitchFamily="34" charset="0"/>
+                <a:ea typeface="Be Vietnam Pro" pitchFamily="34" charset="-122"/>
+                <a:cs typeface="Be Vietnam Pro" pitchFamily="34" charset="-120"/>
+              </a:rPr>
+              <a:t> cấu</a:t>
+            </a:r>
+            <a:r>
+              <a:rPr lang="en-US" sz="2100" dirty="0" spc="-1" kern="0">
+                <a:solidFill>
+                  <a:srgbClr val="D8D3C4"/>
+                </a:solidFill>
+                <a:latin typeface="Be Vietnam Pro" pitchFamily="34" charset="0"/>
+                <a:ea typeface="Be Vietnam Pro" pitchFamily="34" charset="-122"/>
+                <a:cs typeface="Be Vietnam Pro" pitchFamily="34" charset="-120"/>
+              </a:rPr>
+              <a:t> trúc khác,</a:t>
             </a:r>
             <a:r>
               <a:rPr lang="en-US" sz="2100" dirty="0" spc="-9" kern="0">
@@ -21561,7 +21773,7 @@
               <a:t> ngoài</a:t>
             </a:r>
             <a:r>
-              <a:rPr lang="en-US" sz="2100" dirty="0" spc="-3" kern="0">
+              <a:rPr lang="en-US" sz="2100" dirty="0" spc="-5" kern="0">
                 <a:solidFill>
                   <a:srgbClr val="D8D3C4"/>
                 </a:solidFill>
@@ -21569,32 +21781,10 @@
                 <a:ea typeface="Be Vietnam Pro" pitchFamily="34" charset="-122"/>
                 <a:cs typeface="Be Vietnam Pro" pitchFamily="34" charset="-120"/>
               </a:rPr>
-              <a:t> phạm</a:t>
-            </a:r>
-            <a:r>
-              <a:rPr lang="en-US" sz="2100" dirty="0" spc="0" kern="0">
-                <a:solidFill>
-                  <a:srgbClr val="D8D3C4"/>
-                </a:solidFill>
-                <a:latin typeface="Be Vietnam Pro" pitchFamily="34" charset="0"/>
-                <a:ea typeface="Be Vietnam Pro" pitchFamily="34" charset="-122"/>
-                <a:cs typeface="Be Vietnam Pro" pitchFamily="34" charset="-120"/>
-              </a:rPr>
-              <a:t> vi</a:t>
-            </a:r>
-            <a:r>
-              <a:rPr lang="en-US" sz="2100" dirty="0" spc="-5" kern="0">
-                <a:solidFill>
-                  <a:srgbClr val="D8D3C4"/>
-                </a:solidFill>
-                <a:latin typeface="Be Vietnam Pro" pitchFamily="34" charset="0"/>
-                <a:ea typeface="Be Vietnam Pro" pitchFamily="34" charset="-122"/>
-                <a:cs typeface="Be Vietnam Pro" pitchFamily="34" charset="-120"/>
-              </a:rPr>
               <a:t> bài</a:t>
             </a:r>
             <a:r>
-              <a:rPr lang="en-US" sz="2100" dirty="0" spc="-8" kern="0">
+              <a:rPr lang="en-US" sz="2100" dirty="0" spc="-7" kern="0">
                 <a:solidFill>
                   <a:srgbClr val="D8D3C4"/>
                 </a:solidFill>
@@ -21610,7 +21800,7 @@
       </p:sp>
       <p:sp>
         <p:nvSpPr>
-          <p:cNvPr id="28" name="Connector line-1792334537349-281426986"/>
+          <p:cNvPr id="28" name="Connector line-1792337919383-915587159"/>
           <p:cNvSpPr/>
           <p:nvPr/>
         </p:nvSpPr>

--- a/system-design-101/vi/lessons/sd-14-020/slides/sd-14-020.pptx
+++ b/system-design-101/vi/lessons/sd-14-020/slides/sd-14-020.pptx
@@ -18019,12 +18019,12 @@
         </p:nvSpPr>
         <p:spPr>
           <a:xfrm>
-            <a:off x="914400" y="3333750"/>
-            <a:ext cx="16459200" cy="1428750"/>
+            <a:off x="914400" y="3238500"/>
+            <a:ext cx="16459200" cy="1238250"/>
           </a:xfrm>
           <a:prstGeom prst="roundRect">
             <a:avLst>
-              <a:gd name="adj" fmla="val 17333"/>
+              <a:gd name="adj" fmla="val 20000"/>
             </a:avLst>
           </a:prstGeom>
           <a:solidFill>
@@ -18046,7 +18046,7 @@
         </p:nvSpPr>
         <p:spPr>
           <a:xfrm>
-            <a:off x="1162050" y="3724275"/>
+            <a:off x="1162050" y="3533775"/>
             <a:ext cx="647700" cy="647700"/>
           </a:xfrm>
           <a:prstGeom prst="ellipse">
@@ -18066,7 +18066,7 @@
         </p:nvSpPr>
         <p:spPr>
           <a:xfrm>
-            <a:off x="1200150" y="3819525"/>
+            <a:off x="1200150" y="3629025"/>
             <a:ext cx="571500" cy="457200"/>
           </a:xfrm>
           <a:prstGeom prst="rect">
@@ -18105,7 +18105,7 @@
         </p:nvSpPr>
         <p:spPr>
           <a:xfrm>
-            <a:off x="2190750" y="3619500"/>
+            <a:off x="2190750" y="3390900"/>
             <a:ext cx="7048500" cy="495300"/>
           </a:xfrm>
           <a:prstGeom prst="rect">
@@ -18199,7 +18199,7 @@
         </p:nvSpPr>
         <p:spPr>
           <a:xfrm>
-            <a:off x="2190750" y="4171950"/>
+            <a:off x="2190750" y="3943350"/>
             <a:ext cx="7048500" cy="381000"/>
           </a:xfrm>
           <a:prstGeom prst="rect">
@@ -18271,7 +18271,7 @@
         </p:nvSpPr>
         <p:spPr>
           <a:xfrm>
-            <a:off x="9525000" y="3790950"/>
+            <a:off x="9525000" y="3600450"/>
             <a:ext cx="2762250" cy="514350"/>
           </a:xfrm>
           <a:prstGeom prst="roundRect">
@@ -18325,7 +18325,7 @@
         </p:nvSpPr>
         <p:spPr>
           <a:xfrm>
-            <a:off x="12401550" y="4048125"/>
+            <a:off x="12401550" y="3857625"/>
             <a:ext cx="1104900" cy="0"/>
           </a:xfrm>
           <a:prstGeom prst="line">
@@ -18350,7 +18350,7 @@
         </p:nvSpPr>
         <p:spPr>
           <a:xfrm>
-            <a:off x="13620750" y="3790950"/>
+            <a:off x="13620750" y="3600450"/>
             <a:ext cx="3371850" cy="514350"/>
           </a:xfrm>
           <a:prstGeom prst="roundRect">
@@ -18398,12 +18398,12 @@
         </p:nvSpPr>
         <p:spPr>
           <a:xfrm>
-            <a:off x="914400" y="4953000"/>
-            <a:ext cx="16459200" cy="1428750"/>
+            <a:off x="914400" y="4629150"/>
+            <a:ext cx="16459200" cy="1238250"/>
           </a:xfrm>
           <a:prstGeom prst="roundRect">
             <a:avLst>
-              <a:gd name="adj" fmla="val 17333"/>
+              <a:gd name="adj" fmla="val 20000"/>
             </a:avLst>
           </a:prstGeom>
           <a:solidFill>
@@ -18425,7 +18425,7 @@
         </p:nvSpPr>
         <p:spPr>
           <a:xfrm>
-            <a:off x="1162050" y="5343525"/>
+            <a:off x="1162050" y="4924425"/>
             <a:ext cx="647700" cy="647700"/>
           </a:xfrm>
           <a:prstGeom prst="ellipse">
@@ -18445,7 +18445,7 @@
         </p:nvSpPr>
         <p:spPr>
           <a:xfrm>
-            <a:off x="1200150" y="5438775"/>
+            <a:off x="1200150" y="5019675"/>
             <a:ext cx="571500" cy="457200"/>
           </a:xfrm>
           <a:prstGeom prst="rect">
@@ -18484,7 +18484,7 @@
         </p:nvSpPr>
         <p:spPr>
           <a:xfrm>
-            <a:off x="2190750" y="5238750"/>
+            <a:off x="2190750" y="4781550"/>
             <a:ext cx="7048500" cy="495300"/>
           </a:xfrm>
           <a:prstGeom prst="rect">
@@ -18567,7 +18567,7 @@
         </p:nvSpPr>
         <p:spPr>
           <a:xfrm>
-            <a:off x="2190750" y="5791200"/>
+            <a:off x="2190750" y="5334000"/>
             <a:ext cx="7048500" cy="381000"/>
           </a:xfrm>
           <a:prstGeom prst="rect">
@@ -18628,7 +18628,7 @@
         </p:nvSpPr>
         <p:spPr>
           <a:xfrm>
-            <a:off x="9525000" y="5410200"/>
+            <a:off x="9525000" y="4991100"/>
             <a:ext cx="2762250" cy="514350"/>
           </a:xfrm>
           <a:prstGeom prst="roundRect">
@@ -18682,7 +18682,7 @@
         </p:nvSpPr>
         <p:spPr>
           <a:xfrm>
-            <a:off x="12401550" y="5667375"/>
+            <a:off x="12401550" y="5248275"/>
             <a:ext cx="1104900" cy="0"/>
           </a:xfrm>
           <a:prstGeom prst="line">
@@ -18707,7 +18707,7 @@
         </p:nvSpPr>
         <p:spPr>
           <a:xfrm>
-            <a:off x="13620750" y="5410200"/>
+            <a:off x="13620750" y="4991100"/>
             <a:ext cx="3371850" cy="514350"/>
           </a:xfrm>
           <a:prstGeom prst="roundRect">
@@ -18777,12 +18777,12 @@
         </p:nvSpPr>
         <p:spPr>
           <a:xfrm>
-            <a:off x="914400" y="6572250"/>
-            <a:ext cx="16459200" cy="2286000"/>
+            <a:off x="914400" y="6019800"/>
+            <a:ext cx="16459200" cy="2876550"/>
           </a:xfrm>
           <a:prstGeom prst="roundRect">
             <a:avLst>
-              <a:gd name="adj" fmla="val 10833"/>
+              <a:gd name="adj" fmla="val 8609"/>
             </a:avLst>
           </a:prstGeom>
           <a:solidFill>
@@ -18804,7 +18804,7 @@
         </p:nvSpPr>
         <p:spPr>
           <a:xfrm>
-            <a:off x="1162050" y="7391400"/>
+            <a:off x="1162050" y="7134225"/>
             <a:ext cx="647700" cy="647700"/>
           </a:xfrm>
           <a:prstGeom prst="ellipse">
@@ -18824,7 +18824,7 @@
         </p:nvSpPr>
         <p:spPr>
           <a:xfrm>
-            <a:off x="1200150" y="7486650"/>
+            <a:off x="1200150" y="7229475"/>
             <a:ext cx="571500" cy="457200"/>
           </a:xfrm>
           <a:prstGeom prst="rect">
@@ -18863,7 +18863,7 @@
         </p:nvSpPr>
         <p:spPr>
           <a:xfrm>
-            <a:off x="2190750" y="7048500"/>
+            <a:off x="2190750" y="6600825"/>
             <a:ext cx="7048500" cy="495300"/>
           </a:xfrm>
           <a:prstGeom prst="rect">
@@ -18946,7 +18946,7 @@
         </p:nvSpPr>
         <p:spPr>
           <a:xfrm>
-            <a:off x="2190750" y="7600950"/>
+            <a:off x="2190750" y="7153275"/>
             <a:ext cx="7048500" cy="381000"/>
           </a:xfrm>
           <a:prstGeom prst="rect">
@@ -18963,7 +18963,7 @@
               <a:buNone/>
             </a:pPr>
             <a:r>
-              <a:rPr lang="en-US" sz="2100" dirty="0" spc="3" kern="0">
+              <a:rPr lang="en-US" sz="2100" dirty="0" spc="-2" kern="0">
                 <a:solidFill>
                   <a:srgbClr val="6B6A66"/>
                 </a:solidFill>
@@ -18971,7 +18971,51 @@
                 <a:ea typeface="Be Vietnam Pro" pitchFamily="34" charset="-122"/>
                 <a:cs typeface="Be Vietnam Pro" pitchFamily="34" charset="-120"/>
               </a:rPr>
-              <a:t>kiểm</a:t>
+              <a:t>aud,</a:t>
+            </a:r>
+            <a:r>
+              <a:rPr lang="en-US" sz="2100" dirty="0" spc="2" kern="0">
+                <a:solidFill>
+                  <a:srgbClr val="6B6A66"/>
+                </a:solidFill>
+                <a:latin typeface="Be Vietnam Pro" pitchFamily="34" charset="0"/>
+                <a:ea typeface="Be Vietnam Pro" pitchFamily="34" charset="-122"/>
+                <a:cs typeface="Be Vietnam Pro" pitchFamily="34" charset="-120"/>
+              </a:rPr>
+              <a:t> iss</a:t>
+            </a:r>
+            <a:r>
+              <a:rPr lang="en-US" sz="2100" dirty="0" spc="0" kern="0">
+                <a:solidFill>
+                  <a:srgbClr val="6B6A66"/>
+                </a:solidFill>
+                <a:latin typeface="Be Vietnam Pro" pitchFamily="34" charset="0"/>
+                <a:ea typeface="Be Vietnam Pro" pitchFamily="34" charset="-122"/>
+                <a:cs typeface="Be Vietnam Pro" pitchFamily="34" charset="-120"/>
+              </a:rPr>
+              <a:t> chỉ</a:t>
+            </a:r>
+            <a:r>
+              <a:rPr lang="en-US" sz="2100" dirty="0" spc="1" kern="0">
+                <a:solidFill>
+                  <a:srgbClr val="6B6A66"/>
+                </a:solidFill>
+                <a:latin typeface="Be Vietnam Pro" pitchFamily="34" charset="0"/>
+                <a:ea typeface="Be Vietnam Pro" pitchFamily="34" charset="-122"/>
+                <a:cs typeface="Be Vietnam Pro" pitchFamily="34" charset="-120"/>
+              </a:rPr>
+              <a:t> kiểm khi nêu</a:t>
+            </a:r>
+            <a:r>
+              <a:rPr lang="en-US" sz="2100" dirty="0" spc="-3" kern="0">
+                <a:solidFill>
+                  <a:srgbClr val="6B6A66"/>
+                </a:solidFill>
+                <a:latin typeface="Be Vietnam Pro" pitchFamily="34" charset="0"/>
+                <a:ea typeface="Be Vietnam Pro" pitchFamily="34" charset="-122"/>
+                <a:cs typeface="Be Vietnam Pro" pitchFamily="34" charset="-120"/>
+              </a:rPr>
+              <a:t> bên</a:t>
             </a:r>
             <a:r>
               <a:rPr lang="en-US" sz="2100" dirty="0" spc="-1" kern="0">
@@ -18982,10 +19026,10 @@
                 <a:ea typeface="Be Vietnam Pro" pitchFamily="34" charset="-122"/>
                 <a:cs typeface="Be Vietnam Pro" pitchFamily="34" charset="-120"/>
               </a:rPr>
-              <a:t> tiếp</a:t>
-            </a:r>
-            <a:r>
-              <a:rPr lang="en-US" sz="2100" dirty="0" spc="-16" kern="0">
+              <a:t> mong</a:t>
+            </a:r>
+            <a:r>
+              <a:rPr lang="en-US" sz="2100" dirty="0" spc="10" kern="0">
                 <a:solidFill>
                   <a:srgbClr val="6B6A66"/>
                 </a:solidFill>
@@ -18993,18 +19037,7 @@
                 <a:ea typeface="Be Vietnam Pro" pitchFamily="34" charset="-122"/>
                 <a:cs typeface="Be Vietnam Pro" pitchFamily="34" charset="-120"/>
               </a:rPr>
-              <a:t> exp,</a:t>
-            </a:r>
-            <a:r>
-              <a:rPr lang="en-US" sz="2100" dirty="0" spc="-2" kern="0">
-                <a:solidFill>
-                  <a:srgbClr val="6B6A66"/>
-                </a:solidFill>
-                <a:latin typeface="Be Vietnam Pro" pitchFamily="34" charset="0"/>
-                <a:ea typeface="Be Vietnam Pro" pitchFamily="34" charset="-122"/>
-                <a:cs typeface="Be Vietnam Pro" pitchFamily="34" charset="-120"/>
-              </a:rPr>
-              <a:t> nbf, aud</a:t>
+              <a:t> đợi</a:t>
             </a:r>
             <a:endParaRPr lang="en-US" sz="2100" dirty="0"/>
           </a:p>
@@ -19018,7 +19051,7 @@
         </p:nvSpPr>
         <p:spPr>
           <a:xfrm>
-            <a:off x="2190750" y="8077200"/>
+            <a:off x="2190750" y="7991475"/>
             <a:ext cx="7048500" cy="323850"/>
           </a:xfrm>
           <a:prstGeom prst="rect">
@@ -19156,7 +19189,7 @@
         </p:nvSpPr>
         <p:spPr>
           <a:xfrm>
-            <a:off x="9525000" y="6819900"/>
+            <a:off x="9525000" y="6229350"/>
             <a:ext cx="2762250" cy="514350"/>
           </a:xfrm>
           <a:prstGeom prst="roundRect">
@@ -19221,7 +19254,7 @@
         </p:nvSpPr>
         <p:spPr>
           <a:xfrm>
-            <a:off x="12401550" y="7077075"/>
+            <a:off x="12401550" y="6486525"/>
             <a:ext cx="1104900" cy="0"/>
           </a:xfrm>
           <a:prstGeom prst="line">
@@ -19246,7 +19279,7 @@
         </p:nvSpPr>
         <p:spPr>
           <a:xfrm>
-            <a:off x="13620750" y="6819900"/>
+            <a:off x="13620750" y="6229350"/>
             <a:ext cx="3371850" cy="514350"/>
           </a:xfrm>
           <a:prstGeom prst="roundRect">
@@ -19294,7 +19327,7 @@
         </p:nvSpPr>
         <p:spPr>
           <a:xfrm>
-            <a:off x="9525000" y="7505700"/>
+            <a:off x="9525000" y="6877050"/>
             <a:ext cx="2762250" cy="514350"/>
           </a:xfrm>
           <a:prstGeom prst="roundRect">
@@ -19370,7 +19403,7 @@
         </p:nvSpPr>
         <p:spPr>
           <a:xfrm>
-            <a:off x="12401550" y="7762875"/>
+            <a:off x="12401550" y="7134225"/>
             <a:ext cx="1104900" cy="0"/>
           </a:xfrm>
           <a:prstGeom prst="line">
@@ -19395,7 +19428,7 @@
         </p:nvSpPr>
         <p:spPr>
           <a:xfrm>
-            <a:off x="13620750" y="7505700"/>
+            <a:off x="13620750" y="6877050"/>
             <a:ext cx="3371850" cy="514350"/>
           </a:xfrm>
           <a:prstGeom prst="roundRect">
@@ -19443,7 +19476,7 @@
         </p:nvSpPr>
         <p:spPr>
           <a:xfrm>
-            <a:off x="9525000" y="8191500"/>
+            <a:off x="9525000" y="7524750"/>
             <a:ext cx="2762250" cy="514350"/>
           </a:xfrm>
           <a:prstGeom prst="roundRect">
@@ -19508,7 +19541,7 @@
         </p:nvSpPr>
         <p:spPr>
           <a:xfrm>
-            <a:off x="12401550" y="8448675"/>
+            <a:off x="12401550" y="7781925"/>
             <a:ext cx="1104900" cy="0"/>
           </a:xfrm>
           <a:prstGeom prst="line">
@@ -19533,7 +19566,7 @@
         </p:nvSpPr>
         <p:spPr>
           <a:xfrm>
-            <a:off x="13620750" y="8191500"/>
+            <a:off x="13620750" y="7524750"/>
             <a:ext cx="3371850" cy="514350"/>
           </a:xfrm>
           <a:prstGeom prst="roundRect">
@@ -19933,7 +19966,261 @@
       </p:sp>
       <p:sp>
         <p:nvSpPr>
-          <p:cNvPr id="48" name="Shape 46"/>
+          <p:cNvPr id="48" name="Text 46"/>
+          <p:cNvSpPr/>
+          <p:nvPr/>
+        </p:nvSpPr>
+        <p:spPr>
+          <a:xfrm>
+            <a:off x="2190750" y="7629525"/>
+            <a:ext cx="7048500" cy="323850"/>
+          </a:xfrm>
+          <a:prstGeom prst="rect">
+            <a:avLst/>
+          </a:prstGeom>
+          <a:noFill/>
+          <a:ln/>
+        </p:spPr>
+        <p:txBody>
+          <a:bodyPr wrap="square" lIns="0" tIns="0" rIns="0" bIns="0" rtlCol="0" anchor="ctr"/>
+          <a:lstStyle/>
+          <a:p>
+            <a:pPr algn="l" indent="0" marL="0">
+              <a:buNone/>
+            </a:pPr>
+            <a:r>
+              <a:rPr lang="en-US" sz="1800" dirty="0" spc="-3" kern="0">
+                <a:solidFill>
+                  <a:srgbClr val="6B6A66"/>
+                </a:solidFill>
+                <a:latin typeface="Be Vietnam Pro" pitchFamily="34" charset="0"/>
+                <a:ea typeface="Be Vietnam Pro" pitchFamily="34" charset="-122"/>
+                <a:cs typeface="Be Vietnam Pro" pitchFamily="34" charset="-120"/>
+              </a:rPr>
+              <a:t>Không</a:t>
+            </a:r>
+            <a:r>
+              <a:rPr lang="en-US" sz="1800" dirty="0" spc="-4" kern="0">
+                <a:solidFill>
+                  <a:srgbClr val="6B6A66"/>
+                </a:solidFill>
+                <a:latin typeface="Be Vietnam Pro" pitchFamily="34" charset="0"/>
+                <a:ea typeface="Be Vietnam Pro" pitchFamily="34" charset="-122"/>
+                <a:cs typeface="Be Vietnam Pro" pitchFamily="34" charset="-120"/>
+              </a:rPr>
+              <a:t> nêu</a:t>
+            </a:r>
+            <a:r>
+              <a:rPr lang="en-US" sz="1800" dirty="0" spc="1" kern="0">
+                <a:solidFill>
+                  <a:srgbClr val="6B6A66"/>
+                </a:solidFill>
+                <a:latin typeface="Be Vietnam Pro" pitchFamily="34" charset="0"/>
+                <a:ea typeface="Be Vietnam Pro" pitchFamily="34" charset="-122"/>
+                <a:cs typeface="Be Vietnam Pro" pitchFamily="34" charset="-120"/>
+              </a:rPr>
+              <a:t> iss</a:t>
+            </a:r>
+            <a:r>
+              <a:rPr lang="en-US" sz="1800" dirty="0" spc="-1" kern="0">
+                <a:solidFill>
+                  <a:srgbClr val="6B6A66"/>
+                </a:solidFill>
+                <a:latin typeface="Be Vietnam Pro" pitchFamily="34" charset="0"/>
+                <a:ea typeface="Be Vietnam Pro" pitchFamily="34" charset="-122"/>
+                <a:cs typeface="Be Vietnam Pro" pitchFamily="34" charset="-120"/>
+              </a:rPr>
+              <a:t> thì</a:t>
+            </a:r>
+            <a:r>
+              <a:rPr lang="en-US" sz="1800" dirty="0" spc="1" kern="0">
+                <a:solidFill>
+                  <a:srgbClr val="6B6A66"/>
+                </a:solidFill>
+                <a:latin typeface="Be Vietnam Pro" pitchFamily="34" charset="0"/>
+                <a:ea typeface="Be Vietnam Pro" pitchFamily="34" charset="-122"/>
+                <a:cs typeface="Be Vietnam Pro" pitchFamily="34" charset="-120"/>
+              </a:rPr>
+              <a:t> iss</a:t>
+            </a:r>
+            <a:r>
+              <a:rPr lang="en-US" sz="1800" dirty="0" spc="0" kern="0">
+                <a:solidFill>
+                  <a:srgbClr val="6B6A66"/>
+                </a:solidFill>
+                <a:latin typeface="Be Vietnam Pro" pitchFamily="34" charset="0"/>
+                <a:ea typeface="Be Vietnam Pro" pitchFamily="34" charset="-122"/>
+                <a:cs typeface="Be Vietnam Pro" pitchFamily="34" charset="-120"/>
+              </a:rPr>
+              <a:t> nào</a:t>
+            </a:r>
+            <a:r>
+              <a:rPr lang="en-US" sz="1800" dirty="0" spc="-1" kern="0">
+                <a:solidFill>
+                  <a:srgbClr val="6B6A66"/>
+                </a:solidFill>
+                <a:latin typeface="Be Vietnam Pro" pitchFamily="34" charset="0"/>
+                <a:ea typeface="Be Vietnam Pro" pitchFamily="34" charset="-122"/>
+                <a:cs typeface="Be Vietnam Pro" pitchFamily="34" charset="-120"/>
+              </a:rPr>
+              <a:t> cũng</a:t>
+            </a:r>
+            <a:r>
+              <a:rPr lang="en-US" sz="1800" dirty="0" spc="1" kern="0">
+                <a:solidFill>
+                  <a:srgbClr val="6B6A66"/>
+                </a:solidFill>
+                <a:latin typeface="Be Vietnam Pro" pitchFamily="34" charset="0"/>
+                <a:ea typeface="Be Vietnam Pro" pitchFamily="34" charset="-122"/>
+                <a:cs typeface="Be Vietnam Pro" pitchFamily="34" charset="-120"/>
+              </a:rPr>
+              <a:t> qua.</a:t>
+            </a:r>
+            <a:endParaRPr lang="en-US" sz="1800" dirty="0"/>
+          </a:p>
+        </p:txBody>
+      </p:sp>
+      <p:sp>
+        <p:nvSpPr>
+          <p:cNvPr id="49" name="Text 47"/>
+          <p:cNvSpPr/>
+          <p:nvPr/>
+        </p:nvSpPr>
+        <p:spPr>
+          <a:xfrm>
+            <a:off x="9525000" y="8172450"/>
+            <a:ext cx="2762250" cy="514350"/>
+          </a:xfrm>
+          <a:prstGeom prst="roundRect">
+            <a:avLst>
+              <a:gd name="adj" fmla="val 50000"/>
+            </a:avLst>
+          </a:prstGeom>
+          <a:solidFill>
+            <a:srgbClr val="14161C"/>
+          </a:solidFill>
+          <a:ln/>
+        </p:spPr>
+        <p:txBody>
+          <a:bodyPr wrap="square" lIns="0" tIns="0" rIns="0" bIns="0" rtlCol="0" anchor="ctr"/>
+          <a:lstStyle/>
+          <a:p>
+            <a:pPr algn="ctr" indent="0" marL="0">
+              <a:buNone/>
+            </a:pPr>
+            <a:r>
+              <a:rPr lang="en-US" sz="1950" dirty="0" spc="1" kern="0">
+                <a:solidFill>
+                  <a:srgbClr val="F3EEE3"/>
+                </a:solidFill>
+                <a:latin typeface="Be Vietnam Pro SemiBold" pitchFamily="34" charset="0"/>
+                <a:ea typeface="Be Vietnam Pro SemiBold" pitchFamily="34" charset="-122"/>
+                <a:cs typeface="Be Vietnam Pro SemiBold" pitchFamily="34" charset="-120"/>
+              </a:rPr>
+              <a:t>iss</a:t>
+            </a:r>
+            <a:r>
+              <a:rPr lang="en-US" sz="1950" dirty="0" spc="-4" kern="0">
+                <a:solidFill>
+                  <a:srgbClr val="F3EEE3"/>
+                </a:solidFill>
+                <a:latin typeface="Be Vietnam Pro SemiBold" pitchFamily="34" charset="0"/>
+                <a:ea typeface="Be Vietnam Pro SemiBold" pitchFamily="34" charset="-122"/>
+                <a:cs typeface="Be Vietnam Pro SemiBold" pitchFamily="34" charset="-120"/>
+              </a:rPr>
+              <a:t> không</a:t>
+            </a:r>
+            <a:r>
+              <a:rPr lang="en-US" sz="1950" dirty="0" spc="-1" kern="0">
+                <a:solidFill>
+                  <a:srgbClr val="F3EEE3"/>
+                </a:solidFill>
+                <a:latin typeface="Be Vietnam Pro SemiBold" pitchFamily="34" charset="0"/>
+                <a:ea typeface="Be Vietnam Pro SemiBold" pitchFamily="34" charset="-122"/>
+                <a:cs typeface="Be Vietnam Pro SemiBold" pitchFamily="34" charset="-120"/>
+              </a:rPr>
+              <a:t> khớp</a:t>
+            </a:r>
+            <a:endParaRPr lang="en-US" sz="1950" dirty="0"/>
+          </a:p>
+        </p:txBody>
+      </p:sp>
+      <p:sp>
+        <p:nvSpPr>
+          <p:cNvPr id="50" name="Connector line-1792381647150-636886181"/>
+          <p:cNvSpPr/>
+          <p:nvPr/>
+        </p:nvSpPr>
+        <p:spPr>
+          <a:xfrm>
+            <a:off x="12401550" y="8429625"/>
+            <a:ext cx="1104900" cy="0"/>
+          </a:xfrm>
+          <a:prstGeom prst="line">
+            <a:avLst/>
+          </a:prstGeom>
+          <a:noFill/>
+          <a:ln w="38100">
+            <a:solidFill>
+              <a:srgbClr val="14161C"/>
+            </a:solidFill>
+            <a:prstDash val="solid"/>
+            <a:headEnd type="none"/>
+            <a:tailEnd type="triangle" w="lg" len="lg"/>
+          </a:ln>
+        </p:spPr>
+      </p:sp>
+      <p:sp>
+        <p:nvSpPr>
+          <p:cNvPr id="51" name="Text 49"/>
+          <p:cNvSpPr/>
+          <p:nvPr/>
+        </p:nvSpPr>
+        <p:spPr>
+          <a:xfrm>
+            <a:off x="13620750" y="8172450"/>
+            <a:ext cx="3371850" cy="514350"/>
+          </a:xfrm>
+          <a:prstGeom prst="roundRect">
+            <a:avLst>
+              <a:gd name="adj" fmla="val 50000"/>
+            </a:avLst>
+          </a:prstGeom>
+          <a:solidFill>
+            <a:srgbClr val="F8D9D0"/>
+          </a:solidFill>
+          <a:ln w="19050">
+            <a:solidFill>
+              <a:srgbClr val="E8472B"/>
+            </a:solidFill>
+            <a:prstDash val="solid"/>
+          </a:ln>
+        </p:spPr>
+        <p:txBody>
+          <a:bodyPr wrap="square" lIns="0" tIns="0" rIns="0" bIns="0" rtlCol="0" anchor="ctr"/>
+          <a:lstStyle/>
+          <a:p>
+            <a:pPr algn="ctr" indent="0" marL="0">
+              <a:buNone/>
+            </a:pPr>
+            <a:r>
+              <a:rPr lang="en-US" sz="1800" b="1" dirty="0" spc="-8" kern="0">
+                <a:solidFill>
+                  <a:srgbClr val="E8472B"/>
+                </a:solidFill>
+                <a:latin typeface="Be Vietnam Pro" pitchFamily="34" charset="0"/>
+                <a:ea typeface="Be Vietnam Pro" pitchFamily="34" charset="-122"/>
+                <a:cs typeface="Be Vietnam Pro" pitchFamily="34" charset="-120"/>
+              </a:rPr>
+              <a:t>InvalidIssuerError</a:t>
+            </a:r>
+            <a:endParaRPr lang="en-US" sz="1800" dirty="0"/>
+          </a:p>
+        </p:txBody>
+      </p:sp>
+      <p:sp>
+        <p:nvSpPr>
+          <p:cNvPr id="52" name="Shape 50"/>
           <p:cNvSpPr/>
           <p:nvPr/>
         </p:nvSpPr>
@@ -19957,7 +20244,7 @@
       </p:sp>
       <p:pic>
         <p:nvPicPr>
-          <p:cNvPr id="49" name="Moda image moda-export-watermark-33af6f5c-62d3-4f33-ba49-f0e84264d57e" descr="">    </p:cNvPr>
+          <p:cNvPr id="53" name="Moda image moda-export-watermark-33af6f5c-62d3-4f33-ba49-f0e84264d57e" descr="">    </p:cNvPr>
           <p:cNvPicPr>
             <a:picLocks noChangeAspect="1"/>
           </p:cNvPicPr>

--- a/system-design-101/vi/lessons/sd-14-020/slides/sd-14-020.pptx
+++ b/system-design-101/vi/lessons/sd-14-020/slides/sd-14-020.pptx
@@ -18963,6 +18963,61 @@
               <a:buNone/>
             </a:pPr>
             <a:r>
+              <a:rPr lang="en-US" sz="2100" dirty="0" spc="0" kern="0">
+                <a:solidFill>
+                  <a:srgbClr val="6B6A66"/>
+                </a:solidFill>
+                <a:latin typeface="Be Vietnam Pro" pitchFamily="34" charset="0"/>
+                <a:ea typeface="Be Vietnam Pro" pitchFamily="34" charset="-122"/>
+                <a:cs typeface="Be Vietnam Pro" pitchFamily="34" charset="-120"/>
+              </a:rPr>
+              <a:t>Mặc</a:t>
+            </a:r>
+            <a:r>
+              <a:rPr lang="en-US" sz="2100" dirty="0" spc="18" kern="0">
+                <a:solidFill>
+                  <a:srgbClr val="6B6A66"/>
+                </a:solidFill>
+                <a:latin typeface="Be Vietnam Pro" pitchFamily="34" charset="0"/>
+                <a:ea typeface="Be Vietnam Pro" pitchFamily="34" charset="-122"/>
+                <a:cs typeface="Be Vietnam Pro" pitchFamily="34" charset="-120"/>
+              </a:rPr>
+              <a:t> định</a:t>
+            </a:r>
+            <a:r>
+              <a:rPr lang="en-US" sz="2100" dirty="0" spc="-1" kern="0">
+                <a:solidFill>
+                  <a:srgbClr val="6B6A66"/>
+                </a:solidFill>
+                <a:latin typeface="Be Vietnam Pro" pitchFamily="34" charset="0"/>
+                <a:ea typeface="Be Vietnam Pro" pitchFamily="34" charset="-122"/>
+                <a:cs typeface="Be Vietnam Pro" pitchFamily="34" charset="-120"/>
+              </a:rPr>
+              <a:t> khác nhau:</a:t>
+            </a:r>
+            <a:r>
+              <a:rPr lang="en-US" sz="2100" dirty="0" spc="-3" kern="0">
+                <a:solidFill>
+                  <a:srgbClr val="6B6A66"/>
+                </a:solidFill>
+                <a:latin typeface="Be Vietnam Pro" pitchFamily="34" charset="0"/>
+                <a:ea typeface="Be Vietnam Pro" pitchFamily="34" charset="-122"/>
+                <a:cs typeface="Be Vietnam Pro" pitchFamily="34" charset="-120"/>
+              </a:rPr>
+              <a:t> có aud</a:t>
+            </a:r>
+            <a:r>
+              <a:rPr lang="en-US" sz="2100" dirty="0" spc="0" kern="0">
+                <a:solidFill>
+                  <a:srgbClr val="6B6A66"/>
+                </a:solidFill>
+                <a:latin typeface="Be Vietnam Pro" pitchFamily="34" charset="0"/>
+                <a:ea typeface="Be Vietnam Pro" pitchFamily="34" charset="-122"/>
+                <a:cs typeface="Be Vietnam Pro" pitchFamily="34" charset="-120"/>
+              </a:rPr>
+              <a:t> thì</a:t>
+            </a:r>
+            <a:r>
               <a:rPr lang="en-US" sz="2100" dirty="0" spc="-2" kern="0">
                 <a:solidFill>
                   <a:srgbClr val="6B6A66"/>
@@ -18971,10 +19026,10 @@
                 <a:ea typeface="Be Vietnam Pro" pitchFamily="34" charset="-122"/>
                 <a:cs typeface="Be Vietnam Pro" pitchFamily="34" charset="-120"/>
               </a:rPr>
-              <a:t>aud,</a:t>
-            </a:r>
-            <a:r>
-              <a:rPr lang="en-US" sz="2100" dirty="0" spc="2" kern="0">
+              <a:t> luôn</a:t>
+            </a:r>
+            <a:r>
+              <a:rPr lang="en-US" sz="2100" dirty="0" spc="-1" kern="0">
                 <a:solidFill>
                   <a:srgbClr val="6B6A66"/>
                 </a:solidFill>
@@ -18982,10 +19037,10 @@
                 <a:ea typeface="Be Vietnam Pro" pitchFamily="34" charset="-122"/>
                 <a:cs typeface="Be Vietnam Pro" pitchFamily="34" charset="-120"/>
               </a:rPr>
-              <a:t> iss</a:t>
-            </a:r>
-            <a:r>
-              <a:rPr lang="en-US" sz="2100" dirty="0" spc="0" kern="0">
+              <a:t> bị</a:t>
+            </a:r>
+            <a:r>
+              <a:rPr lang="en-US" sz="2100" dirty="0" spc="1" kern="0">
                 <a:solidFill>
                   <a:srgbClr val="6B6A66"/>
                 </a:solidFill>
@@ -18993,51 +19048,7 @@
                 <a:ea typeface="Be Vietnam Pro" pitchFamily="34" charset="-122"/>
                 <a:cs typeface="Be Vietnam Pro" pitchFamily="34" charset="-120"/>
               </a:rPr>
-              <a:t> chỉ</a:t>
-            </a:r>
-            <a:r>
-              <a:rPr lang="en-US" sz="2100" dirty="0" spc="1" kern="0">
-                <a:solidFill>
-                  <a:srgbClr val="6B6A66"/>
-                </a:solidFill>
-                <a:latin typeface="Be Vietnam Pro" pitchFamily="34" charset="0"/>
-                <a:ea typeface="Be Vietnam Pro" pitchFamily="34" charset="-122"/>
-                <a:cs typeface="Be Vietnam Pro" pitchFamily="34" charset="-120"/>
-              </a:rPr>
-              <a:t> kiểm khi nêu</a:t>
-            </a:r>
-            <a:r>
-              <a:rPr lang="en-US" sz="2100" dirty="0" spc="-3" kern="0">
-                <a:solidFill>
-                  <a:srgbClr val="6B6A66"/>
-                </a:solidFill>
-                <a:latin typeface="Be Vietnam Pro" pitchFamily="34" charset="0"/>
-                <a:ea typeface="Be Vietnam Pro" pitchFamily="34" charset="-122"/>
-                <a:cs typeface="Be Vietnam Pro" pitchFamily="34" charset="-120"/>
-              </a:rPr>
-              <a:t> bên</a:t>
-            </a:r>
-            <a:r>
-              <a:rPr lang="en-US" sz="2100" dirty="0" spc="-1" kern="0">
-                <a:solidFill>
-                  <a:srgbClr val="6B6A66"/>
-                </a:solidFill>
-                <a:latin typeface="Be Vietnam Pro" pitchFamily="34" charset="0"/>
-                <a:ea typeface="Be Vietnam Pro" pitchFamily="34" charset="-122"/>
-                <a:cs typeface="Be Vietnam Pro" pitchFamily="34" charset="-120"/>
-              </a:rPr>
-              <a:t> mong</a:t>
-            </a:r>
-            <a:r>
-              <a:rPr lang="en-US" sz="2100" dirty="0" spc="10" kern="0">
-                <a:solidFill>
-                  <a:srgbClr val="6B6A66"/>
-                </a:solidFill>
-                <a:latin typeface="Be Vietnam Pro" pitchFamily="34" charset="0"/>
-                <a:ea typeface="Be Vietnam Pro" pitchFamily="34" charset="-122"/>
-                <a:cs typeface="Be Vietnam Pro" pitchFamily="34" charset="-120"/>
-              </a:rPr>
-              <a:t> đợi</a:t>
+              <a:t> kiểm</a:t>
             </a:r>
             <a:endParaRPr lang="en-US" sz="2100" dirty="0"/>
           </a:p>

--- a/system-design-101/vi/lessons/sd-14-020/slides/sd-14-020.pptx
+++ b/system-design-101/vi/lessons/sd-14-020/slides/sd-14-020.pptx
@@ -3766,93 +3766,18 @@
       </p:sp>
       <p:sp>
         <p:nvSpPr>
-          <p:cNvPr id="3" name="Text 1"/>
-          <p:cNvSpPr/>
-          <p:nvPr/>
-        </p:nvSpPr>
-        <p:spPr>
-          <a:xfrm>
-            <a:off x="914400" y="1333500"/>
-            <a:ext cx="16459200" cy="1238250"/>
-          </a:xfrm>
-          <a:prstGeom prst="rect">
-            <a:avLst/>
-          </a:prstGeom>
-          <a:noFill/>
-          <a:ln/>
-        </p:spPr>
-        <p:txBody>
-          <a:bodyPr wrap="square" lIns="0" tIns="64294" rIns="0" bIns="-64294" rtlCol="0" anchor="t"/>
-          <a:lstStyle/>
-          <a:p>
-            <a:pPr algn="l" indent="0" marL="0">
-              <a:lnSpc>
-                <a:spcPts val="7875"/>
-              </a:lnSpc>
-              <a:buNone/>
-            </a:pPr>
-            <a:r>
-              <a:rPr lang="en-US" sz="7500" dirty="0" spc="-64" kern="0">
-                <a:solidFill>
-                  <a:srgbClr val="F3EEE3"/>
-                </a:solidFill>
-                <a:latin typeface="Bricolage Grotesque ExtraBold" pitchFamily="34" charset="0"/>
-                <a:ea typeface="Bricolage Grotesque ExtraBold" pitchFamily="34" charset="-122"/>
-                <a:cs typeface="Bricolage Grotesque ExtraBold" pitchFamily="34" charset="-120"/>
-              </a:rPr>
-              <a:t>Từ</a:t>
-            </a:r>
-            <a:r>
-              <a:rPr lang="en-US" sz="7500" dirty="0" spc="-8" kern="0">
-                <a:solidFill>
-                  <a:srgbClr val="F3EEE3"/>
-                </a:solidFill>
-                <a:latin typeface="Bricolage Grotesque ExtraBold" pitchFamily="34" charset="0"/>
-                <a:ea typeface="Bricolage Grotesque ExtraBold" pitchFamily="34" charset="-122"/>
-                <a:cs typeface="Bricolage Grotesque ExtraBold" pitchFamily="34" charset="-120"/>
-              </a:rPr>
-              <a:t> khóa</a:t>
-            </a:r>
-            <a:r>
-              <a:rPr lang="en-US" sz="7500" dirty="0" spc="0" kern="0">
-                <a:solidFill>
-                  <a:srgbClr val="F3EEE3"/>
-                </a:solidFill>
-                <a:latin typeface="Bricolage Grotesque ExtraBold" pitchFamily="34" charset="0"/>
-                <a:ea typeface="Bricolage Grotesque ExtraBold" pitchFamily="34" charset="-122"/>
-                <a:cs typeface="Bricolage Grotesque ExtraBold" pitchFamily="34" charset="-120"/>
-              </a:rPr>
-              <a:t> cần</a:t>
-            </a:r>
-            <a:r>
-              <a:rPr lang="en-US" sz="7500" dirty="0" spc="2" kern="0">
-                <a:solidFill>
-                  <a:srgbClr val="F3EEE3"/>
-                </a:solidFill>
-                <a:latin typeface="Bricolage Grotesque ExtraBold" pitchFamily="34" charset="0"/>
-                <a:ea typeface="Bricolage Grotesque ExtraBold" pitchFamily="34" charset="-122"/>
-                <a:cs typeface="Bricolage Grotesque ExtraBold" pitchFamily="34" charset="-120"/>
-              </a:rPr>
-              <a:t> nhớ</a:t>
-            </a:r>
-            <a:endParaRPr lang="en-US" sz="7500" dirty="0"/>
-          </a:p>
-        </p:txBody>
-      </p:sp>
-      <p:sp>
-        <p:nvSpPr>
-          <p:cNvPr id="4" name="Shape 2"/>
-          <p:cNvSpPr/>
-          <p:nvPr/>
-        </p:nvSpPr>
-        <p:spPr>
-          <a:xfrm>
-            <a:off x="914400" y="2571750"/>
-            <a:ext cx="3914775" cy="2381250"/>
+          <p:cNvPr id="3" name="Shape 1"/>
+          <p:cNvSpPr/>
+          <p:nvPr/>
+        </p:nvSpPr>
+        <p:spPr>
+          <a:xfrm>
+            <a:off x="914400" y="1428750"/>
+            <a:ext cx="4000500" cy="1962150"/>
           </a:xfrm>
           <a:prstGeom prst="roundRect">
             <a:avLst>
-              <a:gd name="adj" fmla="val 9600"/>
+              <a:gd name="adj" fmla="val 10680"/>
             </a:avLst>
           </a:prstGeom>
           <a:solidFill>
@@ -3863,13 +3788,38 @@
       </p:sp>
       <p:sp>
         <p:nvSpPr>
+          <p:cNvPr id="4" name="Connector line-1792388047692-689212688"/>
+          <p:cNvSpPr/>
+          <p:nvPr/>
+        </p:nvSpPr>
+        <p:spPr>
+          <a:xfrm>
+            <a:off x="1333500" y="1657350"/>
+            <a:ext cx="3314700" cy="0"/>
+          </a:xfrm>
+          <a:prstGeom prst="line">
+            <a:avLst/>
+          </a:prstGeom>
+          <a:noFill/>
+          <a:ln w="28575">
+            <a:solidFill>
+              <a:srgbClr val="9A98A0"/>
+            </a:solidFill>
+            <a:prstDash val="solid"/>
+            <a:headEnd type="none"/>
+            <a:tailEnd type="none"/>
+          </a:ln>
+        </p:spPr>
+      </p:sp>
+      <p:sp>
+        <p:nvSpPr>
           <p:cNvPr id="5" name="Shape 3"/>
           <p:cNvSpPr/>
           <p:nvPr/>
         </p:nvSpPr>
         <p:spPr>
           <a:xfrm>
-            <a:off x="1181100" y="2819400"/>
+            <a:off x="1181100" y="1581150"/>
             <a:ext cx="152400" cy="152400"/>
           </a:xfrm>
           <a:prstGeom prst="ellipse">
@@ -3888,14 +3838,211 @@
       </p:sp>
       <p:sp>
         <p:nvSpPr>
-          <p:cNvPr id="6" name="Connector line-1792337941650-437097555"/>
-          <p:cNvSpPr/>
-          <p:nvPr/>
-        </p:nvSpPr>
-        <p:spPr>
-          <a:xfrm>
-            <a:off x="1333500" y="2895600"/>
-            <a:ext cx="3152775" cy="0"/>
+          <p:cNvPr id="6" name="Text 4"/>
+          <p:cNvSpPr/>
+          <p:nvPr/>
+        </p:nvSpPr>
+        <p:spPr>
+          <a:xfrm>
+            <a:off x="1181100" y="1771650"/>
+            <a:ext cx="3467100" cy="400050"/>
+          </a:xfrm>
+          <a:prstGeom prst="rect">
+            <a:avLst/>
+          </a:prstGeom>
+          <a:noFill/>
+          <a:ln/>
+        </p:spPr>
+        <p:txBody>
+          <a:bodyPr wrap="square" lIns="0" tIns="0" rIns="0" bIns="0" rtlCol="0" anchor="t"/>
+          <a:lstStyle/>
+          <a:p>
+            <a:pPr algn="l" indent="0" marL="0">
+              <a:buNone/>
+            </a:pPr>
+            <a:r>
+              <a:rPr lang="en-US" sz="2400" dirty="0" spc="6" kern="0">
+                <a:solidFill>
+                  <a:srgbClr val="F3EEE3"/>
+                </a:solidFill>
+                <a:latin typeface="Bricolage Grotesque ExtraBold" pitchFamily="34" charset="0"/>
+                <a:ea typeface="Bricolage Grotesque ExtraBold" pitchFamily="34" charset="-122"/>
+                <a:cs typeface="Bricolage Grotesque ExtraBold" pitchFamily="34" charset="-120"/>
+              </a:rPr>
+              <a:t>JWT</a:t>
+            </a:r>
+            <a:endParaRPr lang="en-US" sz="2400" dirty="0"/>
+          </a:p>
+        </p:txBody>
+      </p:sp>
+      <p:sp>
+        <p:nvSpPr>
+          <p:cNvPr id="7" name="Text 5"/>
+          <p:cNvSpPr/>
+          <p:nvPr/>
+        </p:nvSpPr>
+        <p:spPr>
+          <a:xfrm>
+            <a:off x="1181100" y="2171700"/>
+            <a:ext cx="3467100" cy="533400"/>
+          </a:xfrm>
+          <a:prstGeom prst="rect">
+            <a:avLst/>
+          </a:prstGeom>
+          <a:noFill/>
+          <a:ln/>
+        </p:spPr>
+        <p:txBody>
+          <a:bodyPr wrap="square" lIns="0" tIns="0" rIns="0" bIns="0" rtlCol="0" anchor="t"/>
+          <a:lstStyle/>
+          <a:p>
+            <a:pPr algn="l" indent="0" marL="0">
+              <a:buNone/>
+            </a:pPr>
+            <a:r>
+              <a:rPr lang="en-US" sz="1650" dirty="0" spc="6" kern="0">
+                <a:solidFill>
+                  <a:srgbClr val="9A98A0"/>
+                </a:solidFill>
+                <a:latin typeface="Be Vietnam Pro" pitchFamily="34" charset="0"/>
+                <a:ea typeface="Be Vietnam Pro" pitchFamily="34" charset="-122"/>
+                <a:cs typeface="Be Vietnam Pro" pitchFamily="34" charset="-120"/>
+              </a:rPr>
+              <a:t>JSON</a:t>
+            </a:r>
+            <a:r>
+              <a:rPr lang="en-US" sz="1650" dirty="0" spc="-18" kern="0">
+                <a:solidFill>
+                  <a:srgbClr val="9A98A0"/>
+                </a:solidFill>
+                <a:latin typeface="Be Vietnam Pro" pitchFamily="34" charset="0"/>
+                <a:ea typeface="Be Vietnam Pro" pitchFamily="34" charset="-122"/>
+                <a:cs typeface="Be Vietnam Pro" pitchFamily="34" charset="-120"/>
+              </a:rPr>
+              <a:t> Web</a:t>
+            </a:r>
+            <a:r>
+              <a:rPr lang="en-US" sz="1650" dirty="0" spc="-38" kern="0">
+                <a:solidFill>
+                  <a:srgbClr val="9A98A0"/>
+                </a:solidFill>
+                <a:latin typeface="Be Vietnam Pro" pitchFamily="34" charset="0"/>
+                <a:ea typeface="Be Vietnam Pro" pitchFamily="34" charset="-122"/>
+                <a:cs typeface="Be Vietnam Pro" pitchFamily="34" charset="-120"/>
+              </a:rPr>
+              <a:t> Token</a:t>
+            </a:r>
+            <a:endParaRPr lang="en-US" sz="1650" dirty="0"/>
+          </a:p>
+        </p:txBody>
+      </p:sp>
+      <p:sp>
+        <p:nvSpPr>
+          <p:cNvPr id="8" name="Text 6"/>
+          <p:cNvSpPr/>
+          <p:nvPr/>
+        </p:nvSpPr>
+        <p:spPr>
+          <a:xfrm>
+            <a:off x="1181100" y="2800350"/>
+            <a:ext cx="3467100" cy="552450"/>
+          </a:xfrm>
+          <a:prstGeom prst="rect">
+            <a:avLst/>
+          </a:prstGeom>
+          <a:noFill/>
+          <a:ln/>
+        </p:spPr>
+        <p:txBody>
+          <a:bodyPr wrap="square" lIns="0" tIns="11509" rIns="0" bIns="-11509" rtlCol="0" anchor="t"/>
+          <a:lstStyle/>
+          <a:p>
+            <a:pPr algn="l" indent="0" marL="0">
+              <a:lnSpc>
+                <a:spcPts val="2063"/>
+              </a:lnSpc>
+              <a:buNone/>
+            </a:pPr>
+            <a:r>
+              <a:rPr lang="en-US" sz="1650" dirty="0" spc="0" kern="0">
+                <a:solidFill>
+                  <a:srgbClr val="D8D3C4"/>
+                </a:solidFill>
+                <a:latin typeface="Be Vietnam Pro" pitchFamily="34" charset="0"/>
+                <a:ea typeface="Be Vietnam Pro" pitchFamily="34" charset="-122"/>
+                <a:cs typeface="Be Vietnam Pro" pitchFamily="34" charset="-120"/>
+              </a:rPr>
+              <a:t>Chuỗi chữ</a:t>
+            </a:r>
+            <a:r>
+              <a:rPr lang="en-US" sz="1650" dirty="0" spc="-1" kern="0">
+                <a:solidFill>
+                  <a:srgbClr val="D8D3C4"/>
+                </a:solidFill>
+                <a:latin typeface="Be Vietnam Pro" pitchFamily="34" charset="0"/>
+                <a:ea typeface="Be Vietnam Pro" pitchFamily="34" charset="-122"/>
+                <a:cs typeface="Be Vietnam Pro" pitchFamily="34" charset="-120"/>
+              </a:rPr>
+              <a:t> mang claim</a:t>
+            </a:r>
+            <a:r>
+              <a:rPr lang="en-US" sz="1650" dirty="0" spc="-8" kern="0">
+                <a:solidFill>
+                  <a:srgbClr val="D8D3C4"/>
+                </a:solidFill>
+                <a:latin typeface="Be Vietnam Pro" pitchFamily="34" charset="0"/>
+                <a:ea typeface="Be Vietnam Pro" pitchFamily="34" charset="-122"/>
+                <a:cs typeface="Be Vietnam Pro" pitchFamily="34" charset="-120"/>
+              </a:rPr>
+              <a:t> về</a:t>
+            </a:r>
+            <a:r>
+              <a:rPr lang="en-US" sz="1650" dirty="0" spc="1" kern="0">
+                <a:solidFill>
+                  <a:srgbClr val="D8D3C4"/>
+                </a:solidFill>
+                <a:latin typeface="Be Vietnam Pro" pitchFamily="34" charset="0"/>
+                <a:ea typeface="Be Vietnam Pro" pitchFamily="34" charset="-122"/>
+                <a:cs typeface="Be Vietnam Pro" pitchFamily="34" charset="-120"/>
+              </a:rPr>
+              <a:t> một chủ thể.</a:t>
+            </a:r>
+            <a:endParaRPr lang="en-US" sz="1650" dirty="0"/>
+          </a:p>
+        </p:txBody>
+      </p:sp>
+      <p:sp>
+        <p:nvSpPr>
+          <p:cNvPr id="9" name="Shape 7"/>
+          <p:cNvSpPr/>
+          <p:nvPr/>
+        </p:nvSpPr>
+        <p:spPr>
+          <a:xfrm>
+            <a:off x="5067300" y="1428750"/>
+            <a:ext cx="4000500" cy="1962150"/>
+          </a:xfrm>
+          <a:prstGeom prst="roundRect">
+            <a:avLst>
+              <a:gd name="adj" fmla="val 10680"/>
+            </a:avLst>
+          </a:prstGeom>
+          <a:solidFill>
+            <a:srgbClr val="1E212B"/>
+          </a:solidFill>
+          <a:ln/>
+        </p:spPr>
+      </p:sp>
+      <p:sp>
+        <p:nvSpPr>
+          <p:cNvPr id="10" name="Connector line-1792388047703-189694406"/>
+          <p:cNvSpPr/>
+          <p:nvPr/>
+        </p:nvSpPr>
+        <p:spPr>
+          <a:xfrm>
+            <a:off x="5486400" y="1657350"/>
+            <a:ext cx="3314700" cy="0"/>
           </a:xfrm>
           <a:prstGeom prst="line">
             <a:avLst/>
@@ -3913,14 +4060,39 @@
       </p:sp>
       <p:sp>
         <p:nvSpPr>
-          <p:cNvPr id="7" name="Text 5"/>
-          <p:cNvSpPr/>
-          <p:nvPr/>
-        </p:nvSpPr>
-        <p:spPr>
-          <a:xfrm>
-            <a:off x="1257300" y="3067050"/>
-            <a:ext cx="3238500" cy="628650"/>
+          <p:cNvPr id="11" name="Shape 9"/>
+          <p:cNvSpPr/>
+          <p:nvPr/>
+        </p:nvSpPr>
+        <p:spPr>
+          <a:xfrm>
+            <a:off x="5334000" y="1581150"/>
+            <a:ext cx="152400" cy="152400"/>
+          </a:xfrm>
+          <a:prstGeom prst="ellipse">
+            <a:avLst/>
+          </a:prstGeom>
+          <a:solidFill>
+            <a:srgbClr val="1E212B"/>
+          </a:solidFill>
+          <a:ln w="28575">
+            <a:solidFill>
+              <a:srgbClr val="9A98A0"/>
+            </a:solidFill>
+            <a:prstDash val="solid"/>
+          </a:ln>
+        </p:spPr>
+      </p:sp>
+      <p:sp>
+        <p:nvSpPr>
+          <p:cNvPr id="12" name="Text 10"/>
+          <p:cNvSpPr/>
+          <p:nvPr/>
+        </p:nvSpPr>
+        <p:spPr>
+          <a:xfrm>
+            <a:off x="5334000" y="1771650"/>
+            <a:ext cx="3467100" cy="400050"/>
           </a:xfrm>
           <a:prstGeom prst="rect">
             <a:avLst/>
@@ -3936,7 +4108,7 @@
               <a:buNone/>
             </a:pPr>
             <a:r>
-              <a:rPr lang="en-US" sz="3900" dirty="0" spc="13" kern="0">
+              <a:rPr lang="en-US" sz="2400" dirty="0" spc="2" kern="0">
                 <a:solidFill>
                   <a:srgbClr val="F3EEE3"/>
                 </a:solidFill>
@@ -3944,22 +4116,22 @@
                 <a:ea typeface="Bricolage Grotesque ExtraBold" pitchFamily="34" charset="-122"/>
                 <a:cs typeface="Bricolage Grotesque ExtraBold" pitchFamily="34" charset="-120"/>
               </a:rPr>
-              <a:t>JWT</a:t>
-            </a:r>
-            <a:endParaRPr lang="en-US" sz="3900" dirty="0"/>
+              <a:t>JSON</a:t>
+            </a:r>
+            <a:endParaRPr lang="en-US" sz="2400" dirty="0"/>
           </a:p>
         </p:txBody>
       </p:sp>
       <p:sp>
         <p:nvSpPr>
-          <p:cNvPr id="8" name="Text 6"/>
-          <p:cNvSpPr/>
-          <p:nvPr/>
-        </p:nvSpPr>
-        <p:spPr>
-          <a:xfrm>
-            <a:off x="1257300" y="3714750"/>
-            <a:ext cx="3238500" cy="533400"/>
+          <p:cNvPr id="13" name="Text 11"/>
+          <p:cNvSpPr/>
+          <p:nvPr/>
+        </p:nvSpPr>
+        <p:spPr>
+          <a:xfrm>
+            <a:off x="5334000" y="2171700"/>
+            <a:ext cx="3467100" cy="533400"/>
           </a:xfrm>
           <a:prstGeom prst="rect">
             <a:avLst/>
@@ -3975,7 +4147,7 @@
               <a:buNone/>
             </a:pPr>
             <a:r>
-              <a:rPr lang="en-US" sz="1650" dirty="0" spc="6" kern="0">
+              <a:rPr lang="en-US" sz="1650" dirty="0" spc="-5" kern="0">
                 <a:solidFill>
                   <a:srgbClr val="9A98A0"/>
                 </a:solidFill>
@@ -3983,10 +4155,10 @@
                 <a:ea typeface="Be Vietnam Pro" pitchFamily="34" charset="-122"/>
                 <a:cs typeface="Be Vietnam Pro" pitchFamily="34" charset="-120"/>
               </a:rPr>
-              <a:t>JSON</a:t>
-            </a:r>
-            <a:r>
-              <a:rPr lang="en-US" sz="1650" dirty="0" spc="-18" kern="0">
+              <a:t>JavaScript</a:t>
+            </a:r>
+            <a:r>
+              <a:rPr lang="en-US" sz="1650" dirty="0" spc="-9" kern="0">
                 <a:solidFill>
                   <a:srgbClr val="9A98A0"/>
                 </a:solidFill>
@@ -3994,10 +4166,10 @@
                 <a:ea typeface="Be Vietnam Pro" pitchFamily="34" charset="-122"/>
                 <a:cs typeface="Be Vietnam Pro" pitchFamily="34" charset="-120"/>
               </a:rPr>
-              <a:t> Web</a:t>
-            </a:r>
-            <a:r>
-              <a:rPr lang="en-US" sz="1650" dirty="0" spc="-38" kern="0">
+              <a:t> Object</a:t>
+            </a:r>
+            <a:r>
+              <a:rPr lang="en-US" sz="1650" dirty="0" spc="-10" kern="0">
                 <a:solidFill>
                   <a:srgbClr val="9A98A0"/>
                 </a:solidFill>
@@ -4005,7 +4177,7 @@
                 <a:ea typeface="Be Vietnam Pro" pitchFamily="34" charset="-122"/>
                 <a:cs typeface="Be Vietnam Pro" pitchFamily="34" charset="-120"/>
               </a:rPr>
-              <a:t> Token</a:t>
+              <a:t> Notation</a:t>
             </a:r>
             <a:endParaRPr lang="en-US" sz="1650" dirty="0"/>
           </a:p>
@@ -4013,14 +4185,14 @@
       </p:sp>
       <p:sp>
         <p:nvSpPr>
-          <p:cNvPr id="9" name="Text 7"/>
-          <p:cNvSpPr/>
-          <p:nvPr/>
-        </p:nvSpPr>
-        <p:spPr>
-          <a:xfrm>
-            <a:off x="1257300" y="4286250"/>
-            <a:ext cx="3238500" cy="590550"/>
+          <p:cNvPr id="14" name="Text 12"/>
+          <p:cNvSpPr/>
+          <p:nvPr/>
+        </p:nvSpPr>
+        <p:spPr>
+          <a:xfrm>
+            <a:off x="5334000" y="2800350"/>
+            <a:ext cx="3467100" cy="552450"/>
           </a:xfrm>
           <a:prstGeom prst="rect">
             <a:avLst/>
@@ -4029,17 +4201,17 @@
           <a:ln/>
         </p:spPr>
         <p:txBody>
-          <a:bodyPr wrap="square" lIns="0" tIns="12573" rIns="0" bIns="-12573" rtlCol="0" anchor="t"/>
+          <a:bodyPr wrap="square" lIns="0" tIns="11509" rIns="0" bIns="-11509" rtlCol="0" anchor="t"/>
           <a:lstStyle/>
           <a:p>
             <a:pPr algn="l" indent="0" marL="0">
               <a:lnSpc>
-                <a:spcPts val="2250"/>
+                <a:spcPts val="2063"/>
               </a:lnSpc>
               <a:buNone/>
             </a:pPr>
             <a:r>
-              <a:rPr lang="en-US" sz="1800" dirty="0" spc="-3" kern="0">
+              <a:rPr lang="en-US" sz="1650" dirty="0" spc="1" kern="0">
                 <a:solidFill>
                   <a:srgbClr val="D8D3C4"/>
                 </a:solidFill>
@@ -4047,10 +4219,10 @@
                 <a:ea typeface="Be Vietnam Pro" pitchFamily="34" charset="-122"/>
                 <a:cs typeface="Be Vietnam Pro" pitchFamily="34" charset="-120"/>
               </a:rPr>
-              <a:t>Chuỗi</a:t>
-            </a:r>
-            <a:r>
-              <a:rPr lang="en-US" sz="1800" dirty="0" spc="2" kern="0">
+              <a:t>Dữ</a:t>
+            </a:r>
+            <a:r>
+              <a:rPr lang="en-US" sz="1650" dirty="0" spc="0" kern="0">
                 <a:solidFill>
                   <a:srgbClr val="D8D3C4"/>
                 </a:solidFill>
@@ -4058,10 +4230,10 @@
                 <a:ea typeface="Be Vietnam Pro" pitchFamily="34" charset="-122"/>
                 <a:cs typeface="Be Vietnam Pro" pitchFamily="34" charset="-120"/>
               </a:rPr>
-              <a:t> chữ</a:t>
-            </a:r>
-            <a:r>
-              <a:rPr lang="en-US" sz="1800" dirty="0" spc="-2" kern="0">
+              <a:t> liệu dạng</a:t>
+            </a:r>
+            <a:r>
+              <a:rPr lang="en-US" sz="1650" dirty="0" spc="2" kern="0">
                 <a:solidFill>
                   <a:srgbClr val="D8D3C4"/>
                 </a:solidFill>
@@ -4069,10 +4241,10 @@
                 <a:ea typeface="Be Vietnam Pro" pitchFamily="34" charset="-122"/>
                 <a:cs typeface="Be Vietnam Pro" pitchFamily="34" charset="-120"/>
               </a:rPr>
-              <a:t> mang</a:t>
-            </a:r>
-            <a:r>
-              <a:rPr lang="en-US" sz="1800" dirty="0" spc="2" kern="0">
+              <a:t> cặp</a:t>
+            </a:r>
+            <a:r>
+              <a:rPr lang="en-US" sz="1650" dirty="0" spc="-6" kern="0">
                 <a:solidFill>
                   <a:srgbClr val="D8D3C4"/>
                 </a:solidFill>
@@ -4080,10 +4252,10 @@
                 <a:ea typeface="Be Vietnam Pro" pitchFamily="34" charset="-122"/>
                 <a:cs typeface="Be Vietnam Pro" pitchFamily="34" charset="-120"/>
               </a:rPr>
-              <a:t> các</a:t>
-            </a:r>
-            <a:r>
-              <a:rPr lang="en-US" sz="1800" dirty="0" spc="1" kern="0">
+              <a:t> tên</a:t>
+            </a:r>
+            <a:r>
+              <a:rPr lang="en-US" sz="1650" dirty="0" spc="-8" kern="0">
                 <a:solidFill>
                   <a:srgbClr val="D8D3C4"/>
                 </a:solidFill>
@@ -4091,10 +4263,10 @@
                 <a:ea typeface="Be Vietnam Pro" pitchFamily="34" charset="-122"/>
                 <a:cs typeface="Be Vietnam Pro" pitchFamily="34" charset="-120"/>
               </a:rPr>
-              <a:t> claim</a:t>
-            </a:r>
-            <a:r>
-              <a:rPr lang="en-US" sz="1800" dirty="0" spc="-14" kern="0">
+              <a:t> và</a:t>
+            </a:r>
+            <a:r>
+              <a:rPr lang="en-US" sz="1650" dirty="0" spc="1" kern="0">
                 <a:solidFill>
                   <a:srgbClr val="D8D3C4"/>
                 </a:solidFill>
@@ -4102,10 +4274,10 @@
                 <a:ea typeface="Be Vietnam Pro" pitchFamily="34" charset="-122"/>
                 <a:cs typeface="Be Vietnam Pro" pitchFamily="34" charset="-120"/>
               </a:rPr>
-              <a:t> về</a:t>
-            </a:r>
-            <a:r>
-              <a:rPr lang="en-US" sz="1800" dirty="0" spc="-7" kern="0">
+              <a:t> giá</a:t>
+            </a:r>
+            <a:r>
+              <a:rPr lang="en-US" sz="1650" dirty="0" spc="8" kern="0">
                 <a:solidFill>
                   <a:srgbClr val="D8D3C4"/>
                 </a:solidFill>
@@ -4113,48 +4285,26 @@
                 <a:ea typeface="Be Vietnam Pro" pitchFamily="34" charset="-122"/>
                 <a:cs typeface="Be Vietnam Pro" pitchFamily="34" charset="-120"/>
               </a:rPr>
-              <a:t> một</a:t>
-            </a:r>
-            <a:r>
-              <a:rPr lang="en-US" sz="1800" dirty="0" spc="2" kern="0">
-                <a:solidFill>
-                  <a:srgbClr val="D8D3C4"/>
-                </a:solidFill>
-                <a:latin typeface="Be Vietnam Pro" pitchFamily="34" charset="0"/>
-                <a:ea typeface="Be Vietnam Pro" pitchFamily="34" charset="-122"/>
-                <a:cs typeface="Be Vietnam Pro" pitchFamily="34" charset="-120"/>
-              </a:rPr>
-              <a:t> chủ</a:t>
-            </a:r>
-            <a:r>
-              <a:rPr lang="en-US" sz="1800" dirty="0" spc="-1" kern="0">
-                <a:solidFill>
-                  <a:srgbClr val="D8D3C4"/>
-                </a:solidFill>
-                <a:latin typeface="Be Vietnam Pro" pitchFamily="34" charset="0"/>
-                <a:ea typeface="Be Vietnam Pro" pitchFamily="34" charset="-122"/>
-                <a:cs typeface="Be Vietnam Pro" pitchFamily="34" charset="-120"/>
-              </a:rPr>
-              <a:t> thể.</a:t>
-            </a:r>
-            <a:endParaRPr lang="en-US" sz="1800" dirty="0"/>
+              <a:t> trị.</a:t>
+            </a:r>
+            <a:endParaRPr lang="en-US" sz="1650" dirty="0"/>
           </a:p>
         </p:txBody>
       </p:sp>
       <p:sp>
         <p:nvSpPr>
-          <p:cNvPr id="10" name="Shape 8"/>
-          <p:cNvSpPr/>
-          <p:nvPr/>
-        </p:nvSpPr>
-        <p:spPr>
-          <a:xfrm>
-            <a:off x="5095875" y="2571750"/>
-            <a:ext cx="3914775" cy="2381250"/>
+          <p:cNvPr id="15" name="Shape 13"/>
+          <p:cNvSpPr/>
+          <p:nvPr/>
+        </p:nvSpPr>
+        <p:spPr>
+          <a:xfrm>
+            <a:off x="9220200" y="1428750"/>
+            <a:ext cx="4000500" cy="1962150"/>
           </a:xfrm>
           <a:prstGeom prst="roundRect">
             <a:avLst>
-              <a:gd name="adj" fmla="val 9600"/>
+              <a:gd name="adj" fmla="val 10680"/>
             </a:avLst>
           </a:prstGeom>
           <a:solidFill>
@@ -4165,13 +4315,38 @@
       </p:sp>
       <p:sp>
         <p:nvSpPr>
-          <p:cNvPr id="11" name="Shape 9"/>
-          <p:cNvSpPr/>
-          <p:nvPr/>
-        </p:nvSpPr>
-        <p:spPr>
-          <a:xfrm>
-            <a:off x="5362575" y="2819400"/>
+          <p:cNvPr id="16" name="Connector line-1792388047713-366219867"/>
+          <p:cNvSpPr/>
+          <p:nvPr/>
+        </p:nvSpPr>
+        <p:spPr>
+          <a:xfrm>
+            <a:off x="9639300" y="1657350"/>
+            <a:ext cx="3314700" cy="0"/>
+          </a:xfrm>
+          <a:prstGeom prst="line">
+            <a:avLst/>
+          </a:prstGeom>
+          <a:noFill/>
+          <a:ln w="28575">
+            <a:solidFill>
+              <a:srgbClr val="3DD6A0"/>
+            </a:solidFill>
+            <a:prstDash val="solid"/>
+            <a:headEnd type="none"/>
+            <a:tailEnd type="none"/>
+          </a:ln>
+        </p:spPr>
+      </p:sp>
+      <p:sp>
+        <p:nvSpPr>
+          <p:cNvPr id="17" name="Shape 15"/>
+          <p:cNvSpPr/>
+          <p:nvPr/>
+        </p:nvSpPr>
+        <p:spPr>
+          <a:xfrm>
+            <a:off x="9486900" y="1581150"/>
             <a:ext cx="152400" cy="152400"/>
           </a:xfrm>
           <a:prstGeom prst="ellipse">
@@ -4190,14 +4365,244 @@
       </p:sp>
       <p:sp>
         <p:nvSpPr>
-          <p:cNvPr id="12" name="Connector line-1792337941659-702454031"/>
-          <p:cNvSpPr/>
-          <p:nvPr/>
-        </p:nvSpPr>
-        <p:spPr>
-          <a:xfrm>
-            <a:off x="5514975" y="2895600"/>
-            <a:ext cx="3152775" cy="0"/>
+          <p:cNvPr id="18" name="Text 16"/>
+          <p:cNvSpPr/>
+          <p:nvPr/>
+        </p:nvSpPr>
+        <p:spPr>
+          <a:xfrm>
+            <a:off x="9486900" y="1771650"/>
+            <a:ext cx="3467100" cy="400050"/>
+          </a:xfrm>
+          <a:prstGeom prst="rect">
+            <a:avLst/>
+          </a:prstGeom>
+          <a:noFill/>
+          <a:ln/>
+        </p:spPr>
+        <p:txBody>
+          <a:bodyPr wrap="square" lIns="0" tIns="0" rIns="0" bIns="0" rtlCol="0" anchor="t"/>
+          <a:lstStyle/>
+          <a:p>
+            <a:pPr algn="l" indent="0" marL="0">
+              <a:buNone/>
+            </a:pPr>
+            <a:r>
+              <a:rPr lang="en-US" sz="2400" dirty="0" spc="-24" kern="0">
+                <a:solidFill>
+                  <a:srgbClr val="3DD6A0"/>
+                </a:solidFill>
+                <a:latin typeface="Bricolage Grotesque ExtraBold" pitchFamily="34" charset="0"/>
+                <a:ea typeface="Bricolage Grotesque ExtraBold" pitchFamily="34" charset="-122"/>
+                <a:cs typeface="Bricolage Grotesque ExtraBold" pitchFamily="34" charset="-120"/>
+              </a:rPr>
+              <a:t>HMAC</a:t>
+            </a:r>
+            <a:endParaRPr lang="en-US" sz="2400" dirty="0"/>
+          </a:p>
+        </p:txBody>
+      </p:sp>
+      <p:sp>
+        <p:nvSpPr>
+          <p:cNvPr id="19" name="Text 17"/>
+          <p:cNvSpPr/>
+          <p:nvPr/>
+        </p:nvSpPr>
+        <p:spPr>
+          <a:xfrm>
+            <a:off x="9486900" y="2171700"/>
+            <a:ext cx="3467100" cy="533400"/>
+          </a:xfrm>
+          <a:prstGeom prst="rect">
+            <a:avLst/>
+          </a:prstGeom>
+          <a:noFill/>
+          <a:ln/>
+        </p:spPr>
+        <p:txBody>
+          <a:bodyPr wrap="square" lIns="0" tIns="0" rIns="0" bIns="0" rtlCol="0" anchor="t"/>
+          <a:lstStyle/>
+          <a:p>
+            <a:pPr algn="l" indent="0" marL="0">
+              <a:buNone/>
+            </a:pPr>
+            <a:r>
+              <a:rPr lang="en-US" sz="1650" dirty="0" spc="-4" kern="0">
+                <a:solidFill>
+                  <a:srgbClr val="9A98A0"/>
+                </a:solidFill>
+                <a:latin typeface="Be Vietnam Pro" pitchFamily="34" charset="0"/>
+                <a:ea typeface="Be Vietnam Pro" pitchFamily="34" charset="-122"/>
+                <a:cs typeface="Be Vietnam Pro" pitchFamily="34" charset="-120"/>
+              </a:rPr>
+              <a:t>Hash-based</a:t>
+            </a:r>
+            <a:r>
+              <a:rPr lang="en-US" sz="1650" dirty="0" spc="-6" kern="0">
+                <a:solidFill>
+                  <a:srgbClr val="9A98A0"/>
+                </a:solidFill>
+                <a:latin typeface="Be Vietnam Pro" pitchFamily="34" charset="0"/>
+                <a:ea typeface="Be Vietnam Pro" pitchFamily="34" charset="-122"/>
+                <a:cs typeface="Be Vietnam Pro" pitchFamily="34" charset="-120"/>
+              </a:rPr>
+              <a:t> Message</a:t>
+            </a:r>
+            <a:r>
+              <a:rPr lang="en-US" sz="1650" dirty="0" spc="-7" kern="0">
+                <a:solidFill>
+                  <a:srgbClr val="9A98A0"/>
+                </a:solidFill>
+                <a:latin typeface="Be Vietnam Pro" pitchFamily="34" charset="0"/>
+                <a:ea typeface="Be Vietnam Pro" pitchFamily="34" charset="-122"/>
+                <a:cs typeface="Be Vietnam Pro" pitchFamily="34" charset="-120"/>
+              </a:rPr>
+              <a:t> Authentication</a:t>
+            </a:r>
+            <a:r>
+              <a:rPr lang="en-US" sz="1650" dirty="0" spc="1" kern="0">
+                <a:solidFill>
+                  <a:srgbClr val="9A98A0"/>
+                </a:solidFill>
+                <a:latin typeface="Be Vietnam Pro" pitchFamily="34" charset="0"/>
+                <a:ea typeface="Be Vietnam Pro" pitchFamily="34" charset="-122"/>
+                <a:cs typeface="Be Vietnam Pro" pitchFamily="34" charset="-120"/>
+              </a:rPr>
+              <a:t> Code</a:t>
+            </a:r>
+            <a:endParaRPr lang="en-US" sz="1650" dirty="0"/>
+          </a:p>
+        </p:txBody>
+      </p:sp>
+      <p:sp>
+        <p:nvSpPr>
+          <p:cNvPr id="20" name="Text 18"/>
+          <p:cNvSpPr/>
+          <p:nvPr/>
+        </p:nvSpPr>
+        <p:spPr>
+          <a:xfrm>
+            <a:off x="9486900" y="2800350"/>
+            <a:ext cx="3467100" cy="552450"/>
+          </a:xfrm>
+          <a:prstGeom prst="rect">
+            <a:avLst/>
+          </a:prstGeom>
+          <a:noFill/>
+          <a:ln/>
+        </p:spPr>
+        <p:txBody>
+          <a:bodyPr wrap="square" lIns="0" tIns="11509" rIns="0" bIns="-11509" rtlCol="0" anchor="t"/>
+          <a:lstStyle/>
+          <a:p>
+            <a:pPr algn="l" indent="0" marL="0">
+              <a:lnSpc>
+                <a:spcPts val="2063"/>
+              </a:lnSpc>
+              <a:buNone/>
+            </a:pPr>
+            <a:r>
+              <a:rPr lang="en-US" sz="1650" dirty="0" spc="-1" kern="0">
+                <a:solidFill>
+                  <a:srgbClr val="D8D3C4"/>
+                </a:solidFill>
+                <a:latin typeface="Be Vietnam Pro" pitchFamily="34" charset="0"/>
+                <a:ea typeface="Be Vietnam Pro" pitchFamily="34" charset="-122"/>
+                <a:cs typeface="Be Vietnam Pro" pitchFamily="34" charset="-120"/>
+              </a:rPr>
+              <a:t>Tính</a:t>
+            </a:r>
+            <a:r>
+              <a:rPr lang="en-US" sz="1650" dirty="0" spc="4" kern="0">
+                <a:solidFill>
+                  <a:srgbClr val="D8D3C4"/>
+                </a:solidFill>
+                <a:latin typeface="Be Vietnam Pro" pitchFamily="34" charset="0"/>
+                <a:ea typeface="Be Vietnam Pro" pitchFamily="34" charset="-122"/>
+                <a:cs typeface="Be Vietnam Pro" pitchFamily="34" charset="-120"/>
+              </a:rPr>
+              <a:t> từ</a:t>
+            </a:r>
+            <a:r>
+              <a:rPr lang="en-US" sz="1650" dirty="0" spc="1" kern="0">
+                <a:solidFill>
+                  <a:srgbClr val="D8D3C4"/>
+                </a:solidFill>
+                <a:latin typeface="Be Vietnam Pro" pitchFamily="34" charset="0"/>
+                <a:ea typeface="Be Vietnam Pro" pitchFamily="34" charset="-122"/>
+                <a:cs typeface="Be Vietnam Pro" pitchFamily="34" charset="-120"/>
+              </a:rPr>
+              <a:t> thông</a:t>
+            </a:r>
+            <a:r>
+              <a:rPr lang="en-US" sz="1650" dirty="0" spc="16" kern="0">
+                <a:solidFill>
+                  <a:srgbClr val="D8D3C4"/>
+                </a:solidFill>
+                <a:latin typeface="Be Vietnam Pro" pitchFamily="34" charset="0"/>
+                <a:ea typeface="Be Vietnam Pro" pitchFamily="34" charset="-122"/>
+                <a:cs typeface="Be Vietnam Pro" pitchFamily="34" charset="-120"/>
+              </a:rPr>
+              <a:t> điệp</a:t>
+            </a:r>
+            <a:r>
+              <a:rPr lang="en-US" sz="1650" dirty="0" spc="-9" kern="0">
+                <a:solidFill>
+                  <a:srgbClr val="D8D3C4"/>
+                </a:solidFill>
+                <a:latin typeface="Be Vietnam Pro" pitchFamily="34" charset="0"/>
+                <a:ea typeface="Be Vietnam Pro" pitchFamily="34" charset="-122"/>
+                <a:cs typeface="Be Vietnam Pro" pitchFamily="34" charset="-120"/>
+              </a:rPr>
+              <a:t> và</a:t>
+            </a:r>
+            <a:r>
+              <a:rPr lang="en-US" sz="1650" dirty="0" spc="-1" kern="0">
+                <a:solidFill>
+                  <a:srgbClr val="D8D3C4"/>
+                </a:solidFill>
+                <a:latin typeface="Be Vietnam Pro" pitchFamily="34" charset="0"/>
+                <a:ea typeface="Be Vietnam Pro" pitchFamily="34" charset="-122"/>
+                <a:cs typeface="Be Vietnam Pro" pitchFamily="34" charset="-120"/>
+              </a:rPr>
+              <a:t> khóa bí mật.</a:t>
+            </a:r>
+            <a:endParaRPr lang="en-US" sz="1650" dirty="0"/>
+          </a:p>
+        </p:txBody>
+      </p:sp>
+      <p:sp>
+        <p:nvSpPr>
+          <p:cNvPr id="21" name="Shape 19"/>
+          <p:cNvSpPr/>
+          <p:nvPr/>
+        </p:nvSpPr>
+        <p:spPr>
+          <a:xfrm>
+            <a:off x="13373100" y="1428750"/>
+            <a:ext cx="4000500" cy="1962150"/>
+          </a:xfrm>
+          <a:prstGeom prst="roundRect">
+            <a:avLst>
+              <a:gd name="adj" fmla="val 10680"/>
+            </a:avLst>
+          </a:prstGeom>
+          <a:solidFill>
+            <a:srgbClr val="1E212B"/>
+          </a:solidFill>
+          <a:ln/>
+        </p:spPr>
+      </p:sp>
+      <p:sp>
+        <p:nvSpPr>
+          <p:cNvPr id="22" name="Connector line-1792388047721-594605729"/>
+          <p:cNvSpPr/>
+          <p:nvPr/>
+        </p:nvSpPr>
+        <p:spPr>
+          <a:xfrm>
+            <a:off x="13792200" y="1657350"/>
+            <a:ext cx="3314700" cy="0"/>
           </a:xfrm>
           <a:prstGeom prst="line">
             <a:avLst/>
@@ -4215,221 +4620,13 @@
       </p:sp>
       <p:sp>
         <p:nvSpPr>
-          <p:cNvPr id="13" name="Text 11"/>
-          <p:cNvSpPr/>
-          <p:nvPr/>
-        </p:nvSpPr>
-        <p:spPr>
-          <a:xfrm>
-            <a:off x="5438775" y="3067050"/>
-            <a:ext cx="3238500" cy="628650"/>
-          </a:xfrm>
-          <a:prstGeom prst="rect">
-            <a:avLst/>
-          </a:prstGeom>
-          <a:noFill/>
-          <a:ln/>
-        </p:spPr>
-        <p:txBody>
-          <a:bodyPr wrap="square" lIns="0" tIns="0" rIns="0" bIns="0" rtlCol="0" anchor="t"/>
-          <a:lstStyle/>
-          <a:p>
-            <a:pPr algn="l" indent="0" marL="0">
-              <a:buNone/>
-            </a:pPr>
-            <a:r>
-              <a:rPr lang="en-US" sz="3900" dirty="0" spc="-13" kern="0">
-                <a:solidFill>
-                  <a:srgbClr val="3DD6A0"/>
-                </a:solidFill>
-                <a:latin typeface="Bricolage Grotesque ExtraBold" pitchFamily="34" charset="0"/>
-                <a:ea typeface="Bricolage Grotesque ExtraBold" pitchFamily="34" charset="-122"/>
-                <a:cs typeface="Bricolage Grotesque ExtraBold" pitchFamily="34" charset="-120"/>
-              </a:rPr>
-              <a:t>JWS</a:t>
-            </a:r>
-            <a:endParaRPr lang="en-US" sz="3900" dirty="0"/>
-          </a:p>
-        </p:txBody>
-      </p:sp>
-      <p:sp>
-        <p:nvSpPr>
-          <p:cNvPr id="14" name="Text 12"/>
-          <p:cNvSpPr/>
-          <p:nvPr/>
-        </p:nvSpPr>
-        <p:spPr>
-          <a:xfrm>
-            <a:off x="5438775" y="3714750"/>
-            <a:ext cx="3238500" cy="533400"/>
-          </a:xfrm>
-          <a:prstGeom prst="rect">
-            <a:avLst/>
-          </a:prstGeom>
-          <a:noFill/>
-          <a:ln/>
-        </p:spPr>
-        <p:txBody>
-          <a:bodyPr wrap="square" lIns="0" tIns="0" rIns="0" bIns="0" rtlCol="0" anchor="t"/>
-          <a:lstStyle/>
-          <a:p>
-            <a:pPr algn="l" indent="0" marL="0">
-              <a:buNone/>
-            </a:pPr>
-            <a:r>
-              <a:rPr lang="en-US" sz="1650" dirty="0" spc="6" kern="0">
-                <a:solidFill>
-                  <a:srgbClr val="9A98A0"/>
-                </a:solidFill>
-                <a:latin typeface="Be Vietnam Pro" pitchFamily="34" charset="0"/>
-                <a:ea typeface="Be Vietnam Pro" pitchFamily="34" charset="-122"/>
-                <a:cs typeface="Be Vietnam Pro" pitchFamily="34" charset="-120"/>
-              </a:rPr>
-              <a:t>JSON</a:t>
-            </a:r>
-            <a:r>
-              <a:rPr lang="en-US" sz="1650" dirty="0" spc="-18" kern="0">
-                <a:solidFill>
-                  <a:srgbClr val="9A98A0"/>
-                </a:solidFill>
-                <a:latin typeface="Be Vietnam Pro" pitchFamily="34" charset="0"/>
-                <a:ea typeface="Be Vietnam Pro" pitchFamily="34" charset="-122"/>
-                <a:cs typeface="Be Vietnam Pro" pitchFamily="34" charset="-120"/>
-              </a:rPr>
-              <a:t> Web</a:t>
-            </a:r>
-            <a:r>
-              <a:rPr lang="en-US" sz="1650" dirty="0" spc="-11" kern="0">
-                <a:solidFill>
-                  <a:srgbClr val="9A98A0"/>
-                </a:solidFill>
-                <a:latin typeface="Be Vietnam Pro" pitchFamily="34" charset="0"/>
-                <a:ea typeface="Be Vietnam Pro" pitchFamily="34" charset="-122"/>
-                <a:cs typeface="Be Vietnam Pro" pitchFamily="34" charset="-120"/>
-              </a:rPr>
-              <a:t> Signature</a:t>
-            </a:r>
-            <a:endParaRPr lang="en-US" sz="1650" dirty="0"/>
-          </a:p>
-        </p:txBody>
-      </p:sp>
-      <p:sp>
-        <p:nvSpPr>
-          <p:cNvPr id="15" name="Text 13"/>
-          <p:cNvSpPr/>
-          <p:nvPr/>
-        </p:nvSpPr>
-        <p:spPr>
-          <a:xfrm>
-            <a:off x="5438775" y="4286250"/>
-            <a:ext cx="3238500" cy="590550"/>
-          </a:xfrm>
-          <a:prstGeom prst="rect">
-            <a:avLst/>
-          </a:prstGeom>
-          <a:noFill/>
-          <a:ln/>
-        </p:spPr>
-        <p:txBody>
-          <a:bodyPr wrap="square" lIns="0" tIns="12573" rIns="0" bIns="-12573" rtlCol="0" anchor="t"/>
-          <a:lstStyle/>
-          <a:p>
-            <a:pPr algn="l" indent="0" marL="0">
-              <a:lnSpc>
-                <a:spcPts val="2250"/>
-              </a:lnSpc>
-              <a:buNone/>
-            </a:pPr>
-            <a:r>
-              <a:rPr lang="en-US" sz="1800" dirty="0" spc="-3" kern="0">
-                <a:solidFill>
-                  <a:srgbClr val="D8D3C4"/>
-                </a:solidFill>
-                <a:latin typeface="Be Vietnam Pro" pitchFamily="34" charset="0"/>
-                <a:ea typeface="Be Vietnam Pro" pitchFamily="34" charset="-122"/>
-                <a:cs typeface="Be Vietnam Pro" pitchFamily="34" charset="-120"/>
-              </a:rPr>
-              <a:t>dạng</a:t>
-            </a:r>
-            <a:r>
-              <a:rPr lang="en-US" sz="1800" dirty="0" spc="7" kern="0">
-                <a:solidFill>
-                  <a:srgbClr val="D8D3C4"/>
-                </a:solidFill>
-                <a:latin typeface="Be Vietnam Pro" pitchFamily="34" charset="0"/>
-                <a:ea typeface="Be Vietnam Pro" pitchFamily="34" charset="-122"/>
-                <a:cs typeface="Be Vietnam Pro" pitchFamily="34" charset="-120"/>
-              </a:rPr>
-              <a:t> JWT được</a:t>
-            </a:r>
-            <a:r>
-              <a:rPr lang="en-US" sz="1800" dirty="0" spc="-1" kern="0">
-                <a:solidFill>
-                  <a:srgbClr val="D8D3C4"/>
-                </a:solidFill>
-                <a:latin typeface="Be Vietnam Pro" pitchFamily="34" charset="0"/>
-                <a:ea typeface="Be Vietnam Pro" pitchFamily="34" charset="-122"/>
-                <a:cs typeface="Be Vietnam Pro" pitchFamily="34" charset="-120"/>
-              </a:rPr>
-              <a:t> ký,</a:t>
-            </a:r>
-            <a:r>
-              <a:rPr lang="en-US" sz="1800" dirty="0" spc="-2" kern="0">
-                <a:solidFill>
-                  <a:srgbClr val="D8D3C4"/>
-                </a:solidFill>
-                <a:latin typeface="Be Vietnam Pro" pitchFamily="34" charset="0"/>
-                <a:ea typeface="Be Vietnam Pro" pitchFamily="34" charset="-122"/>
-                <a:cs typeface="Be Vietnam Pro" pitchFamily="34" charset="-120"/>
-              </a:rPr>
-              <a:t> không mã</a:t>
-            </a:r>
-            <a:r>
-              <a:rPr lang="en-US" sz="1800" dirty="0" spc="-1" kern="0">
-                <a:solidFill>
-                  <a:srgbClr val="D8D3C4"/>
-                </a:solidFill>
-                <a:latin typeface="Be Vietnam Pro" pitchFamily="34" charset="0"/>
-                <a:ea typeface="Be Vietnam Pro" pitchFamily="34" charset="-122"/>
-                <a:cs typeface="Be Vietnam Pro" pitchFamily="34" charset="-120"/>
-              </a:rPr>
-              <a:t> hóa</a:t>
-            </a:r>
-            <a:endParaRPr lang="en-US" sz="1800" dirty="0"/>
-          </a:p>
-        </p:txBody>
-      </p:sp>
-      <p:sp>
-        <p:nvSpPr>
-          <p:cNvPr id="16" name="Shape 14"/>
-          <p:cNvSpPr/>
-          <p:nvPr/>
-        </p:nvSpPr>
-        <p:spPr>
-          <a:xfrm>
-            <a:off x="9277350" y="2571750"/>
-            <a:ext cx="3914775" cy="2381250"/>
-          </a:xfrm>
-          <a:prstGeom prst="roundRect">
-            <a:avLst>
-              <a:gd name="adj" fmla="val 9600"/>
-            </a:avLst>
-          </a:prstGeom>
-          <a:solidFill>
-            <a:srgbClr val="1E212B"/>
-          </a:solidFill>
-          <a:ln/>
-        </p:spPr>
-      </p:sp>
-      <p:sp>
-        <p:nvSpPr>
-          <p:cNvPr id="17" name="Shape 15"/>
-          <p:cNvSpPr/>
-          <p:nvPr/>
-        </p:nvSpPr>
-        <p:spPr>
-          <a:xfrm>
-            <a:off x="9544050" y="2819400"/>
+          <p:cNvPr id="23" name="Shape 21"/>
+          <p:cNvSpPr/>
+          <p:nvPr/>
+        </p:nvSpPr>
+        <p:spPr>
+          <a:xfrm>
+            <a:off x="13639800" y="1581150"/>
             <a:ext cx="152400" cy="152400"/>
           </a:xfrm>
           <a:prstGeom prst="ellipse">
@@ -4448,14 +4645,211 @@
       </p:sp>
       <p:sp>
         <p:nvSpPr>
-          <p:cNvPr id="18" name="Connector line-1792337941665-527907506"/>
-          <p:cNvSpPr/>
-          <p:nvPr/>
-        </p:nvSpPr>
-        <p:spPr>
-          <a:xfrm>
-            <a:off x="9696450" y="2895600"/>
-            <a:ext cx="3152775" cy="0"/>
+          <p:cNvPr id="24" name="Text 22"/>
+          <p:cNvSpPr/>
+          <p:nvPr/>
+        </p:nvSpPr>
+        <p:spPr>
+          <a:xfrm>
+            <a:off x="13639800" y="1771650"/>
+            <a:ext cx="3467100" cy="400050"/>
+          </a:xfrm>
+          <a:prstGeom prst="rect">
+            <a:avLst/>
+          </a:prstGeom>
+          <a:noFill/>
+          <a:ln/>
+        </p:spPr>
+        <p:txBody>
+          <a:bodyPr wrap="square" lIns="0" tIns="0" rIns="0" bIns="0" rtlCol="0" anchor="t"/>
+          <a:lstStyle/>
+          <a:p>
+            <a:pPr algn="l" indent="0" marL="0">
+              <a:buNone/>
+            </a:pPr>
+            <a:r>
+              <a:rPr lang="en-US" sz="2400" dirty="0" spc="1" kern="0">
+                <a:solidFill>
+                  <a:srgbClr val="3DD6A0"/>
+                </a:solidFill>
+                <a:latin typeface="Bricolage Grotesque ExtraBold" pitchFamily="34" charset="0"/>
+                <a:ea typeface="Bricolage Grotesque ExtraBold" pitchFamily="34" charset="-122"/>
+                <a:cs typeface="Bricolage Grotesque ExtraBold" pitchFamily="34" charset="-120"/>
+              </a:rPr>
+              <a:t>SHA</a:t>
+            </a:r>
+            <a:endParaRPr lang="en-US" sz="2400" dirty="0"/>
+          </a:p>
+        </p:txBody>
+      </p:sp>
+      <p:sp>
+        <p:nvSpPr>
+          <p:cNvPr id="25" name="Text 23"/>
+          <p:cNvSpPr/>
+          <p:nvPr/>
+        </p:nvSpPr>
+        <p:spPr>
+          <a:xfrm>
+            <a:off x="13639800" y="2171700"/>
+            <a:ext cx="3467100" cy="533400"/>
+          </a:xfrm>
+          <a:prstGeom prst="rect">
+            <a:avLst/>
+          </a:prstGeom>
+          <a:noFill/>
+          <a:ln/>
+        </p:spPr>
+        <p:txBody>
+          <a:bodyPr wrap="square" lIns="0" tIns="0" rIns="0" bIns="0" rtlCol="0" anchor="t"/>
+          <a:lstStyle/>
+          <a:p>
+            <a:pPr algn="l" indent="0" marL="0">
+              <a:buNone/>
+            </a:pPr>
+            <a:r>
+              <a:rPr lang="en-US" sz="1650" dirty="0" spc="-14" kern="0">
+                <a:solidFill>
+                  <a:srgbClr val="9A98A0"/>
+                </a:solidFill>
+                <a:latin typeface="Be Vietnam Pro" pitchFamily="34" charset="0"/>
+                <a:ea typeface="Be Vietnam Pro" pitchFamily="34" charset="-122"/>
+                <a:cs typeface="Be Vietnam Pro" pitchFamily="34" charset="-120"/>
+              </a:rPr>
+              <a:t>Secure</a:t>
+            </a:r>
+            <a:r>
+              <a:rPr lang="en-US" sz="1650" dirty="0" spc="0" kern="0">
+                <a:solidFill>
+                  <a:srgbClr val="9A98A0"/>
+                </a:solidFill>
+                <a:latin typeface="Be Vietnam Pro" pitchFamily="34" charset="0"/>
+                <a:ea typeface="Be Vietnam Pro" pitchFamily="34" charset="-122"/>
+                <a:cs typeface="Be Vietnam Pro" pitchFamily="34" charset="-120"/>
+              </a:rPr>
+              <a:t> Hash</a:t>
+            </a:r>
+            <a:r>
+              <a:rPr lang="en-US" sz="1650" dirty="0" spc="-1" kern="0">
+                <a:solidFill>
+                  <a:srgbClr val="9A98A0"/>
+                </a:solidFill>
+                <a:latin typeface="Be Vietnam Pro" pitchFamily="34" charset="0"/>
+                <a:ea typeface="Be Vietnam Pro" pitchFamily="34" charset="-122"/>
+                <a:cs typeface="Be Vietnam Pro" pitchFamily="34" charset="-120"/>
+              </a:rPr>
+              <a:t> Algorithm</a:t>
+            </a:r>
+            <a:endParaRPr lang="en-US" sz="1650" dirty="0"/>
+          </a:p>
+        </p:txBody>
+      </p:sp>
+      <p:sp>
+        <p:nvSpPr>
+          <p:cNvPr id="26" name="Text 24"/>
+          <p:cNvSpPr/>
+          <p:nvPr/>
+        </p:nvSpPr>
+        <p:spPr>
+          <a:xfrm>
+            <a:off x="13639800" y="2800350"/>
+            <a:ext cx="3467100" cy="552450"/>
+          </a:xfrm>
+          <a:prstGeom prst="rect">
+            <a:avLst/>
+          </a:prstGeom>
+          <a:noFill/>
+          <a:ln/>
+        </p:spPr>
+        <p:txBody>
+          <a:bodyPr wrap="square" lIns="0" tIns="11509" rIns="0" bIns="-11509" rtlCol="0" anchor="t"/>
+          <a:lstStyle/>
+          <a:p>
+            <a:pPr algn="l" indent="0" marL="0">
+              <a:lnSpc>
+                <a:spcPts val="2063"/>
+              </a:lnSpc>
+              <a:buNone/>
+            </a:pPr>
+            <a:r>
+              <a:rPr lang="en-US" sz="1650" dirty="0" spc="-2" kern="0">
+                <a:solidFill>
+                  <a:srgbClr val="D8D3C4"/>
+                </a:solidFill>
+                <a:latin typeface="Be Vietnam Pro" pitchFamily="34" charset="0"/>
+                <a:ea typeface="Be Vietnam Pro" pitchFamily="34" charset="-122"/>
+                <a:cs typeface="Be Vietnam Pro" pitchFamily="34" charset="-120"/>
+              </a:rPr>
+              <a:t>Họ</a:t>
+            </a:r>
+            <a:r>
+              <a:rPr lang="en-US" sz="1650" dirty="0" spc="-3" kern="0">
+                <a:solidFill>
+                  <a:srgbClr val="D8D3C4"/>
+                </a:solidFill>
+                <a:latin typeface="Be Vietnam Pro" pitchFamily="34" charset="0"/>
+                <a:ea typeface="Be Vietnam Pro" pitchFamily="34" charset="-122"/>
+                <a:cs typeface="Be Vietnam Pro" pitchFamily="34" charset="-120"/>
+              </a:rPr>
+              <a:t> thuật</a:t>
+            </a:r>
+            <a:r>
+              <a:rPr lang="en-US" sz="1650" dirty="0" spc="-7" kern="0">
+                <a:solidFill>
+                  <a:srgbClr val="D8D3C4"/>
+                </a:solidFill>
+                <a:latin typeface="Be Vietnam Pro" pitchFamily="34" charset="0"/>
+                <a:ea typeface="Be Vietnam Pro" pitchFamily="34" charset="-122"/>
+                <a:cs typeface="Be Vietnam Pro" pitchFamily="34" charset="-120"/>
+              </a:rPr>
+              <a:t> toán</a:t>
+            </a:r>
+            <a:r>
+              <a:rPr lang="en-US" sz="1650" dirty="0" spc="-1" kern="0">
+                <a:solidFill>
+                  <a:srgbClr val="D8D3C4"/>
+                </a:solidFill>
+                <a:latin typeface="Be Vietnam Pro" pitchFamily="34" charset="0"/>
+                <a:ea typeface="Be Vietnam Pro" pitchFamily="34" charset="-122"/>
+                <a:cs typeface="Be Vietnam Pro" pitchFamily="34" charset="-120"/>
+              </a:rPr>
+              <a:t> băm; SHA-256 là một loại.</a:t>
+            </a:r>
+            <a:endParaRPr lang="en-US" sz="1650" dirty="0"/>
+          </a:p>
+        </p:txBody>
+      </p:sp>
+      <p:sp>
+        <p:nvSpPr>
+          <p:cNvPr id="27" name="Shape 25"/>
+          <p:cNvSpPr/>
+          <p:nvPr/>
+        </p:nvSpPr>
+        <p:spPr>
+          <a:xfrm>
+            <a:off x="914400" y="3543300"/>
+            <a:ext cx="4000500" cy="1962150"/>
+          </a:xfrm>
+          <a:prstGeom prst="roundRect">
+            <a:avLst>
+              <a:gd name="adj" fmla="val 10680"/>
+            </a:avLst>
+          </a:prstGeom>
+          <a:solidFill>
+            <a:srgbClr val="1E212B"/>
+          </a:solidFill>
+          <a:ln/>
+        </p:spPr>
+      </p:sp>
+      <p:sp>
+        <p:nvSpPr>
+          <p:cNvPr id="28" name="Connector line-1792388047728-663244306"/>
+          <p:cNvSpPr/>
+          <p:nvPr/>
+        </p:nvSpPr>
+        <p:spPr>
+          <a:xfrm>
+            <a:off x="1333500" y="3771900"/>
+            <a:ext cx="3314700" cy="0"/>
           </a:xfrm>
           <a:prstGeom prst="line">
             <a:avLst/>
@@ -4473,265 +4867,13 @@
       </p:sp>
       <p:sp>
         <p:nvSpPr>
-          <p:cNvPr id="19" name="Text 17"/>
-          <p:cNvSpPr/>
-          <p:nvPr/>
-        </p:nvSpPr>
-        <p:spPr>
-          <a:xfrm>
-            <a:off x="9620250" y="3067050"/>
-            <a:ext cx="3238500" cy="628650"/>
-          </a:xfrm>
-          <a:prstGeom prst="rect">
-            <a:avLst/>
-          </a:prstGeom>
-          <a:noFill/>
-          <a:ln/>
-        </p:spPr>
-        <p:txBody>
-          <a:bodyPr wrap="square" lIns="0" tIns="0" rIns="0" bIns="0" rtlCol="0" anchor="t"/>
-          <a:lstStyle/>
-          <a:p>
-            <a:pPr algn="l" indent="0" marL="0">
-              <a:buNone/>
-            </a:pPr>
-            <a:r>
-              <a:rPr lang="en-US" sz="3900" dirty="0" spc="-39" kern="0">
-                <a:solidFill>
-                  <a:srgbClr val="3DD6A0"/>
-                </a:solidFill>
-                <a:latin typeface="Bricolage Grotesque ExtraBold" pitchFamily="34" charset="0"/>
-                <a:ea typeface="Bricolage Grotesque ExtraBold" pitchFamily="34" charset="-122"/>
-                <a:cs typeface="Bricolage Grotesque ExtraBold" pitchFamily="34" charset="-120"/>
-              </a:rPr>
-              <a:t>HMAC</a:t>
-            </a:r>
-            <a:endParaRPr lang="en-US" sz="3900" dirty="0"/>
-          </a:p>
-        </p:txBody>
-      </p:sp>
-      <p:sp>
-        <p:nvSpPr>
-          <p:cNvPr id="20" name="Text 18"/>
-          <p:cNvSpPr/>
-          <p:nvPr/>
-        </p:nvSpPr>
-        <p:spPr>
-          <a:xfrm>
-            <a:off x="9620250" y="3714750"/>
-            <a:ext cx="3238500" cy="533400"/>
-          </a:xfrm>
-          <a:prstGeom prst="rect">
-            <a:avLst/>
-          </a:prstGeom>
-          <a:noFill/>
-          <a:ln/>
-        </p:spPr>
-        <p:txBody>
-          <a:bodyPr wrap="square" lIns="0" tIns="0" rIns="0" bIns="0" rtlCol="0" anchor="t"/>
-          <a:lstStyle/>
-          <a:p>
-            <a:pPr algn="l" indent="0" marL="0">
-              <a:buNone/>
-            </a:pPr>
-            <a:r>
-              <a:rPr lang="en-US" sz="1650" dirty="0" spc="-4" kern="0">
-                <a:solidFill>
-                  <a:srgbClr val="9A98A0"/>
-                </a:solidFill>
-                <a:latin typeface="Be Vietnam Pro" pitchFamily="34" charset="0"/>
-                <a:ea typeface="Be Vietnam Pro" pitchFamily="34" charset="-122"/>
-                <a:cs typeface="Be Vietnam Pro" pitchFamily="34" charset="-120"/>
-              </a:rPr>
-              <a:t>Hash-based</a:t>
-            </a:r>
-            <a:r>
-              <a:rPr lang="en-US" sz="1650" dirty="0" spc="-6" kern="0">
-                <a:solidFill>
-                  <a:srgbClr val="9A98A0"/>
-                </a:solidFill>
-                <a:latin typeface="Be Vietnam Pro" pitchFamily="34" charset="0"/>
-                <a:ea typeface="Be Vietnam Pro" pitchFamily="34" charset="-122"/>
-                <a:cs typeface="Be Vietnam Pro" pitchFamily="34" charset="-120"/>
-              </a:rPr>
-              <a:t> Message</a:t>
-            </a:r>
-            <a:r>
-              <a:rPr lang="en-US" sz="1650" dirty="0" spc="-7" kern="0">
-                <a:solidFill>
-                  <a:srgbClr val="9A98A0"/>
-                </a:solidFill>
-                <a:latin typeface="Be Vietnam Pro" pitchFamily="34" charset="0"/>
-                <a:ea typeface="Be Vietnam Pro" pitchFamily="34" charset="-122"/>
-                <a:cs typeface="Be Vietnam Pro" pitchFamily="34" charset="-120"/>
-              </a:rPr>
-              <a:t> Authentication</a:t>
-            </a:r>
-            <a:r>
-              <a:rPr lang="en-US" sz="1650" dirty="0" spc="1" kern="0">
-                <a:solidFill>
-                  <a:srgbClr val="9A98A0"/>
-                </a:solidFill>
-                <a:latin typeface="Be Vietnam Pro" pitchFamily="34" charset="0"/>
-                <a:ea typeface="Be Vietnam Pro" pitchFamily="34" charset="-122"/>
-                <a:cs typeface="Be Vietnam Pro" pitchFamily="34" charset="-120"/>
-              </a:rPr>
-              <a:t> Code</a:t>
-            </a:r>
-            <a:endParaRPr lang="en-US" sz="1650" dirty="0"/>
-          </a:p>
-        </p:txBody>
-      </p:sp>
-      <p:sp>
-        <p:nvSpPr>
-          <p:cNvPr id="21" name="Text 19"/>
-          <p:cNvSpPr/>
-          <p:nvPr/>
-        </p:nvSpPr>
-        <p:spPr>
-          <a:xfrm>
-            <a:off x="9620250" y="4286250"/>
-            <a:ext cx="3238500" cy="590550"/>
-          </a:xfrm>
-          <a:prstGeom prst="rect">
-            <a:avLst/>
-          </a:prstGeom>
-          <a:noFill/>
-          <a:ln/>
-        </p:spPr>
-        <p:txBody>
-          <a:bodyPr wrap="square" lIns="0" tIns="12573" rIns="0" bIns="-12573" rtlCol="0" anchor="t"/>
-          <a:lstStyle/>
-          <a:p>
-            <a:pPr algn="l" indent="0" marL="0">
-              <a:lnSpc>
-                <a:spcPts val="2250"/>
-              </a:lnSpc>
-              <a:buNone/>
-            </a:pPr>
-            <a:r>
-              <a:rPr lang="en-US" sz="1800" dirty="0" spc="-4" kern="0">
-                <a:solidFill>
-                  <a:srgbClr val="D8D3C4"/>
-                </a:solidFill>
-                <a:latin typeface="Be Vietnam Pro" pitchFamily="34" charset="0"/>
-                <a:ea typeface="Be Vietnam Pro" pitchFamily="34" charset="-122"/>
-                <a:cs typeface="Be Vietnam Pro" pitchFamily="34" charset="-120"/>
-              </a:rPr>
-              <a:t>Tính</a:t>
-            </a:r>
-            <a:r>
-              <a:rPr lang="en-US" sz="1800" dirty="0" spc="0" kern="0">
-                <a:solidFill>
-                  <a:srgbClr val="D8D3C4"/>
-                </a:solidFill>
-                <a:latin typeface="Be Vietnam Pro" pitchFamily="34" charset="0"/>
-                <a:ea typeface="Be Vietnam Pro" pitchFamily="34" charset="-122"/>
-                <a:cs typeface="Be Vietnam Pro" pitchFamily="34" charset="-120"/>
-              </a:rPr>
-              <a:t> từ</a:t>
-            </a:r>
-            <a:r>
-              <a:rPr lang="en-US" sz="1800" dirty="0" spc="-3" kern="0">
-                <a:solidFill>
-                  <a:srgbClr val="D8D3C4"/>
-                </a:solidFill>
-                <a:latin typeface="Be Vietnam Pro" pitchFamily="34" charset="0"/>
-                <a:ea typeface="Be Vietnam Pro" pitchFamily="34" charset="-122"/>
-                <a:cs typeface="Be Vietnam Pro" pitchFamily="34" charset="-120"/>
-              </a:rPr>
-              <a:t> thông</a:t>
-            </a:r>
-            <a:r>
-              <a:rPr lang="en-US" sz="1800" dirty="0" spc="15" kern="0">
-                <a:solidFill>
-                  <a:srgbClr val="D8D3C4"/>
-                </a:solidFill>
-                <a:latin typeface="Be Vietnam Pro" pitchFamily="34" charset="0"/>
-                <a:ea typeface="Be Vietnam Pro" pitchFamily="34" charset="-122"/>
-                <a:cs typeface="Be Vietnam Pro" pitchFamily="34" charset="-120"/>
-              </a:rPr>
-              <a:t> điệp</a:t>
-            </a:r>
-            <a:r>
-              <a:rPr lang="en-US" sz="1800" dirty="0" spc="-12" kern="0">
-                <a:solidFill>
-                  <a:srgbClr val="D8D3C4"/>
-                </a:solidFill>
-                <a:latin typeface="Be Vietnam Pro" pitchFamily="34" charset="0"/>
-                <a:ea typeface="Be Vietnam Pro" pitchFamily="34" charset="-122"/>
-                <a:cs typeface="Be Vietnam Pro" pitchFamily="34" charset="-120"/>
-              </a:rPr>
-              <a:t> và</a:t>
-            </a:r>
-            <a:r>
-              <a:rPr lang="en-US" sz="1800" dirty="0" spc="-7" kern="0">
-                <a:solidFill>
-                  <a:srgbClr val="D8D3C4"/>
-                </a:solidFill>
-                <a:latin typeface="Be Vietnam Pro" pitchFamily="34" charset="0"/>
-                <a:ea typeface="Be Vietnam Pro" pitchFamily="34" charset="-122"/>
-                <a:cs typeface="Be Vietnam Pro" pitchFamily="34" charset="-120"/>
-              </a:rPr>
-              <a:t> một</a:t>
-            </a:r>
-            <a:r>
-              <a:rPr lang="en-US" sz="1800" dirty="0" spc="-1" kern="0">
-                <a:solidFill>
-                  <a:srgbClr val="D8D3C4"/>
-                </a:solidFill>
-                <a:latin typeface="Be Vietnam Pro" pitchFamily="34" charset="0"/>
-                <a:ea typeface="Be Vietnam Pro" pitchFamily="34" charset="-122"/>
-                <a:cs typeface="Be Vietnam Pro" pitchFamily="34" charset="-120"/>
-              </a:rPr>
-              <a:t> khóa bí</a:t>
-            </a:r>
-            <a:r>
-              <a:rPr lang="en-US" sz="1800" dirty="0" spc="-8" kern="0">
-                <a:solidFill>
-                  <a:srgbClr val="D8D3C4"/>
-                </a:solidFill>
-                <a:latin typeface="Be Vietnam Pro" pitchFamily="34" charset="0"/>
-                <a:ea typeface="Be Vietnam Pro" pitchFamily="34" charset="-122"/>
-                <a:cs typeface="Be Vietnam Pro" pitchFamily="34" charset="-120"/>
-              </a:rPr>
-              <a:t> mật.</a:t>
-            </a:r>
-            <a:endParaRPr lang="en-US" sz="1800" dirty="0"/>
-          </a:p>
-        </p:txBody>
-      </p:sp>
-      <p:sp>
-        <p:nvSpPr>
-          <p:cNvPr id="22" name="Shape 20"/>
-          <p:cNvSpPr/>
-          <p:nvPr/>
-        </p:nvSpPr>
-        <p:spPr>
-          <a:xfrm>
-            <a:off x="13458825" y="2571750"/>
-            <a:ext cx="3914775" cy="2381250"/>
-          </a:xfrm>
-          <a:prstGeom prst="roundRect">
-            <a:avLst>
-              <a:gd name="adj" fmla="val 9600"/>
-            </a:avLst>
-          </a:prstGeom>
-          <a:solidFill>
-            <a:srgbClr val="1E212B"/>
-          </a:solidFill>
-          <a:ln/>
-        </p:spPr>
-      </p:sp>
-      <p:sp>
-        <p:nvSpPr>
-          <p:cNvPr id="23" name="Shape 21"/>
-          <p:cNvSpPr/>
-          <p:nvPr/>
-        </p:nvSpPr>
-        <p:spPr>
-          <a:xfrm>
-            <a:off x="13725525" y="2819400"/>
+          <p:cNvPr id="29" name="Shape 27"/>
+          <p:cNvSpPr/>
+          <p:nvPr/>
+        </p:nvSpPr>
+        <p:spPr>
+          <a:xfrm>
+            <a:off x="1181100" y="3695700"/>
             <a:ext cx="152400" cy="152400"/>
           </a:xfrm>
           <a:prstGeom prst="ellipse">
@@ -4750,14 +4892,200 @@
       </p:sp>
       <p:sp>
         <p:nvSpPr>
-          <p:cNvPr id="24" name="Connector line-1792337941671-534532566"/>
-          <p:cNvSpPr/>
-          <p:nvPr/>
-        </p:nvSpPr>
-        <p:spPr>
-          <a:xfrm>
-            <a:off x="13877925" y="2895600"/>
-            <a:ext cx="3152775" cy="0"/>
+          <p:cNvPr id="30" name="Text 28"/>
+          <p:cNvSpPr/>
+          <p:nvPr/>
+        </p:nvSpPr>
+        <p:spPr>
+          <a:xfrm>
+            <a:off x="1181100" y="3886200"/>
+            <a:ext cx="3467100" cy="400050"/>
+          </a:xfrm>
+          <a:prstGeom prst="rect">
+            <a:avLst/>
+          </a:prstGeom>
+          <a:noFill/>
+          <a:ln/>
+        </p:spPr>
+        <p:txBody>
+          <a:bodyPr wrap="square" lIns="0" tIns="0" rIns="0" bIns="0" rtlCol="0" anchor="t"/>
+          <a:lstStyle/>
+          <a:p>
+            <a:pPr algn="l" indent="0" marL="0">
+              <a:buNone/>
+            </a:pPr>
+            <a:r>
+              <a:rPr lang="en-US" sz="2400" dirty="0" spc="-16" kern="0">
+                <a:solidFill>
+                  <a:srgbClr val="3DD6A0"/>
+                </a:solidFill>
+                <a:latin typeface="Bricolage Grotesque ExtraBold" pitchFamily="34" charset="0"/>
+                <a:ea typeface="Bricolage Grotesque ExtraBold" pitchFamily="34" charset="-122"/>
+                <a:cs typeface="Bricolage Grotesque ExtraBold" pitchFamily="34" charset="-120"/>
+              </a:rPr>
+              <a:t>RSA</a:t>
+            </a:r>
+            <a:endParaRPr lang="en-US" sz="2400" dirty="0"/>
+          </a:p>
+        </p:txBody>
+      </p:sp>
+      <p:sp>
+        <p:nvSpPr>
+          <p:cNvPr id="31" name="Text 29"/>
+          <p:cNvSpPr/>
+          <p:nvPr/>
+        </p:nvSpPr>
+        <p:spPr>
+          <a:xfrm>
+            <a:off x="1181100" y="4286250"/>
+            <a:ext cx="3467100" cy="533400"/>
+          </a:xfrm>
+          <a:prstGeom prst="rect">
+            <a:avLst/>
+          </a:prstGeom>
+          <a:noFill/>
+          <a:ln/>
+        </p:spPr>
+        <p:txBody>
+          <a:bodyPr wrap="square" lIns="0" tIns="0" rIns="0" bIns="0" rtlCol="0" anchor="t"/>
+          <a:lstStyle/>
+          <a:p>
+            <a:pPr algn="l" indent="0" marL="0">
+              <a:buNone/>
+            </a:pPr>
+            <a:r>
+              <a:rPr lang="en-US" sz="1650" dirty="0" spc="-4" kern="0">
+                <a:solidFill>
+                  <a:srgbClr val="9A98A0"/>
+                </a:solidFill>
+                <a:latin typeface="Be Vietnam Pro" pitchFamily="34" charset="0"/>
+                <a:ea typeface="Be Vietnam Pro" pitchFamily="34" charset="-122"/>
+                <a:cs typeface="Be Vietnam Pro" pitchFamily="34" charset="-120"/>
+              </a:rPr>
+              <a:t>Rivest-Shamir-Adleman</a:t>
+            </a:r>
+            <a:endParaRPr lang="en-US" sz="1650" dirty="0"/>
+          </a:p>
+        </p:txBody>
+      </p:sp>
+      <p:sp>
+        <p:nvSpPr>
+          <p:cNvPr id="32" name="Text 30"/>
+          <p:cNvSpPr/>
+          <p:nvPr/>
+        </p:nvSpPr>
+        <p:spPr>
+          <a:xfrm>
+            <a:off x="1181100" y="4914900"/>
+            <a:ext cx="3467100" cy="552450"/>
+          </a:xfrm>
+          <a:prstGeom prst="rect">
+            <a:avLst/>
+          </a:prstGeom>
+          <a:noFill/>
+          <a:ln/>
+        </p:spPr>
+        <p:txBody>
+          <a:bodyPr wrap="square" lIns="0" tIns="11509" rIns="0" bIns="-11509" rtlCol="0" anchor="t"/>
+          <a:lstStyle/>
+          <a:p>
+            <a:pPr algn="l" indent="0" marL="0">
+              <a:lnSpc>
+                <a:spcPts val="2063"/>
+              </a:lnSpc>
+              <a:buNone/>
+            </a:pPr>
+            <a:r>
+              <a:rPr lang="en-US" sz="1650" dirty="0" spc="-6" kern="0">
+                <a:solidFill>
+                  <a:srgbClr val="D8D3C4"/>
+                </a:solidFill>
+                <a:latin typeface="Be Vietnam Pro" pitchFamily="34" charset="0"/>
+                <a:ea typeface="Be Vietnam Pro" pitchFamily="34" charset="-122"/>
+                <a:cs typeface="Be Vietnam Pro" pitchFamily="34" charset="-120"/>
+              </a:rPr>
+              <a:t>Thuật</a:t>
+            </a:r>
+            <a:r>
+              <a:rPr lang="en-US" sz="1650" dirty="0" spc="-7" kern="0">
+                <a:solidFill>
+                  <a:srgbClr val="D8D3C4"/>
+                </a:solidFill>
+                <a:latin typeface="Be Vietnam Pro" pitchFamily="34" charset="0"/>
+                <a:ea typeface="Be Vietnam Pro" pitchFamily="34" charset="-122"/>
+                <a:cs typeface="Be Vietnam Pro" pitchFamily="34" charset="-120"/>
+              </a:rPr>
+              <a:t> toán</a:t>
+            </a:r>
+            <a:r>
+              <a:rPr lang="en-US" sz="1650" dirty="0" spc="1" kern="0">
+                <a:solidFill>
+                  <a:srgbClr val="D8D3C4"/>
+                </a:solidFill>
+                <a:latin typeface="Be Vietnam Pro" pitchFamily="34" charset="0"/>
+                <a:ea typeface="Be Vietnam Pro" pitchFamily="34" charset="-122"/>
+                <a:cs typeface="Be Vietnam Pro" pitchFamily="34" charset="-120"/>
+              </a:rPr>
+              <a:t> mã</a:t>
+            </a:r>
+            <a:r>
+              <a:rPr lang="en-US" sz="1650" dirty="0" spc="-2" kern="0">
+                <a:solidFill>
+                  <a:srgbClr val="D8D3C4"/>
+                </a:solidFill>
+                <a:latin typeface="Be Vietnam Pro" pitchFamily="34" charset="0"/>
+                <a:ea typeface="Be Vietnam Pro" pitchFamily="34" charset="-122"/>
+                <a:cs typeface="Be Vietnam Pro" pitchFamily="34" charset="-120"/>
+              </a:rPr>
+              <a:t> hóa</a:t>
+            </a:r>
+            <a:r>
+              <a:rPr lang="en-US" sz="1650" dirty="0" spc="0" kern="0">
+                <a:solidFill>
+                  <a:srgbClr val="D8D3C4"/>
+                </a:solidFill>
+                <a:latin typeface="Be Vietnam Pro" pitchFamily="34" charset="0"/>
+                <a:ea typeface="Be Vietnam Pro" pitchFamily="34" charset="-122"/>
+                <a:cs typeface="Be Vietnam Pro" pitchFamily="34" charset="-120"/>
+              </a:rPr>
+              <a:t> khóa công khai.</a:t>
+            </a:r>
+            <a:endParaRPr lang="en-US" sz="1650" dirty="0"/>
+          </a:p>
+        </p:txBody>
+      </p:sp>
+      <p:sp>
+        <p:nvSpPr>
+          <p:cNvPr id="33" name="Shape 31"/>
+          <p:cNvSpPr/>
+          <p:nvPr/>
+        </p:nvSpPr>
+        <p:spPr>
+          <a:xfrm>
+            <a:off x="5067300" y="3543300"/>
+            <a:ext cx="4000500" cy="1962150"/>
+          </a:xfrm>
+          <a:prstGeom prst="roundRect">
+            <a:avLst>
+              <a:gd name="adj" fmla="val 10680"/>
+            </a:avLst>
+          </a:prstGeom>
+          <a:solidFill>
+            <a:srgbClr val="1E212B"/>
+          </a:solidFill>
+          <a:ln/>
+        </p:spPr>
+      </p:sp>
+      <p:sp>
+        <p:nvSpPr>
+          <p:cNvPr id="34" name="Connector line-1792388047736-657550752"/>
+          <p:cNvSpPr/>
+          <p:nvPr/>
+        </p:nvSpPr>
+        <p:spPr>
+          <a:xfrm>
+            <a:off x="5486400" y="3771900"/>
+            <a:ext cx="3314700" cy="0"/>
           </a:xfrm>
           <a:prstGeom prst="line">
             <a:avLst/>
@@ -4775,254 +5103,13 @@
       </p:sp>
       <p:sp>
         <p:nvSpPr>
-          <p:cNvPr id="25" name="Text 23"/>
-          <p:cNvSpPr/>
-          <p:nvPr/>
-        </p:nvSpPr>
-        <p:spPr>
-          <a:xfrm>
-            <a:off x="13801725" y="3067050"/>
-            <a:ext cx="3238500" cy="628650"/>
-          </a:xfrm>
-          <a:prstGeom prst="rect">
-            <a:avLst/>
-          </a:prstGeom>
-          <a:noFill/>
-          <a:ln/>
-        </p:spPr>
-        <p:txBody>
-          <a:bodyPr wrap="square" lIns="0" tIns="0" rIns="0" bIns="0" rtlCol="0" anchor="t"/>
-          <a:lstStyle/>
-          <a:p>
-            <a:pPr algn="l" indent="0" marL="0">
-              <a:buNone/>
-            </a:pPr>
-            <a:r>
-              <a:rPr lang="en-US" sz="3900" dirty="0" spc="-5" kern="0">
-                <a:solidFill>
-                  <a:srgbClr val="3DD6A0"/>
-                </a:solidFill>
-                <a:latin typeface="Bricolage Grotesque ExtraBold" pitchFamily="34" charset="0"/>
-                <a:ea typeface="Bricolage Grotesque ExtraBold" pitchFamily="34" charset="-122"/>
-                <a:cs typeface="Bricolage Grotesque ExtraBold" pitchFamily="34" charset="-120"/>
-              </a:rPr>
-              <a:t>SHA</a:t>
-            </a:r>
-            <a:endParaRPr lang="en-US" sz="3900" dirty="0"/>
-          </a:p>
-        </p:txBody>
-      </p:sp>
-      <p:sp>
-        <p:nvSpPr>
-          <p:cNvPr id="26" name="Text 24"/>
-          <p:cNvSpPr/>
-          <p:nvPr/>
-        </p:nvSpPr>
-        <p:spPr>
-          <a:xfrm>
-            <a:off x="13801725" y="3714750"/>
-            <a:ext cx="3238500" cy="533400"/>
-          </a:xfrm>
-          <a:prstGeom prst="rect">
-            <a:avLst/>
-          </a:prstGeom>
-          <a:noFill/>
-          <a:ln/>
-        </p:spPr>
-        <p:txBody>
-          <a:bodyPr wrap="square" lIns="0" tIns="0" rIns="0" bIns="0" rtlCol="0" anchor="t"/>
-          <a:lstStyle/>
-          <a:p>
-            <a:pPr algn="l" indent="0" marL="0">
-              <a:buNone/>
-            </a:pPr>
-            <a:r>
-              <a:rPr lang="en-US" sz="1650" dirty="0" spc="-14" kern="0">
-                <a:solidFill>
-                  <a:srgbClr val="9A98A0"/>
-                </a:solidFill>
-                <a:latin typeface="Be Vietnam Pro" pitchFamily="34" charset="0"/>
-                <a:ea typeface="Be Vietnam Pro" pitchFamily="34" charset="-122"/>
-                <a:cs typeface="Be Vietnam Pro" pitchFamily="34" charset="-120"/>
-              </a:rPr>
-              <a:t>Secure</a:t>
-            </a:r>
-            <a:r>
-              <a:rPr lang="en-US" sz="1650" dirty="0" spc="0" kern="0">
-                <a:solidFill>
-                  <a:srgbClr val="9A98A0"/>
-                </a:solidFill>
-                <a:latin typeface="Be Vietnam Pro" pitchFamily="34" charset="0"/>
-                <a:ea typeface="Be Vietnam Pro" pitchFamily="34" charset="-122"/>
-                <a:cs typeface="Be Vietnam Pro" pitchFamily="34" charset="-120"/>
-              </a:rPr>
-              <a:t> Hash</a:t>
-            </a:r>
-            <a:r>
-              <a:rPr lang="en-US" sz="1650" dirty="0" spc="-1" kern="0">
-                <a:solidFill>
-                  <a:srgbClr val="9A98A0"/>
-                </a:solidFill>
-                <a:latin typeface="Be Vietnam Pro" pitchFamily="34" charset="0"/>
-                <a:ea typeface="Be Vietnam Pro" pitchFamily="34" charset="-122"/>
-                <a:cs typeface="Be Vietnam Pro" pitchFamily="34" charset="-120"/>
-              </a:rPr>
-              <a:t> Algorithm</a:t>
-            </a:r>
-            <a:endParaRPr lang="en-US" sz="1650" dirty="0"/>
-          </a:p>
-        </p:txBody>
-      </p:sp>
-      <p:sp>
-        <p:nvSpPr>
-          <p:cNvPr id="27" name="Text 25"/>
-          <p:cNvSpPr/>
-          <p:nvPr/>
-        </p:nvSpPr>
-        <p:spPr>
-          <a:xfrm>
-            <a:off x="13801725" y="4286250"/>
-            <a:ext cx="3238500" cy="590550"/>
-          </a:xfrm>
-          <a:prstGeom prst="rect">
-            <a:avLst/>
-          </a:prstGeom>
-          <a:noFill/>
-          <a:ln/>
-        </p:spPr>
-        <p:txBody>
-          <a:bodyPr wrap="square" lIns="0" tIns="12573" rIns="0" bIns="-12573" rtlCol="0" anchor="t"/>
-          <a:lstStyle/>
-          <a:p>
-            <a:pPr algn="l" indent="0" marL="0">
-              <a:lnSpc>
-                <a:spcPts val="2250"/>
-              </a:lnSpc>
-              <a:buNone/>
-            </a:pPr>
-            <a:r>
-              <a:rPr lang="en-US" sz="1800" dirty="0" spc="0" kern="0">
-                <a:solidFill>
-                  <a:srgbClr val="D8D3C4"/>
-                </a:solidFill>
-                <a:latin typeface="Be Vietnam Pro" pitchFamily="34" charset="0"/>
-                <a:ea typeface="Be Vietnam Pro" pitchFamily="34" charset="-122"/>
-                <a:cs typeface="Be Vietnam Pro" pitchFamily="34" charset="-120"/>
-              </a:rPr>
-              <a:t>Họ</a:t>
-            </a:r>
-            <a:r>
-              <a:rPr lang="en-US" sz="1800" dirty="0" spc="-8" kern="0">
-                <a:solidFill>
-                  <a:srgbClr val="D8D3C4"/>
-                </a:solidFill>
-                <a:latin typeface="Be Vietnam Pro" pitchFamily="34" charset="0"/>
-                <a:ea typeface="Be Vietnam Pro" pitchFamily="34" charset="-122"/>
-                <a:cs typeface="Be Vietnam Pro" pitchFamily="34" charset="-120"/>
-              </a:rPr>
-              <a:t> thuật</a:t>
-            </a:r>
-            <a:r>
-              <a:rPr lang="en-US" sz="1800" dirty="0" spc="-10" kern="0">
-                <a:solidFill>
-                  <a:srgbClr val="D8D3C4"/>
-                </a:solidFill>
-                <a:latin typeface="Be Vietnam Pro" pitchFamily="34" charset="0"/>
-                <a:ea typeface="Be Vietnam Pro" pitchFamily="34" charset="-122"/>
-                <a:cs typeface="Be Vietnam Pro" pitchFamily="34" charset="-120"/>
-              </a:rPr>
-              <a:t> toán</a:t>
-            </a:r>
-            <a:r>
-              <a:rPr lang="en-US" sz="1800" dirty="0" spc="-4" kern="0">
-                <a:solidFill>
-                  <a:srgbClr val="D8D3C4"/>
-                </a:solidFill>
-                <a:latin typeface="Be Vietnam Pro" pitchFamily="34" charset="0"/>
-                <a:ea typeface="Be Vietnam Pro" pitchFamily="34" charset="-122"/>
-                <a:cs typeface="Be Vietnam Pro" pitchFamily="34" charset="-120"/>
-              </a:rPr>
-              <a:t> băm;</a:t>
-            </a:r>
-            <a:r>
-              <a:rPr lang="en-US" sz="1800" dirty="0" spc="0" kern="0">
-                <a:solidFill>
-                  <a:srgbClr val="D8D3C4"/>
-                </a:solidFill>
-                <a:latin typeface="Be Vietnam Pro" pitchFamily="34" charset="0"/>
-                <a:ea typeface="Be Vietnam Pro" pitchFamily="34" charset="-122"/>
-                <a:cs typeface="Be Vietnam Pro" pitchFamily="34" charset="-120"/>
-              </a:rPr>
-              <a:t> SHA-256</a:t>
-            </a:r>
-            <a:r>
-              <a:rPr lang="en-US" sz="1800" dirty="0" spc="-1" kern="0">
-                <a:solidFill>
-                  <a:srgbClr val="D8D3C4"/>
-                </a:solidFill>
-                <a:latin typeface="Be Vietnam Pro" pitchFamily="34" charset="0"/>
-                <a:ea typeface="Be Vietnam Pro" pitchFamily="34" charset="-122"/>
-                <a:cs typeface="Be Vietnam Pro" pitchFamily="34" charset="-120"/>
-              </a:rPr>
-              <a:t> là</a:t>
-            </a:r>
-            <a:r>
-              <a:rPr lang="en-US" sz="1800" dirty="0" spc="-7" kern="0">
-                <a:solidFill>
-                  <a:srgbClr val="D8D3C4"/>
-                </a:solidFill>
-                <a:latin typeface="Be Vietnam Pro" pitchFamily="34" charset="0"/>
-                <a:ea typeface="Be Vietnam Pro" pitchFamily="34" charset="-122"/>
-                <a:cs typeface="Be Vietnam Pro" pitchFamily="34" charset="-120"/>
-              </a:rPr>
-              <a:t> một</a:t>
-            </a:r>
-            <a:r>
-              <a:rPr lang="en-US" sz="1800" dirty="0" spc="0" kern="0">
-                <a:solidFill>
-                  <a:srgbClr val="D8D3C4"/>
-                </a:solidFill>
-                <a:latin typeface="Be Vietnam Pro" pitchFamily="34" charset="0"/>
-                <a:ea typeface="Be Vietnam Pro" pitchFamily="34" charset="-122"/>
-                <a:cs typeface="Be Vietnam Pro" pitchFamily="34" charset="-120"/>
-              </a:rPr>
-              <a:t> loại.</a:t>
-            </a:r>
-            <a:endParaRPr lang="en-US" sz="1800" dirty="0"/>
-          </a:p>
-        </p:txBody>
-      </p:sp>
-      <p:sp>
-        <p:nvSpPr>
-          <p:cNvPr id="28" name="Shape 26"/>
-          <p:cNvSpPr/>
-          <p:nvPr/>
-        </p:nvSpPr>
-        <p:spPr>
-          <a:xfrm>
-            <a:off x="914400" y="5191125"/>
-            <a:ext cx="3914775" cy="2381250"/>
-          </a:xfrm>
-          <a:prstGeom prst="roundRect">
-            <a:avLst>
-              <a:gd name="adj" fmla="val 9600"/>
-            </a:avLst>
-          </a:prstGeom>
-          <a:solidFill>
-            <a:srgbClr val="1E212B"/>
-          </a:solidFill>
-          <a:ln/>
-        </p:spPr>
-      </p:sp>
-      <p:sp>
-        <p:nvSpPr>
-          <p:cNvPr id="29" name="Shape 27"/>
-          <p:cNvSpPr/>
-          <p:nvPr/>
-        </p:nvSpPr>
-        <p:spPr>
-          <a:xfrm>
-            <a:off x="1181100" y="5438775"/>
+          <p:cNvPr id="35" name="Shape 33"/>
+          <p:cNvSpPr/>
+          <p:nvPr/>
+        </p:nvSpPr>
+        <p:spPr>
+          <a:xfrm>
+            <a:off x="5334000" y="3695700"/>
             <a:ext cx="152400" cy="152400"/>
           </a:xfrm>
           <a:prstGeom prst="ellipse">
@@ -5041,14 +5128,222 @@
       </p:sp>
       <p:sp>
         <p:nvSpPr>
-          <p:cNvPr id="30" name="Connector line-1792337941678-711601852"/>
-          <p:cNvSpPr/>
-          <p:nvPr/>
-        </p:nvSpPr>
-        <p:spPr>
-          <a:xfrm>
-            <a:off x="1333500" y="5514975"/>
-            <a:ext cx="3152775" cy="0"/>
+          <p:cNvPr id="36" name="Text 34"/>
+          <p:cNvSpPr/>
+          <p:nvPr/>
+        </p:nvSpPr>
+        <p:spPr>
+          <a:xfrm>
+            <a:off x="5334000" y="3886200"/>
+            <a:ext cx="3467100" cy="400050"/>
+          </a:xfrm>
+          <a:prstGeom prst="rect">
+            <a:avLst/>
+          </a:prstGeom>
+          <a:noFill/>
+          <a:ln/>
+        </p:spPr>
+        <p:txBody>
+          <a:bodyPr wrap="square" lIns="0" tIns="0" rIns="0" bIns="0" rtlCol="0" anchor="t"/>
+          <a:lstStyle/>
+          <a:p>
+            <a:pPr algn="l" indent="0" marL="0">
+              <a:buNone/>
+            </a:pPr>
+            <a:r>
+              <a:rPr lang="en-US" sz="2400" dirty="0" spc="-21" kern="0">
+                <a:solidFill>
+                  <a:srgbClr val="3DD6A0"/>
+                </a:solidFill>
+                <a:latin typeface="Bricolage Grotesque ExtraBold" pitchFamily="34" charset="0"/>
+                <a:ea typeface="Bricolage Grotesque ExtraBold" pitchFamily="34" charset="-122"/>
+                <a:cs typeface="Bricolage Grotesque ExtraBold" pitchFamily="34" charset="-120"/>
+              </a:rPr>
+              <a:t>ECDSA</a:t>
+            </a:r>
+            <a:endParaRPr lang="en-US" sz="2400" dirty="0"/>
+          </a:p>
+        </p:txBody>
+      </p:sp>
+      <p:sp>
+        <p:nvSpPr>
+          <p:cNvPr id="37" name="Text 35"/>
+          <p:cNvSpPr/>
+          <p:nvPr/>
+        </p:nvSpPr>
+        <p:spPr>
+          <a:xfrm>
+            <a:off x="5334000" y="4286250"/>
+            <a:ext cx="3467100" cy="533400"/>
+          </a:xfrm>
+          <a:prstGeom prst="rect">
+            <a:avLst/>
+          </a:prstGeom>
+          <a:noFill/>
+          <a:ln/>
+        </p:spPr>
+        <p:txBody>
+          <a:bodyPr wrap="square" lIns="0" tIns="0" rIns="0" bIns="0" rtlCol="0" anchor="t"/>
+          <a:lstStyle/>
+          <a:p>
+            <a:pPr algn="l" indent="0" marL="0">
+              <a:buNone/>
+            </a:pPr>
+            <a:r>
+              <a:rPr lang="en-US" sz="1650" dirty="0" spc="-3" kern="0">
+                <a:solidFill>
+                  <a:srgbClr val="9A98A0"/>
+                </a:solidFill>
+                <a:latin typeface="Be Vietnam Pro" pitchFamily="34" charset="0"/>
+                <a:ea typeface="Be Vietnam Pro" pitchFamily="34" charset="-122"/>
+                <a:cs typeface="Be Vietnam Pro" pitchFamily="34" charset="-120"/>
+              </a:rPr>
+              <a:t>Elliptic</a:t>
+            </a:r>
+            <a:r>
+              <a:rPr lang="en-US" sz="1650" dirty="0" spc="-5" kern="0">
+                <a:solidFill>
+                  <a:srgbClr val="9A98A0"/>
+                </a:solidFill>
+                <a:latin typeface="Be Vietnam Pro" pitchFamily="34" charset="0"/>
+                <a:ea typeface="Be Vietnam Pro" pitchFamily="34" charset="-122"/>
+                <a:cs typeface="Be Vietnam Pro" pitchFamily="34" charset="-120"/>
+              </a:rPr>
+              <a:t> Curve</a:t>
+            </a:r>
+            <a:r>
+              <a:rPr lang="en-US" sz="1650" dirty="0" spc="-4" kern="0">
+                <a:solidFill>
+                  <a:srgbClr val="9A98A0"/>
+                </a:solidFill>
+                <a:latin typeface="Be Vietnam Pro" pitchFamily="34" charset="0"/>
+                <a:ea typeface="Be Vietnam Pro" pitchFamily="34" charset="-122"/>
+                <a:cs typeface="Be Vietnam Pro" pitchFamily="34" charset="-120"/>
+              </a:rPr>
+              <a:t> Digital</a:t>
+            </a:r>
+            <a:r>
+              <a:rPr lang="en-US" sz="1650" dirty="0" spc="-6" kern="0">
+                <a:solidFill>
+                  <a:srgbClr val="9A98A0"/>
+                </a:solidFill>
+                <a:latin typeface="Be Vietnam Pro" pitchFamily="34" charset="0"/>
+                <a:ea typeface="Be Vietnam Pro" pitchFamily="34" charset="-122"/>
+                <a:cs typeface="Be Vietnam Pro" pitchFamily="34" charset="-120"/>
+              </a:rPr>
+              <a:t> Signature Algorithm</a:t>
+            </a:r>
+            <a:endParaRPr lang="en-US" sz="1650" dirty="0"/>
+          </a:p>
+        </p:txBody>
+      </p:sp>
+      <p:sp>
+        <p:nvSpPr>
+          <p:cNvPr id="38" name="Text 36"/>
+          <p:cNvSpPr/>
+          <p:nvPr/>
+        </p:nvSpPr>
+        <p:spPr>
+          <a:xfrm>
+            <a:off x="5334000" y="4914900"/>
+            <a:ext cx="3467100" cy="552450"/>
+          </a:xfrm>
+          <a:prstGeom prst="rect">
+            <a:avLst/>
+          </a:prstGeom>
+          <a:noFill/>
+          <a:ln/>
+        </p:spPr>
+        <p:txBody>
+          <a:bodyPr wrap="square" lIns="0" tIns="11509" rIns="0" bIns="-11509" rtlCol="0" anchor="t"/>
+          <a:lstStyle/>
+          <a:p>
+            <a:pPr algn="l" indent="0" marL="0">
+              <a:lnSpc>
+                <a:spcPts val="2063"/>
+              </a:lnSpc>
+              <a:buNone/>
+            </a:pPr>
+            <a:r>
+              <a:rPr lang="en-US" sz="1650" dirty="0" spc="1" kern="0">
+                <a:solidFill>
+                  <a:srgbClr val="D8D3C4"/>
+                </a:solidFill>
+                <a:latin typeface="Be Vietnam Pro" pitchFamily="34" charset="0"/>
+                <a:ea typeface="Be Vietnam Pro" pitchFamily="34" charset="-122"/>
+                <a:cs typeface="Be Vietnam Pro" pitchFamily="34" charset="-120"/>
+              </a:rPr>
+              <a:t>Chữ</a:t>
+            </a:r>
+            <a:r>
+              <a:rPr lang="en-US" sz="1650" dirty="0" spc="3" kern="0">
+                <a:solidFill>
+                  <a:srgbClr val="D8D3C4"/>
+                </a:solidFill>
+                <a:latin typeface="Be Vietnam Pro" pitchFamily="34" charset="0"/>
+                <a:ea typeface="Be Vietnam Pro" pitchFamily="34" charset="-122"/>
+                <a:cs typeface="Be Vietnam Pro" pitchFamily="34" charset="-120"/>
+              </a:rPr>
+              <a:t> ký</a:t>
+            </a:r>
+            <a:r>
+              <a:rPr lang="en-US" sz="1650" dirty="0" spc="-4" kern="0">
+                <a:solidFill>
+                  <a:srgbClr val="D8D3C4"/>
+                </a:solidFill>
+                <a:latin typeface="Be Vietnam Pro" pitchFamily="34" charset="0"/>
+                <a:ea typeface="Be Vietnam Pro" pitchFamily="34" charset="-122"/>
+                <a:cs typeface="Be Vietnam Pro" pitchFamily="34" charset="-120"/>
+              </a:rPr>
+              <a:t> số</a:t>
+            </a:r>
+            <a:r>
+              <a:rPr lang="en-US" sz="1650" dirty="0" spc="0" kern="0">
+                <a:solidFill>
+                  <a:srgbClr val="D8D3C4"/>
+                </a:solidFill>
+                <a:latin typeface="Be Vietnam Pro" pitchFamily="34" charset="0"/>
+                <a:ea typeface="Be Vietnam Pro" pitchFamily="34" charset="-122"/>
+                <a:cs typeface="Be Vietnam Pro" pitchFamily="34" charset="-120"/>
+              </a:rPr>
+              <a:t> dùng đường cong elliptic.</a:t>
+            </a:r>
+            <a:endParaRPr lang="en-US" sz="1650" dirty="0"/>
+          </a:p>
+        </p:txBody>
+      </p:sp>
+      <p:sp>
+        <p:nvSpPr>
+          <p:cNvPr id="39" name="Shape 37"/>
+          <p:cNvSpPr/>
+          <p:nvPr/>
+        </p:nvSpPr>
+        <p:spPr>
+          <a:xfrm>
+            <a:off x="9220200" y="3543300"/>
+            <a:ext cx="4000500" cy="1962150"/>
+          </a:xfrm>
+          <a:prstGeom prst="roundRect">
+            <a:avLst>
+              <a:gd name="adj" fmla="val 10680"/>
+            </a:avLst>
+          </a:prstGeom>
+          <a:solidFill>
+            <a:srgbClr val="1E212B"/>
+          </a:solidFill>
+          <a:ln/>
+        </p:spPr>
+      </p:sp>
+      <p:sp>
+        <p:nvSpPr>
+          <p:cNvPr id="40" name="Connector line-1792388047742-126820736"/>
+          <p:cNvSpPr/>
+          <p:nvPr/>
+        </p:nvSpPr>
+        <p:spPr>
+          <a:xfrm>
+            <a:off x="9639300" y="3771900"/>
+            <a:ext cx="3314700" cy="0"/>
           </a:xfrm>
           <a:prstGeom prst="line">
             <a:avLst/>
@@ -5066,188 +5361,13 @@
       </p:sp>
       <p:sp>
         <p:nvSpPr>
-          <p:cNvPr id="31" name="Text 29"/>
-          <p:cNvSpPr/>
-          <p:nvPr/>
-        </p:nvSpPr>
-        <p:spPr>
-          <a:xfrm>
-            <a:off x="1257300" y="5686425"/>
-            <a:ext cx="3238500" cy="628650"/>
-          </a:xfrm>
-          <a:prstGeom prst="rect">
-            <a:avLst/>
-          </a:prstGeom>
-          <a:noFill/>
-          <a:ln/>
-        </p:spPr>
-        <p:txBody>
-          <a:bodyPr wrap="square" lIns="0" tIns="0" rIns="0" bIns="0" rtlCol="0" anchor="t"/>
-          <a:lstStyle/>
-          <a:p>
-            <a:pPr algn="l" indent="0" marL="0">
-              <a:buNone/>
-            </a:pPr>
-            <a:r>
-              <a:rPr lang="en-US" sz="3900" dirty="0" spc="-30" kern="0">
-                <a:solidFill>
-                  <a:srgbClr val="3DD6A0"/>
-                </a:solidFill>
-                <a:latin typeface="Bricolage Grotesque ExtraBold" pitchFamily="34" charset="0"/>
-                <a:ea typeface="Bricolage Grotesque ExtraBold" pitchFamily="34" charset="-122"/>
-                <a:cs typeface="Bricolage Grotesque ExtraBold" pitchFamily="34" charset="-120"/>
-              </a:rPr>
-              <a:t>RSA</a:t>
-            </a:r>
-            <a:endParaRPr lang="en-US" sz="3900" dirty="0"/>
-          </a:p>
-        </p:txBody>
-      </p:sp>
-      <p:sp>
-        <p:nvSpPr>
-          <p:cNvPr id="32" name="Text 30"/>
-          <p:cNvSpPr/>
-          <p:nvPr/>
-        </p:nvSpPr>
-        <p:spPr>
-          <a:xfrm>
-            <a:off x="1257300" y="6334125"/>
-            <a:ext cx="3238500" cy="533400"/>
-          </a:xfrm>
-          <a:prstGeom prst="rect">
-            <a:avLst/>
-          </a:prstGeom>
-          <a:noFill/>
-          <a:ln/>
-        </p:spPr>
-        <p:txBody>
-          <a:bodyPr wrap="square" lIns="0" tIns="0" rIns="0" bIns="0" rtlCol="0" anchor="t"/>
-          <a:lstStyle/>
-          <a:p>
-            <a:pPr algn="l" indent="0" marL="0">
-              <a:buNone/>
-            </a:pPr>
-            <a:r>
-              <a:rPr lang="en-US" sz="1650" dirty="0" spc="-4" kern="0">
-                <a:solidFill>
-                  <a:srgbClr val="9A98A0"/>
-                </a:solidFill>
-                <a:latin typeface="Be Vietnam Pro" pitchFamily="34" charset="0"/>
-                <a:ea typeface="Be Vietnam Pro" pitchFamily="34" charset="-122"/>
-                <a:cs typeface="Be Vietnam Pro" pitchFamily="34" charset="-120"/>
-              </a:rPr>
-              <a:t>Rivest-Shamir-Adleman</a:t>
-            </a:r>
-            <a:endParaRPr lang="en-US" sz="1650" dirty="0"/>
-          </a:p>
-        </p:txBody>
-      </p:sp>
-      <p:sp>
-        <p:nvSpPr>
-          <p:cNvPr id="33" name="Text 31"/>
-          <p:cNvSpPr/>
-          <p:nvPr/>
-        </p:nvSpPr>
-        <p:spPr>
-          <a:xfrm>
-            <a:off x="1257300" y="6905625"/>
-            <a:ext cx="3238500" cy="590550"/>
-          </a:xfrm>
-          <a:prstGeom prst="rect">
-            <a:avLst/>
-          </a:prstGeom>
-          <a:noFill/>
-          <a:ln/>
-        </p:spPr>
-        <p:txBody>
-          <a:bodyPr wrap="square" lIns="0" tIns="12573" rIns="0" bIns="-12573" rtlCol="0" anchor="t"/>
-          <a:lstStyle/>
-          <a:p>
-            <a:pPr algn="l" indent="0" marL="0">
-              <a:lnSpc>
-                <a:spcPts val="2250"/>
-              </a:lnSpc>
-              <a:buNone/>
-            </a:pPr>
-            <a:r>
-              <a:rPr lang="en-US" sz="1800" dirty="0" spc="-10" kern="0">
-                <a:solidFill>
-                  <a:srgbClr val="D8D3C4"/>
-                </a:solidFill>
-                <a:latin typeface="Be Vietnam Pro" pitchFamily="34" charset="0"/>
-                <a:ea typeface="Be Vietnam Pro" pitchFamily="34" charset="-122"/>
-                <a:cs typeface="Be Vietnam Pro" pitchFamily="34" charset="-120"/>
-              </a:rPr>
-              <a:t>Thuật toán</a:t>
-            </a:r>
-            <a:r>
-              <a:rPr lang="en-US" sz="1800" dirty="0" spc="-1" kern="0">
-                <a:solidFill>
-                  <a:srgbClr val="D8D3C4"/>
-                </a:solidFill>
-                <a:latin typeface="Be Vietnam Pro" pitchFamily="34" charset="0"/>
-                <a:ea typeface="Be Vietnam Pro" pitchFamily="34" charset="-122"/>
-                <a:cs typeface="Be Vietnam Pro" pitchFamily="34" charset="-120"/>
-              </a:rPr>
-              <a:t> mã hóa khóa</a:t>
-            </a:r>
-            <a:r>
-              <a:rPr lang="en-US" sz="1800" dirty="0" spc="-2" kern="0">
-                <a:solidFill>
-                  <a:srgbClr val="D8D3C4"/>
-                </a:solidFill>
-                <a:latin typeface="Be Vietnam Pro" pitchFamily="34" charset="0"/>
-                <a:ea typeface="Be Vietnam Pro" pitchFamily="34" charset="-122"/>
-                <a:cs typeface="Be Vietnam Pro" pitchFamily="34" charset="-120"/>
-              </a:rPr>
-              <a:t> công</a:t>
-            </a:r>
-            <a:r>
-              <a:rPr lang="en-US" sz="1800" dirty="0" spc="2" kern="0">
-                <a:solidFill>
-                  <a:srgbClr val="D8D3C4"/>
-                </a:solidFill>
-                <a:latin typeface="Be Vietnam Pro" pitchFamily="34" charset="0"/>
-                <a:ea typeface="Be Vietnam Pro" pitchFamily="34" charset="-122"/>
-                <a:cs typeface="Be Vietnam Pro" pitchFamily="34" charset="-120"/>
-              </a:rPr>
-              <a:t> khai.</a:t>
-            </a:r>
-            <a:endParaRPr lang="en-US" sz="1800" dirty="0"/>
-          </a:p>
-        </p:txBody>
-      </p:sp>
-      <p:sp>
-        <p:nvSpPr>
-          <p:cNvPr id="34" name="Shape 32"/>
-          <p:cNvSpPr/>
-          <p:nvPr/>
-        </p:nvSpPr>
-        <p:spPr>
-          <a:xfrm>
-            <a:off x="5095875" y="5191125"/>
-            <a:ext cx="3914775" cy="2381250"/>
-          </a:xfrm>
-          <a:prstGeom prst="roundRect">
-            <a:avLst>
-              <a:gd name="adj" fmla="val 9600"/>
-            </a:avLst>
-          </a:prstGeom>
-          <a:solidFill>
-            <a:srgbClr val="1E212B"/>
-          </a:solidFill>
-          <a:ln/>
-        </p:spPr>
-      </p:sp>
-      <p:sp>
-        <p:nvSpPr>
-          <p:cNvPr id="35" name="Shape 33"/>
-          <p:cNvSpPr/>
-          <p:nvPr/>
-        </p:nvSpPr>
-        <p:spPr>
-          <a:xfrm>
-            <a:off x="5362575" y="5438775"/>
+          <p:cNvPr id="41" name="Shape 39"/>
+          <p:cNvSpPr/>
+          <p:nvPr/>
+        </p:nvSpPr>
+        <p:spPr>
+          <a:xfrm>
+            <a:off x="9486900" y="3695700"/>
             <a:ext cx="152400" cy="152400"/>
           </a:xfrm>
           <a:prstGeom prst="ellipse">
@@ -5266,14 +5386,1051 @@
       </p:sp>
       <p:sp>
         <p:nvSpPr>
-          <p:cNvPr id="36" name="Connector line-1792337941682-985762907"/>
-          <p:cNvSpPr/>
-          <p:nvPr/>
-        </p:nvSpPr>
-        <p:spPr>
-          <a:xfrm>
-            <a:off x="5514975" y="5514975"/>
-            <a:ext cx="3152775" cy="0"/>
+          <p:cNvPr id="42" name="Text 40"/>
+          <p:cNvSpPr/>
+          <p:nvPr/>
+        </p:nvSpPr>
+        <p:spPr>
+          <a:xfrm>
+            <a:off x="9486900" y="3886200"/>
+            <a:ext cx="3467100" cy="400050"/>
+          </a:xfrm>
+          <a:prstGeom prst="rect">
+            <a:avLst/>
+          </a:prstGeom>
+          <a:noFill/>
+          <a:ln/>
+        </p:spPr>
+        <p:txBody>
+          <a:bodyPr wrap="square" lIns="0" tIns="0" rIns="0" bIns="0" rtlCol="0" anchor="t"/>
+          <a:lstStyle/>
+          <a:p>
+            <a:pPr algn="l" indent="0" marL="0">
+              <a:buNone/>
+            </a:pPr>
+            <a:r>
+              <a:rPr lang="en-US" sz="2400" dirty="0" spc="-7" kern="0">
+                <a:solidFill>
+                  <a:srgbClr val="3DD6A0"/>
+                </a:solidFill>
+                <a:latin typeface="Bricolage Grotesque ExtraBold" pitchFamily="34" charset="0"/>
+                <a:ea typeface="Bricolage Grotesque ExtraBold" pitchFamily="34" charset="-122"/>
+                <a:cs typeface="Bricolage Grotesque ExtraBold" pitchFamily="34" charset="-120"/>
+              </a:rPr>
+              <a:t>JWS</a:t>
+            </a:r>
+            <a:endParaRPr lang="en-US" sz="2400" dirty="0"/>
+          </a:p>
+        </p:txBody>
+      </p:sp>
+      <p:sp>
+        <p:nvSpPr>
+          <p:cNvPr id="43" name="Text 41"/>
+          <p:cNvSpPr/>
+          <p:nvPr/>
+        </p:nvSpPr>
+        <p:spPr>
+          <a:xfrm>
+            <a:off x="9486900" y="4286250"/>
+            <a:ext cx="3467100" cy="533400"/>
+          </a:xfrm>
+          <a:prstGeom prst="rect">
+            <a:avLst/>
+          </a:prstGeom>
+          <a:noFill/>
+          <a:ln/>
+        </p:spPr>
+        <p:txBody>
+          <a:bodyPr wrap="square" lIns="0" tIns="0" rIns="0" bIns="0" rtlCol="0" anchor="t"/>
+          <a:lstStyle/>
+          <a:p>
+            <a:pPr algn="l" indent="0" marL="0">
+              <a:buNone/>
+            </a:pPr>
+            <a:r>
+              <a:rPr lang="en-US" sz="1650" dirty="0" spc="6" kern="0">
+                <a:solidFill>
+                  <a:srgbClr val="9A98A0"/>
+                </a:solidFill>
+                <a:latin typeface="Be Vietnam Pro" pitchFamily="34" charset="0"/>
+                <a:ea typeface="Be Vietnam Pro" pitchFamily="34" charset="-122"/>
+                <a:cs typeface="Be Vietnam Pro" pitchFamily="34" charset="-120"/>
+              </a:rPr>
+              <a:t>JSON</a:t>
+            </a:r>
+            <a:r>
+              <a:rPr lang="en-US" sz="1650" dirty="0" spc="-18" kern="0">
+                <a:solidFill>
+                  <a:srgbClr val="9A98A0"/>
+                </a:solidFill>
+                <a:latin typeface="Be Vietnam Pro" pitchFamily="34" charset="0"/>
+                <a:ea typeface="Be Vietnam Pro" pitchFamily="34" charset="-122"/>
+                <a:cs typeface="Be Vietnam Pro" pitchFamily="34" charset="-120"/>
+              </a:rPr>
+              <a:t> Web</a:t>
+            </a:r>
+            <a:r>
+              <a:rPr lang="en-US" sz="1650" dirty="0" spc="-11" kern="0">
+                <a:solidFill>
+                  <a:srgbClr val="9A98A0"/>
+                </a:solidFill>
+                <a:latin typeface="Be Vietnam Pro" pitchFamily="34" charset="0"/>
+                <a:ea typeface="Be Vietnam Pro" pitchFamily="34" charset="-122"/>
+                <a:cs typeface="Be Vietnam Pro" pitchFamily="34" charset="-120"/>
+              </a:rPr>
+              <a:t> Signature</a:t>
+            </a:r>
+            <a:endParaRPr lang="en-US" sz="1650" dirty="0"/>
+          </a:p>
+        </p:txBody>
+      </p:sp>
+      <p:sp>
+        <p:nvSpPr>
+          <p:cNvPr id="44" name="Text 42"/>
+          <p:cNvSpPr/>
+          <p:nvPr/>
+        </p:nvSpPr>
+        <p:spPr>
+          <a:xfrm>
+            <a:off x="9486900" y="4914900"/>
+            <a:ext cx="3467100" cy="552450"/>
+          </a:xfrm>
+          <a:prstGeom prst="rect">
+            <a:avLst/>
+          </a:prstGeom>
+          <a:noFill/>
+          <a:ln/>
+        </p:spPr>
+        <p:txBody>
+          <a:bodyPr wrap="square" lIns="0" tIns="11509" rIns="0" bIns="-11509" rtlCol="0" anchor="t"/>
+          <a:lstStyle/>
+          <a:p>
+            <a:pPr algn="l" indent="0" marL="0">
+              <a:lnSpc>
+                <a:spcPts val="2063"/>
+              </a:lnSpc>
+              <a:buNone/>
+            </a:pPr>
+            <a:r>
+              <a:rPr lang="en-US" sz="1650" dirty="0" spc="-1" kern="0">
+                <a:solidFill>
+                  <a:srgbClr val="D8D3C4"/>
+                </a:solidFill>
+                <a:latin typeface="Be Vietnam Pro" pitchFamily="34" charset="0"/>
+                <a:ea typeface="Be Vietnam Pro" pitchFamily="34" charset="-122"/>
+                <a:cs typeface="Be Vietnam Pro" pitchFamily="34" charset="-120"/>
+              </a:rPr>
+              <a:t>Dạng</a:t>
+            </a:r>
+            <a:r>
+              <a:rPr lang="en-US" sz="1650" dirty="0" spc="9" kern="0">
+                <a:solidFill>
+                  <a:srgbClr val="D8D3C4"/>
+                </a:solidFill>
+                <a:latin typeface="Be Vietnam Pro" pitchFamily="34" charset="0"/>
+                <a:ea typeface="Be Vietnam Pro" pitchFamily="34" charset="-122"/>
+                <a:cs typeface="Be Vietnam Pro" pitchFamily="34" charset="-120"/>
+              </a:rPr>
+              <a:t> JWT</a:t>
+            </a:r>
+            <a:r>
+              <a:rPr lang="en-US" sz="1650" dirty="0" spc="7" kern="0">
+                <a:solidFill>
+                  <a:srgbClr val="D8D3C4"/>
+                </a:solidFill>
+                <a:latin typeface="Be Vietnam Pro" pitchFamily="34" charset="0"/>
+                <a:ea typeface="Be Vietnam Pro" pitchFamily="34" charset="-122"/>
+                <a:cs typeface="Be Vietnam Pro" pitchFamily="34" charset="-120"/>
+              </a:rPr>
+              <a:t> được</a:t>
+            </a:r>
+            <a:r>
+              <a:rPr lang="en-US" sz="1650" dirty="0" spc="2" kern="0">
+                <a:solidFill>
+                  <a:srgbClr val="D8D3C4"/>
+                </a:solidFill>
+                <a:latin typeface="Be Vietnam Pro" pitchFamily="34" charset="0"/>
+                <a:ea typeface="Be Vietnam Pro" pitchFamily="34" charset="-122"/>
+                <a:cs typeface="Be Vietnam Pro" pitchFamily="34" charset="-120"/>
+              </a:rPr>
+              <a:t> ký,</a:t>
+            </a:r>
+            <a:r>
+              <a:rPr lang="en-US" sz="1650" dirty="0" spc="0" kern="0">
+                <a:solidFill>
+                  <a:srgbClr val="D8D3C4"/>
+                </a:solidFill>
+                <a:latin typeface="Be Vietnam Pro" pitchFamily="34" charset="0"/>
+                <a:ea typeface="Be Vietnam Pro" pitchFamily="34" charset="-122"/>
+                <a:cs typeface="Be Vietnam Pro" pitchFamily="34" charset="-120"/>
+              </a:rPr>
+              <a:t> không mã hóa.</a:t>
+            </a:r>
+            <a:endParaRPr lang="en-US" sz="1650" dirty="0"/>
+          </a:p>
+        </p:txBody>
+      </p:sp>
+      <p:sp>
+        <p:nvSpPr>
+          <p:cNvPr id="45" name="Shape 43"/>
+          <p:cNvSpPr/>
+          <p:nvPr/>
+        </p:nvSpPr>
+        <p:spPr>
+          <a:xfrm>
+            <a:off x="13373100" y="3543300"/>
+            <a:ext cx="4000500" cy="1962150"/>
+          </a:xfrm>
+          <a:prstGeom prst="roundRect">
+            <a:avLst>
+              <a:gd name="adj" fmla="val 10680"/>
+            </a:avLst>
+          </a:prstGeom>
+          <a:solidFill>
+            <a:srgbClr val="1E212B"/>
+          </a:solidFill>
+          <a:ln/>
+        </p:spPr>
+      </p:sp>
+      <p:sp>
+        <p:nvSpPr>
+          <p:cNvPr id="46" name="Connector line-1792388047748-757591835"/>
+          <p:cNvSpPr/>
+          <p:nvPr/>
+        </p:nvSpPr>
+        <p:spPr>
+          <a:xfrm>
+            <a:off x="13792200" y="3771900"/>
+            <a:ext cx="3314700" cy="0"/>
+          </a:xfrm>
+          <a:prstGeom prst="line">
+            <a:avLst/>
+          </a:prstGeom>
+          <a:noFill/>
+          <a:ln w="28575">
+            <a:solidFill>
+              <a:srgbClr val="FF6A4D"/>
+            </a:solidFill>
+            <a:prstDash val="solid"/>
+            <a:headEnd type="none"/>
+            <a:tailEnd type="none"/>
+          </a:ln>
+        </p:spPr>
+      </p:sp>
+      <p:sp>
+        <p:nvSpPr>
+          <p:cNvPr id="47" name="Shape 45"/>
+          <p:cNvSpPr/>
+          <p:nvPr/>
+        </p:nvSpPr>
+        <p:spPr>
+          <a:xfrm>
+            <a:off x="13639800" y="3695700"/>
+            <a:ext cx="152400" cy="152400"/>
+          </a:xfrm>
+          <a:prstGeom prst="ellipse">
+            <a:avLst/>
+          </a:prstGeom>
+          <a:solidFill>
+            <a:srgbClr val="1E212B"/>
+          </a:solidFill>
+          <a:ln w="28575">
+            <a:solidFill>
+              <a:srgbClr val="FF6A4D"/>
+            </a:solidFill>
+            <a:prstDash val="solid"/>
+          </a:ln>
+        </p:spPr>
+      </p:sp>
+      <p:sp>
+        <p:nvSpPr>
+          <p:cNvPr id="48" name="Text 46"/>
+          <p:cNvSpPr/>
+          <p:nvPr/>
+        </p:nvSpPr>
+        <p:spPr>
+          <a:xfrm>
+            <a:off x="13639800" y="3886200"/>
+            <a:ext cx="3467100" cy="400050"/>
+          </a:xfrm>
+          <a:prstGeom prst="rect">
+            <a:avLst/>
+          </a:prstGeom>
+          <a:noFill/>
+          <a:ln/>
+        </p:spPr>
+        <p:txBody>
+          <a:bodyPr wrap="square" lIns="0" tIns="0" rIns="0" bIns="0" rtlCol="0" anchor="t"/>
+          <a:lstStyle/>
+          <a:p>
+            <a:pPr algn="l" indent="0" marL="0">
+              <a:buNone/>
+            </a:pPr>
+            <a:r>
+              <a:rPr lang="en-US" sz="2400" dirty="0" kern="0">
+                <a:solidFill>
+                  <a:srgbClr val="FF6A4D"/>
+                </a:solidFill>
+                <a:latin typeface="Bricolage Grotesque ExtraBold" pitchFamily="34" charset="0"/>
+                <a:ea typeface="Bricolage Grotesque ExtraBold" pitchFamily="34" charset="-122"/>
+                <a:cs typeface="Bricolage Grotesque ExtraBold" pitchFamily="34" charset="-120"/>
+              </a:rPr>
+              <a:t>JWE</a:t>
+            </a:r>
+            <a:endParaRPr lang="en-US" sz="2400" dirty="0"/>
+          </a:p>
+        </p:txBody>
+      </p:sp>
+      <p:sp>
+        <p:nvSpPr>
+          <p:cNvPr id="49" name="Text 47"/>
+          <p:cNvSpPr/>
+          <p:nvPr/>
+        </p:nvSpPr>
+        <p:spPr>
+          <a:xfrm>
+            <a:off x="13639800" y="4286250"/>
+            <a:ext cx="3467100" cy="533400"/>
+          </a:xfrm>
+          <a:prstGeom prst="rect">
+            <a:avLst/>
+          </a:prstGeom>
+          <a:noFill/>
+          <a:ln/>
+        </p:spPr>
+        <p:txBody>
+          <a:bodyPr wrap="square" lIns="0" tIns="0" rIns="0" bIns="0" rtlCol="0" anchor="t"/>
+          <a:lstStyle/>
+          <a:p>
+            <a:pPr algn="l" indent="0" marL="0">
+              <a:buNone/>
+            </a:pPr>
+            <a:r>
+              <a:rPr lang="en-US" sz="1650" dirty="0" spc="6" kern="0">
+                <a:solidFill>
+                  <a:srgbClr val="9A98A0"/>
+                </a:solidFill>
+                <a:latin typeface="Be Vietnam Pro" pitchFamily="34" charset="0"/>
+                <a:ea typeface="Be Vietnam Pro" pitchFamily="34" charset="-122"/>
+                <a:cs typeface="Be Vietnam Pro" pitchFamily="34" charset="-120"/>
+              </a:rPr>
+              <a:t>JSON</a:t>
+            </a:r>
+            <a:r>
+              <a:rPr lang="en-US" sz="1650" dirty="0" spc="-18" kern="0">
+                <a:solidFill>
+                  <a:srgbClr val="9A98A0"/>
+                </a:solidFill>
+                <a:latin typeface="Be Vietnam Pro" pitchFamily="34" charset="0"/>
+                <a:ea typeface="Be Vietnam Pro" pitchFamily="34" charset="-122"/>
+                <a:cs typeface="Be Vietnam Pro" pitchFamily="34" charset="-120"/>
+              </a:rPr>
+              <a:t> Web</a:t>
+            </a:r>
+            <a:r>
+              <a:rPr lang="en-US" sz="1650" dirty="0" spc="-2" kern="0">
+                <a:solidFill>
+                  <a:srgbClr val="9A98A0"/>
+                </a:solidFill>
+                <a:latin typeface="Be Vietnam Pro" pitchFamily="34" charset="0"/>
+                <a:ea typeface="Be Vietnam Pro" pitchFamily="34" charset="-122"/>
+                <a:cs typeface="Be Vietnam Pro" pitchFamily="34" charset="-120"/>
+              </a:rPr>
+              <a:t> Encryption</a:t>
+            </a:r>
+            <a:endParaRPr lang="en-US" sz="1650" dirty="0"/>
+          </a:p>
+        </p:txBody>
+      </p:sp>
+      <p:sp>
+        <p:nvSpPr>
+          <p:cNvPr id="50" name="Text 48"/>
+          <p:cNvSpPr/>
+          <p:nvPr/>
+        </p:nvSpPr>
+        <p:spPr>
+          <a:xfrm>
+            <a:off x="13639800" y="4914900"/>
+            <a:ext cx="3467100" cy="552450"/>
+          </a:xfrm>
+          <a:prstGeom prst="rect">
+            <a:avLst/>
+          </a:prstGeom>
+          <a:noFill/>
+          <a:ln/>
+        </p:spPr>
+        <p:txBody>
+          <a:bodyPr wrap="square" lIns="0" tIns="11509" rIns="0" bIns="-11509" rtlCol="0" anchor="t"/>
+          <a:lstStyle/>
+          <a:p>
+            <a:pPr algn="l" indent="0" marL="0">
+              <a:lnSpc>
+                <a:spcPts val="2063"/>
+              </a:lnSpc>
+              <a:buNone/>
+            </a:pPr>
+            <a:r>
+              <a:rPr lang="en-US" sz="1650" dirty="0" spc="-1" kern="0">
+                <a:solidFill>
+                  <a:srgbClr val="D8D3C4"/>
+                </a:solidFill>
+                <a:latin typeface="Be Vietnam Pro" pitchFamily="34" charset="0"/>
+                <a:ea typeface="Be Vietnam Pro" pitchFamily="34" charset="-122"/>
+                <a:cs typeface="Be Vietnam Pro" pitchFamily="34" charset="-120"/>
+              </a:rPr>
+              <a:t>Dạng</a:t>
+            </a:r>
+            <a:r>
+              <a:rPr lang="en-US" sz="1650" dirty="0" spc="9" kern="0">
+                <a:solidFill>
+                  <a:srgbClr val="D8D3C4"/>
+                </a:solidFill>
+                <a:latin typeface="Be Vietnam Pro" pitchFamily="34" charset="0"/>
+                <a:ea typeface="Be Vietnam Pro" pitchFamily="34" charset="-122"/>
+                <a:cs typeface="Be Vietnam Pro" pitchFamily="34" charset="-120"/>
+              </a:rPr>
+              <a:t> JWT</a:t>
+            </a:r>
+            <a:r>
+              <a:rPr lang="en-US" sz="1650" dirty="0" spc="2" kern="0">
+                <a:solidFill>
+                  <a:srgbClr val="D8D3C4"/>
+                </a:solidFill>
+                <a:latin typeface="Be Vietnam Pro" pitchFamily="34" charset="0"/>
+                <a:ea typeface="Be Vietnam Pro" pitchFamily="34" charset="-122"/>
+                <a:cs typeface="Be Vietnam Pro" pitchFamily="34" charset="-120"/>
+              </a:rPr>
+              <a:t> mã</a:t>
+            </a:r>
+            <a:r>
+              <a:rPr lang="en-US" sz="1650" dirty="0" spc="-1" kern="0">
+                <a:solidFill>
+                  <a:srgbClr val="D8D3C4"/>
+                </a:solidFill>
+                <a:latin typeface="Be Vietnam Pro" pitchFamily="34" charset="0"/>
+                <a:ea typeface="Be Vietnam Pro" pitchFamily="34" charset="-122"/>
+                <a:cs typeface="Be Vietnam Pro" pitchFamily="34" charset="-120"/>
+              </a:rPr>
+              <a:t> hóa,</a:t>
+            </a:r>
+            <a:r>
+              <a:rPr lang="en-US" sz="1650" dirty="0" spc="0" kern="0">
+                <a:solidFill>
+                  <a:srgbClr val="D8D3C4"/>
+                </a:solidFill>
+                <a:latin typeface="Be Vietnam Pro" pitchFamily="34" charset="0"/>
+                <a:ea typeface="Be Vietnam Pro" pitchFamily="34" charset="-122"/>
+                <a:cs typeface="Be Vietnam Pro" pitchFamily="34" charset="-120"/>
+              </a:rPr>
+              <a:t> cấu</a:t>
+            </a:r>
+            <a:r>
+              <a:rPr lang="en-US" sz="1650" dirty="0" spc="2" kern="0">
+                <a:solidFill>
+                  <a:srgbClr val="D8D3C4"/>
+                </a:solidFill>
+                <a:latin typeface="Be Vietnam Pro" pitchFamily="34" charset="0"/>
+                <a:ea typeface="Be Vietnam Pro" pitchFamily="34" charset="-122"/>
+                <a:cs typeface="Be Vietnam Pro" pitchFamily="34" charset="-120"/>
+              </a:rPr>
+              <a:t> trúc</a:t>
+            </a:r>
+            <a:r>
+              <a:rPr lang="en-US" sz="1650" dirty="0" spc="1" kern="0">
+                <a:solidFill>
+                  <a:srgbClr val="D8D3C4"/>
+                </a:solidFill>
+                <a:latin typeface="Be Vietnam Pro" pitchFamily="34" charset="0"/>
+                <a:ea typeface="Be Vietnam Pro" pitchFamily="34" charset="-122"/>
+                <a:cs typeface="Be Vietnam Pro" pitchFamily="34" charset="-120"/>
+              </a:rPr>
+              <a:t> khác.</a:t>
+            </a:r>
+            <a:endParaRPr lang="en-US" sz="1650" dirty="0"/>
+          </a:p>
+        </p:txBody>
+      </p:sp>
+      <p:sp>
+        <p:nvSpPr>
+          <p:cNvPr id="51" name="Shape 49"/>
+          <p:cNvSpPr/>
+          <p:nvPr/>
+        </p:nvSpPr>
+        <p:spPr>
+          <a:xfrm>
+            <a:off x="914400" y="5657850"/>
+            <a:ext cx="4000500" cy="1962150"/>
+          </a:xfrm>
+          <a:prstGeom prst="roundRect">
+            <a:avLst>
+              <a:gd name="adj" fmla="val 10680"/>
+            </a:avLst>
+          </a:prstGeom>
+          <a:solidFill>
+            <a:srgbClr val="1E212B"/>
+          </a:solidFill>
+          <a:ln/>
+        </p:spPr>
+      </p:sp>
+      <p:sp>
+        <p:nvSpPr>
+          <p:cNvPr id="52" name="Connector line-1792388047754-175022024"/>
+          <p:cNvSpPr/>
+          <p:nvPr/>
+        </p:nvSpPr>
+        <p:spPr>
+          <a:xfrm>
+            <a:off x="1333500" y="5886450"/>
+            <a:ext cx="3314700" cy="0"/>
+          </a:xfrm>
+          <a:prstGeom prst="line">
+            <a:avLst/>
+          </a:prstGeom>
+          <a:noFill/>
+          <a:ln w="28575">
+            <a:solidFill>
+              <a:srgbClr val="9A98A0"/>
+            </a:solidFill>
+            <a:prstDash val="solid"/>
+            <a:headEnd type="none"/>
+            <a:tailEnd type="none"/>
+          </a:ln>
+        </p:spPr>
+      </p:sp>
+      <p:sp>
+        <p:nvSpPr>
+          <p:cNvPr id="53" name="Shape 51"/>
+          <p:cNvSpPr/>
+          <p:nvPr/>
+        </p:nvSpPr>
+        <p:spPr>
+          <a:xfrm>
+            <a:off x="1181100" y="5810250"/>
+            <a:ext cx="152400" cy="152400"/>
+          </a:xfrm>
+          <a:prstGeom prst="ellipse">
+            <a:avLst/>
+          </a:prstGeom>
+          <a:solidFill>
+            <a:srgbClr val="1E212B"/>
+          </a:solidFill>
+          <a:ln w="28575">
+            <a:solidFill>
+              <a:srgbClr val="9A98A0"/>
+            </a:solidFill>
+            <a:prstDash val="solid"/>
+          </a:ln>
+        </p:spPr>
+      </p:sp>
+      <p:sp>
+        <p:nvSpPr>
+          <p:cNvPr id="54" name="Text 52"/>
+          <p:cNvSpPr/>
+          <p:nvPr/>
+        </p:nvSpPr>
+        <p:spPr>
+          <a:xfrm>
+            <a:off x="1181100" y="6000750"/>
+            <a:ext cx="3467100" cy="400050"/>
+          </a:xfrm>
+          <a:prstGeom prst="rect">
+            <a:avLst/>
+          </a:prstGeom>
+          <a:noFill/>
+          <a:ln/>
+        </p:spPr>
+        <p:txBody>
+          <a:bodyPr wrap="square" lIns="0" tIns="0" rIns="0" bIns="0" rtlCol="0" anchor="t"/>
+          <a:lstStyle/>
+          <a:p>
+            <a:pPr algn="l" indent="0" marL="0">
+              <a:buNone/>
+            </a:pPr>
+            <a:r>
+              <a:rPr lang="en-US" sz="2400" dirty="0" spc="-61" kern="0">
+                <a:solidFill>
+                  <a:srgbClr val="F3EEE3"/>
+                </a:solidFill>
+                <a:latin typeface="Bricolage Grotesque ExtraBold" pitchFamily="34" charset="0"/>
+                <a:ea typeface="Bricolage Grotesque ExtraBold" pitchFamily="34" charset="-122"/>
+                <a:cs typeface="Bricolage Grotesque ExtraBold" pitchFamily="34" charset="-120"/>
+              </a:rPr>
+              <a:t>OWASP</a:t>
+            </a:r>
+            <a:endParaRPr lang="en-US" sz="2400" dirty="0"/>
+          </a:p>
+        </p:txBody>
+      </p:sp>
+      <p:sp>
+        <p:nvSpPr>
+          <p:cNvPr id="55" name="Text 53"/>
+          <p:cNvSpPr/>
+          <p:nvPr/>
+        </p:nvSpPr>
+        <p:spPr>
+          <a:xfrm>
+            <a:off x="1181100" y="6400800"/>
+            <a:ext cx="3467100" cy="533400"/>
+          </a:xfrm>
+          <a:prstGeom prst="rect">
+            <a:avLst/>
+          </a:prstGeom>
+          <a:noFill/>
+          <a:ln/>
+        </p:spPr>
+        <p:txBody>
+          <a:bodyPr wrap="square" lIns="0" tIns="0" rIns="0" bIns="0" rtlCol="0" anchor="t"/>
+          <a:lstStyle/>
+          <a:p>
+            <a:pPr algn="l" indent="0" marL="0">
+              <a:buNone/>
+            </a:pPr>
+            <a:r>
+              <a:rPr lang="en-US" sz="1650" dirty="0" spc="-3" kern="0">
+                <a:solidFill>
+                  <a:srgbClr val="9A98A0"/>
+                </a:solidFill>
+                <a:latin typeface="Be Vietnam Pro" pitchFamily="34" charset="0"/>
+                <a:ea typeface="Be Vietnam Pro" pitchFamily="34" charset="-122"/>
+                <a:cs typeface="Be Vietnam Pro" pitchFamily="34" charset="-120"/>
+              </a:rPr>
+              <a:t>Open</a:t>
+            </a:r>
+            <a:r>
+              <a:rPr lang="en-US" sz="1650" dirty="0" spc="-8" kern="0">
+                <a:solidFill>
+                  <a:srgbClr val="9A98A0"/>
+                </a:solidFill>
+                <a:latin typeface="Be Vietnam Pro" pitchFamily="34" charset="0"/>
+                <a:ea typeface="Be Vietnam Pro" pitchFamily="34" charset="-122"/>
+                <a:cs typeface="Be Vietnam Pro" pitchFamily="34" charset="-120"/>
+              </a:rPr>
+              <a:t> Worldwide</a:t>
+            </a:r>
+            <a:r>
+              <a:rPr lang="en-US" sz="1650" dirty="0" spc="-4" kern="0">
+                <a:solidFill>
+                  <a:srgbClr val="9A98A0"/>
+                </a:solidFill>
+                <a:latin typeface="Be Vietnam Pro" pitchFamily="34" charset="0"/>
+                <a:ea typeface="Be Vietnam Pro" pitchFamily="34" charset="-122"/>
+                <a:cs typeface="Be Vietnam Pro" pitchFamily="34" charset="-120"/>
+              </a:rPr>
+              <a:t> Application</a:t>
+            </a:r>
+            <a:r>
+              <a:rPr lang="en-US" sz="1650" dirty="0" spc="1" kern="0">
+                <a:solidFill>
+                  <a:srgbClr val="9A98A0"/>
+                </a:solidFill>
+                <a:latin typeface="Be Vietnam Pro" pitchFamily="34" charset="0"/>
+                <a:ea typeface="Be Vietnam Pro" pitchFamily="34" charset="-122"/>
+                <a:cs typeface="Be Vietnam Pro" pitchFamily="34" charset="-120"/>
+              </a:rPr>
+              <a:t> Security</a:t>
+            </a:r>
+            <a:r>
+              <a:rPr lang="en-US" sz="1650" dirty="0" spc="-16" kern="0">
+                <a:solidFill>
+                  <a:srgbClr val="9A98A0"/>
+                </a:solidFill>
+                <a:latin typeface="Be Vietnam Pro" pitchFamily="34" charset="0"/>
+                <a:ea typeface="Be Vietnam Pro" pitchFamily="34" charset="-122"/>
+                <a:cs typeface="Be Vietnam Pro" pitchFamily="34" charset="-120"/>
+              </a:rPr>
+              <a:t> Project</a:t>
+            </a:r>
+            <a:endParaRPr lang="en-US" sz="1650" dirty="0"/>
+          </a:p>
+        </p:txBody>
+      </p:sp>
+      <p:sp>
+        <p:nvSpPr>
+          <p:cNvPr id="56" name="Text 54"/>
+          <p:cNvSpPr/>
+          <p:nvPr/>
+        </p:nvSpPr>
+        <p:spPr>
+          <a:xfrm>
+            <a:off x="1181100" y="7029450"/>
+            <a:ext cx="3467100" cy="552450"/>
+          </a:xfrm>
+          <a:prstGeom prst="rect">
+            <a:avLst/>
+          </a:prstGeom>
+          <a:noFill/>
+          <a:ln/>
+        </p:spPr>
+        <p:txBody>
+          <a:bodyPr wrap="square" lIns="0" tIns="11509" rIns="0" bIns="-11509" rtlCol="0" anchor="t"/>
+          <a:lstStyle/>
+          <a:p>
+            <a:pPr algn="l" indent="0" marL="0">
+              <a:lnSpc>
+                <a:spcPts val="2063"/>
+              </a:lnSpc>
+              <a:buNone/>
+            </a:pPr>
+            <a:r>
+              <a:rPr lang="en-US" sz="1650" dirty="0" spc="0" kern="0">
+                <a:solidFill>
+                  <a:srgbClr val="D8D3C4"/>
+                </a:solidFill>
+                <a:latin typeface="Be Vietnam Pro" pitchFamily="34" charset="0"/>
+                <a:ea typeface="Be Vietnam Pro" pitchFamily="34" charset="-122"/>
+                <a:cs typeface="Be Vietnam Pro" pitchFamily="34" charset="-120"/>
+              </a:rPr>
+              <a:t>Cộng</a:t>
+            </a:r>
+            <a:r>
+              <a:rPr lang="en-US" sz="1650" dirty="0" spc="7" kern="0">
+                <a:solidFill>
+                  <a:srgbClr val="D8D3C4"/>
+                </a:solidFill>
+                <a:latin typeface="Be Vietnam Pro" pitchFamily="34" charset="0"/>
+                <a:ea typeface="Be Vietnam Pro" pitchFamily="34" charset="-122"/>
+                <a:cs typeface="Be Vietnam Pro" pitchFamily="34" charset="-120"/>
+              </a:rPr>
+              <a:t> đồng</a:t>
+            </a:r>
+            <a:r>
+              <a:rPr lang="en-US" sz="1650" dirty="0" spc="-8" kern="0">
+                <a:solidFill>
+                  <a:srgbClr val="D8D3C4"/>
+                </a:solidFill>
+                <a:latin typeface="Be Vietnam Pro" pitchFamily="34" charset="0"/>
+                <a:ea typeface="Be Vietnam Pro" pitchFamily="34" charset="-122"/>
+                <a:cs typeface="Be Vietnam Pro" pitchFamily="34" charset="-120"/>
+              </a:rPr>
+              <a:t> chuyên về</a:t>
+            </a:r>
+            <a:r>
+              <a:rPr lang="en-US" sz="1650" dirty="0" spc="2" kern="0">
+                <a:solidFill>
+                  <a:srgbClr val="D8D3C4"/>
+                </a:solidFill>
+                <a:latin typeface="Be Vietnam Pro" pitchFamily="34" charset="0"/>
+                <a:ea typeface="Be Vietnam Pro" pitchFamily="34" charset="-122"/>
+                <a:cs typeface="Be Vietnam Pro" pitchFamily="34" charset="-120"/>
+              </a:rPr>
+              <a:t> bảo mật ứng dụng.</a:t>
+            </a:r>
+            <a:endParaRPr lang="en-US" sz="1650" dirty="0"/>
+          </a:p>
+        </p:txBody>
+      </p:sp>
+      <p:sp>
+        <p:nvSpPr>
+          <p:cNvPr id="57" name="Shape 55"/>
+          <p:cNvSpPr/>
+          <p:nvPr/>
+        </p:nvSpPr>
+        <p:spPr>
+          <a:xfrm>
+            <a:off x="5067300" y="5657850"/>
+            <a:ext cx="4000500" cy="1962150"/>
+          </a:xfrm>
+          <a:prstGeom prst="roundRect">
+            <a:avLst>
+              <a:gd name="adj" fmla="val 10680"/>
+            </a:avLst>
+          </a:prstGeom>
+          <a:solidFill>
+            <a:srgbClr val="1E212B"/>
+          </a:solidFill>
+          <a:ln/>
+        </p:spPr>
+      </p:sp>
+      <p:sp>
+        <p:nvSpPr>
+          <p:cNvPr id="58" name="Connector line-1792388047760-878184579"/>
+          <p:cNvSpPr/>
+          <p:nvPr/>
+        </p:nvSpPr>
+        <p:spPr>
+          <a:xfrm>
+            <a:off x="5486400" y="5886450"/>
+            <a:ext cx="3314700" cy="0"/>
+          </a:xfrm>
+          <a:prstGeom prst="line">
+            <a:avLst/>
+          </a:prstGeom>
+          <a:noFill/>
+          <a:ln w="28575">
+            <a:solidFill>
+              <a:srgbClr val="9A98A0"/>
+            </a:solidFill>
+            <a:prstDash val="solid"/>
+            <a:headEnd type="none"/>
+            <a:tailEnd type="none"/>
+          </a:ln>
+        </p:spPr>
+      </p:sp>
+      <p:sp>
+        <p:nvSpPr>
+          <p:cNvPr id="59" name="Shape 57"/>
+          <p:cNvSpPr/>
+          <p:nvPr/>
+        </p:nvSpPr>
+        <p:spPr>
+          <a:xfrm>
+            <a:off x="5334000" y="5810250"/>
+            <a:ext cx="152400" cy="152400"/>
+          </a:xfrm>
+          <a:prstGeom prst="ellipse">
+            <a:avLst/>
+          </a:prstGeom>
+          <a:solidFill>
+            <a:srgbClr val="1E212B"/>
+          </a:solidFill>
+          <a:ln w="28575">
+            <a:solidFill>
+              <a:srgbClr val="9A98A0"/>
+            </a:solidFill>
+            <a:prstDash val="solid"/>
+          </a:ln>
+        </p:spPr>
+      </p:sp>
+      <p:sp>
+        <p:nvSpPr>
+          <p:cNvPr id="60" name="Text 58"/>
+          <p:cNvSpPr/>
+          <p:nvPr/>
+        </p:nvSpPr>
+        <p:spPr>
+          <a:xfrm>
+            <a:off x="5334000" y="6000750"/>
+            <a:ext cx="3467100" cy="400050"/>
+          </a:xfrm>
+          <a:prstGeom prst="rect">
+            <a:avLst/>
+          </a:prstGeom>
+          <a:noFill/>
+          <a:ln/>
+        </p:spPr>
+        <p:txBody>
+          <a:bodyPr wrap="square" lIns="0" tIns="0" rIns="0" bIns="0" rtlCol="0" anchor="t"/>
+          <a:lstStyle/>
+          <a:p>
+            <a:pPr algn="l" indent="0" marL="0">
+              <a:buNone/>
+            </a:pPr>
+            <a:r>
+              <a:rPr lang="en-US" sz="2400" dirty="0" spc="1" kern="0">
+                <a:solidFill>
+                  <a:srgbClr val="F3EEE3"/>
+                </a:solidFill>
+                <a:latin typeface="Bricolage Grotesque ExtraBold" pitchFamily="34" charset="0"/>
+                <a:ea typeface="Bricolage Grotesque ExtraBold" pitchFamily="34" charset="-122"/>
+                <a:cs typeface="Bricolage Grotesque ExtraBold" pitchFamily="34" charset="-120"/>
+              </a:rPr>
+              <a:t>MDN</a:t>
+            </a:r>
+            <a:endParaRPr lang="en-US" sz="2400" dirty="0"/>
+          </a:p>
+        </p:txBody>
+      </p:sp>
+      <p:sp>
+        <p:nvSpPr>
+          <p:cNvPr id="61" name="Text 59"/>
+          <p:cNvSpPr/>
+          <p:nvPr/>
+        </p:nvSpPr>
+        <p:spPr>
+          <a:xfrm>
+            <a:off x="5334000" y="6400800"/>
+            <a:ext cx="3467100" cy="533400"/>
+          </a:xfrm>
+          <a:prstGeom prst="rect">
+            <a:avLst/>
+          </a:prstGeom>
+          <a:noFill/>
+          <a:ln/>
+        </p:spPr>
+        <p:txBody>
+          <a:bodyPr wrap="square" lIns="0" tIns="0" rIns="0" bIns="0" rtlCol="0" anchor="t"/>
+          <a:lstStyle/>
+          <a:p>
+            <a:pPr algn="l" indent="0" marL="0">
+              <a:buNone/>
+            </a:pPr>
+            <a:r>
+              <a:rPr lang="en-US" sz="1650" dirty="0" spc="-3" kern="0">
+                <a:solidFill>
+                  <a:srgbClr val="9A98A0"/>
+                </a:solidFill>
+                <a:latin typeface="Be Vietnam Pro" pitchFamily="34" charset="0"/>
+                <a:ea typeface="Be Vietnam Pro" pitchFamily="34" charset="-122"/>
+                <a:cs typeface="Be Vietnam Pro" pitchFamily="34" charset="-120"/>
+              </a:rPr>
+              <a:t>Mozilla</a:t>
+            </a:r>
+            <a:r>
+              <a:rPr lang="en-US" sz="1650" dirty="0" spc="-7" kern="0">
+                <a:solidFill>
+                  <a:srgbClr val="9A98A0"/>
+                </a:solidFill>
+                <a:latin typeface="Be Vietnam Pro" pitchFamily="34" charset="0"/>
+                <a:ea typeface="Be Vietnam Pro" pitchFamily="34" charset="-122"/>
+                <a:cs typeface="Be Vietnam Pro" pitchFamily="34" charset="-120"/>
+              </a:rPr>
+              <a:t> Developer</a:t>
+            </a:r>
+            <a:r>
+              <a:rPr lang="en-US" sz="1650" dirty="0" spc="-6" kern="0">
+                <a:solidFill>
+                  <a:srgbClr val="9A98A0"/>
+                </a:solidFill>
+                <a:latin typeface="Be Vietnam Pro" pitchFamily="34" charset="0"/>
+                <a:ea typeface="Be Vietnam Pro" pitchFamily="34" charset="-122"/>
+                <a:cs typeface="Be Vietnam Pro" pitchFamily="34" charset="-120"/>
+              </a:rPr>
+              <a:t> Network</a:t>
+            </a:r>
+            <a:endParaRPr lang="en-US" sz="1650" dirty="0"/>
+          </a:p>
+        </p:txBody>
+      </p:sp>
+      <p:sp>
+        <p:nvSpPr>
+          <p:cNvPr id="62" name="Text 60"/>
+          <p:cNvSpPr/>
+          <p:nvPr/>
+        </p:nvSpPr>
+        <p:spPr>
+          <a:xfrm>
+            <a:off x="5334000" y="7029450"/>
+            <a:ext cx="3467100" cy="552450"/>
+          </a:xfrm>
+          <a:prstGeom prst="rect">
+            <a:avLst/>
+          </a:prstGeom>
+          <a:noFill/>
+          <a:ln/>
+        </p:spPr>
+        <p:txBody>
+          <a:bodyPr wrap="square" lIns="0" tIns="11509" rIns="0" bIns="-11509" rtlCol="0" anchor="t"/>
+          <a:lstStyle/>
+          <a:p>
+            <a:pPr algn="l" indent="0" marL="0">
+              <a:lnSpc>
+                <a:spcPts val="2063"/>
+              </a:lnSpc>
+              <a:buNone/>
+            </a:pPr>
+            <a:r>
+              <a:rPr lang="en-US" sz="1650" dirty="0" spc="-50" kern="0">
+                <a:solidFill>
+                  <a:srgbClr val="D8D3C4"/>
+                </a:solidFill>
+                <a:latin typeface="Be Vietnam Pro" pitchFamily="34" charset="0"/>
+                <a:ea typeface="Be Vietnam Pro" pitchFamily="34" charset="-122"/>
+                <a:cs typeface="Be Vietnam Pro" pitchFamily="34" charset="-120"/>
+              </a:rPr>
+              <a:t>Tài</a:t>
+            </a:r>
+            <a:r>
+              <a:rPr lang="en-US" sz="1650" dirty="0" spc="0" kern="0">
+                <a:solidFill>
+                  <a:srgbClr val="D8D3C4"/>
+                </a:solidFill>
+                <a:latin typeface="Be Vietnam Pro" pitchFamily="34" charset="0"/>
+                <a:ea typeface="Be Vietnam Pro" pitchFamily="34" charset="-122"/>
+                <a:cs typeface="Be Vietnam Pro" pitchFamily="34" charset="-120"/>
+              </a:rPr>
+              <a:t> liệu</a:t>
+            </a:r>
+            <a:r>
+              <a:rPr lang="en-US" sz="1650" dirty="0" spc="-16" kern="0">
+                <a:solidFill>
+                  <a:srgbClr val="D8D3C4"/>
+                </a:solidFill>
+                <a:latin typeface="Be Vietnam Pro" pitchFamily="34" charset="0"/>
+                <a:ea typeface="Be Vietnam Pro" pitchFamily="34" charset="-122"/>
+                <a:cs typeface="Be Vietnam Pro" pitchFamily="34" charset="-120"/>
+              </a:rPr>
+              <a:t> tra</a:t>
+            </a:r>
+            <a:r>
+              <a:rPr lang="en-US" sz="1650" dirty="0" spc="13" kern="0">
+                <a:solidFill>
+                  <a:srgbClr val="D8D3C4"/>
+                </a:solidFill>
+                <a:latin typeface="Be Vietnam Pro" pitchFamily="34" charset="0"/>
+                <a:ea typeface="Be Vietnam Pro" pitchFamily="34" charset="-122"/>
+                <a:cs typeface="Be Vietnam Pro" pitchFamily="34" charset="-120"/>
+              </a:rPr>
+              <a:t> cứu</a:t>
+            </a:r>
+            <a:r>
+              <a:rPr lang="en-US" sz="1650" dirty="0" spc="-1" kern="0">
+                <a:solidFill>
+                  <a:srgbClr val="D8D3C4"/>
+                </a:solidFill>
+                <a:latin typeface="Be Vietnam Pro" pitchFamily="34" charset="0"/>
+                <a:ea typeface="Be Vietnam Pro" pitchFamily="34" charset="-122"/>
+                <a:cs typeface="Be Vietnam Pro" pitchFamily="34" charset="-120"/>
+              </a:rPr>
+              <a:t> công</a:t>
+            </a:r>
+            <a:r>
+              <a:rPr lang="en-US" sz="1650" dirty="0" spc="1" kern="0">
+                <a:solidFill>
+                  <a:srgbClr val="D8D3C4"/>
+                </a:solidFill>
+                <a:latin typeface="Be Vietnam Pro" pitchFamily="34" charset="0"/>
+                <a:ea typeface="Be Vietnam Pro" pitchFamily="34" charset="-122"/>
+                <a:cs typeface="Be Vietnam Pro" pitchFamily="34" charset="-120"/>
+              </a:rPr>
+              <a:t> nghệ</a:t>
+            </a:r>
+            <a:r>
+              <a:rPr lang="en-US" sz="1650" dirty="0" spc="-6" kern="0">
+                <a:solidFill>
+                  <a:srgbClr val="D8D3C4"/>
+                </a:solidFill>
+                <a:latin typeface="Be Vietnam Pro" pitchFamily="34" charset="0"/>
+                <a:ea typeface="Be Vietnam Pro" pitchFamily="34" charset="-122"/>
+                <a:cs typeface="Be Vietnam Pro" pitchFamily="34" charset="-120"/>
+              </a:rPr>
+              <a:t> web.</a:t>
+            </a:r>
+            <a:endParaRPr lang="en-US" sz="1650" dirty="0"/>
+          </a:p>
+        </p:txBody>
+      </p:sp>
+      <p:sp>
+        <p:nvSpPr>
+          <p:cNvPr id="63" name="Shape 61"/>
+          <p:cNvSpPr/>
+          <p:nvPr/>
+        </p:nvSpPr>
+        <p:spPr>
+          <a:xfrm>
+            <a:off x="9220200" y="5657850"/>
+            <a:ext cx="8153400" cy="1962150"/>
+          </a:xfrm>
+          <a:prstGeom prst="roundRect">
+            <a:avLst>
+              <a:gd name="adj" fmla="val 10680"/>
+            </a:avLst>
+          </a:prstGeom>
+          <a:solidFill>
+            <a:srgbClr val="1E212B"/>
+          </a:solidFill>
+          <a:ln/>
+        </p:spPr>
+      </p:sp>
+      <p:sp>
+        <p:nvSpPr>
+          <p:cNvPr id="64" name="Connector line-1792388047766-862430446"/>
+          <p:cNvSpPr/>
+          <p:nvPr/>
+        </p:nvSpPr>
+        <p:spPr>
+          <a:xfrm>
+            <a:off x="9639300" y="5886450"/>
+            <a:ext cx="7467600" cy="0"/>
           </a:xfrm>
           <a:prstGeom prst="line">
             <a:avLst/>
@@ -5291,14 +6448,39 @@
       </p:sp>
       <p:sp>
         <p:nvSpPr>
-          <p:cNvPr id="37" name="Text 35"/>
-          <p:cNvSpPr/>
-          <p:nvPr/>
-        </p:nvSpPr>
-        <p:spPr>
-          <a:xfrm>
-            <a:off x="5438775" y="5686425"/>
-            <a:ext cx="3238500" cy="628650"/>
+          <p:cNvPr id="65" name="Shape 63"/>
+          <p:cNvSpPr/>
+          <p:nvPr/>
+        </p:nvSpPr>
+        <p:spPr>
+          <a:xfrm>
+            <a:off x="9486900" y="5810250"/>
+            <a:ext cx="152400" cy="152400"/>
+          </a:xfrm>
+          <a:prstGeom prst="ellipse">
+            <a:avLst/>
+          </a:prstGeom>
+          <a:solidFill>
+            <a:srgbClr val="1E212B"/>
+          </a:solidFill>
+          <a:ln w="28575">
+            <a:solidFill>
+              <a:srgbClr val="3DD6A0"/>
+            </a:solidFill>
+            <a:prstDash val="solid"/>
+          </a:ln>
+        </p:spPr>
+      </p:sp>
+      <p:sp>
+        <p:nvSpPr>
+          <p:cNvPr id="66" name="Text 64"/>
+          <p:cNvSpPr/>
+          <p:nvPr/>
+        </p:nvSpPr>
+        <p:spPr>
+          <a:xfrm>
+            <a:off x="9486900" y="6000750"/>
+            <a:ext cx="7620000" cy="400050"/>
           </a:xfrm>
           <a:prstGeom prst="rect">
             <a:avLst/>
@@ -5314,7 +6496,7 @@
               <a:buNone/>
             </a:pPr>
             <a:r>
-              <a:rPr lang="en-US" sz="3900" dirty="0" spc="-36" kern="0">
+              <a:rPr lang="en-US" sz="2400" dirty="0" spc="0" kern="0">
                 <a:solidFill>
                   <a:srgbClr val="3DD6A0"/>
                 </a:solidFill>
@@ -5322,22 +6504,66 @@
                 <a:ea typeface="Bricolage Grotesque ExtraBold" pitchFamily="34" charset="-122"/>
                 <a:cs typeface="Bricolage Grotesque ExtraBold" pitchFamily="34" charset="-120"/>
               </a:rPr>
-              <a:t>ECDSA</a:t>
-            </a:r>
-            <a:endParaRPr lang="en-US" sz="3900" dirty="0"/>
+              <a:t>HS256</a:t>
+            </a:r>
+            <a:r>
+              <a:rPr lang="en-US" sz="2400" dirty="0" spc="2" kern="0">
+                <a:solidFill>
+                  <a:srgbClr val="3DD6A0"/>
+                </a:solidFill>
+                <a:latin typeface="Bricolage Grotesque ExtraBold" pitchFamily="34" charset="0"/>
+                <a:ea typeface="Bricolage Grotesque ExtraBold" pitchFamily="34" charset="-122"/>
+                <a:cs typeface="Bricolage Grotesque ExtraBold" pitchFamily="34" charset="-120"/>
+              </a:rPr>
+              <a:t> ·</a:t>
+            </a:r>
+            <a:r>
+              <a:rPr lang="en-US" sz="2400" dirty="0" spc="-4" kern="0">
+                <a:solidFill>
+                  <a:srgbClr val="3DD6A0"/>
+                </a:solidFill>
+                <a:latin typeface="Bricolage Grotesque ExtraBold" pitchFamily="34" charset="0"/>
+                <a:ea typeface="Bricolage Grotesque ExtraBold" pitchFamily="34" charset="-122"/>
+                <a:cs typeface="Bricolage Grotesque ExtraBold" pitchFamily="34" charset="-120"/>
+              </a:rPr>
+              <a:t> ES256</a:t>
+            </a:r>
+            <a:r>
+              <a:rPr lang="en-US" sz="2400" dirty="0" spc="2" kern="0">
+                <a:solidFill>
+                  <a:srgbClr val="3DD6A0"/>
+                </a:solidFill>
+                <a:latin typeface="Bricolage Grotesque ExtraBold" pitchFamily="34" charset="0"/>
+                <a:ea typeface="Bricolage Grotesque ExtraBold" pitchFamily="34" charset="-122"/>
+                <a:cs typeface="Bricolage Grotesque ExtraBold" pitchFamily="34" charset="-120"/>
+              </a:rPr>
+              <a:t> ·</a:t>
+            </a:r>
+            <a:r>
+              <a:rPr lang="en-US" sz="2400" dirty="0" spc="-1" kern="0">
+                <a:solidFill>
+                  <a:srgbClr val="3DD6A0"/>
+                </a:solidFill>
+                <a:latin typeface="Bricolage Grotesque ExtraBold" pitchFamily="34" charset="0"/>
+                <a:ea typeface="Bricolage Grotesque ExtraBold" pitchFamily="34" charset="-122"/>
+                <a:cs typeface="Bricolage Grotesque ExtraBold" pitchFamily="34" charset="-120"/>
+              </a:rPr>
+              <a:t> RS256</a:t>
+            </a:r>
+            <a:endParaRPr lang="en-US" sz="2400" dirty="0"/>
           </a:p>
         </p:txBody>
       </p:sp>
       <p:sp>
         <p:nvSpPr>
-          <p:cNvPr id="38" name="Text 36"/>
-          <p:cNvSpPr/>
-          <p:nvPr/>
-        </p:nvSpPr>
-        <p:spPr>
-          <a:xfrm>
-            <a:off x="5438775" y="6334125"/>
-            <a:ext cx="3238500" cy="533400"/>
+          <p:cNvPr id="67" name="Text 65"/>
+          <p:cNvSpPr/>
+          <p:nvPr/>
+        </p:nvSpPr>
+        <p:spPr>
+          <a:xfrm>
+            <a:off x="9486900" y="6400800"/>
+            <a:ext cx="7620000" cy="533400"/>
           </a:xfrm>
           <a:prstGeom prst="rect">
             <a:avLst/>
@@ -5353,6 +6579,17 @@
               <a:buNone/>
             </a:pPr>
             <a:r>
+              <a:rPr lang="en-US" sz="1650" dirty="0" spc="-50" kern="0">
+                <a:solidFill>
+                  <a:srgbClr val="9A98A0"/>
+                </a:solidFill>
+                <a:latin typeface="Be Vietnam Pro" pitchFamily="34" charset="0"/>
+                <a:ea typeface="Be Vietnam Pro" pitchFamily="34" charset="-122"/>
+                <a:cs typeface="Be Vietnam Pro" pitchFamily="34" charset="-120"/>
+              </a:rPr>
+              <a:t>Tên</a:t>
+            </a:r>
+            <a:r>
               <a:rPr lang="en-US" sz="1650" dirty="0" spc="-3" kern="0">
                 <a:solidFill>
                   <a:srgbClr val="9A98A0"/>
@@ -5361,10 +6598,10 @@
                 <a:ea typeface="Be Vietnam Pro" pitchFamily="34" charset="-122"/>
                 <a:cs typeface="Be Vietnam Pro" pitchFamily="34" charset="-120"/>
               </a:rPr>
-              <a:t>Elliptic</a:t>
-            </a:r>
-            <a:r>
-              <a:rPr lang="en-US" sz="1650" dirty="0" spc="-5" kern="0">
+              <a:t> thuật</a:t>
+            </a:r>
+            <a:r>
+              <a:rPr lang="en-US" sz="1650" dirty="0" spc="-7" kern="0">
                 <a:solidFill>
                   <a:srgbClr val="9A98A0"/>
                 </a:solidFill>
@@ -5372,10 +6609,10 @@
                 <a:ea typeface="Be Vietnam Pro" pitchFamily="34" charset="-122"/>
                 <a:cs typeface="Be Vietnam Pro" pitchFamily="34" charset="-120"/>
               </a:rPr>
-              <a:t> Curve</a:t>
-            </a:r>
-            <a:r>
-              <a:rPr lang="en-US" sz="1650" dirty="0" spc="-4" kern="0">
+              <a:t> toán</a:t>
+            </a:r>
+            <a:r>
+              <a:rPr lang="en-US" sz="1650" dirty="0" spc="1" kern="0">
                 <a:solidFill>
                   <a:srgbClr val="9A98A0"/>
                 </a:solidFill>
@@ -5383,7 +6620,29 @@
                 <a:ea typeface="Be Vietnam Pro" pitchFamily="34" charset="-122"/>
                 <a:cs typeface="Be Vietnam Pro" pitchFamily="34" charset="-120"/>
               </a:rPr>
-              <a:t> Digital</a:t>
+              <a:t> ký, ghi</a:t>
+            </a:r>
+            <a:r>
+              <a:rPr lang="en-US" sz="1650" dirty="0" spc="2" kern="0">
+                <a:solidFill>
+                  <a:srgbClr val="9A98A0"/>
+                </a:solidFill>
+                <a:latin typeface="Be Vietnam Pro" pitchFamily="34" charset="0"/>
+                <a:ea typeface="Be Vietnam Pro" pitchFamily="34" charset="-122"/>
+                <a:cs typeface="Be Vietnam Pro" pitchFamily="34" charset="-120"/>
+              </a:rPr>
+              <a:t> ở</a:t>
+            </a:r>
+            <a:r>
+              <a:rPr lang="en-US" sz="1650" dirty="0" spc="-1" kern="0">
+                <a:solidFill>
+                  <a:srgbClr val="9A98A0"/>
+                </a:solidFill>
+                <a:latin typeface="Be Vietnam Pro" pitchFamily="34" charset="0"/>
+                <a:ea typeface="Be Vietnam Pro" pitchFamily="34" charset="-122"/>
+                <a:cs typeface="Be Vietnam Pro" pitchFamily="34" charset="-120"/>
+              </a:rPr>
+              <a:t> alg</a:t>
             </a:r>
             <a:r>
               <a:rPr lang="en-US" sz="1650" dirty="0" spc="-11" kern="0">
@@ -5394,10 +6653,10 @@
                 <a:ea typeface="Be Vietnam Pro" pitchFamily="34" charset="-122"/>
                 <a:cs typeface="Be Vietnam Pro" pitchFamily="34" charset="-120"/>
               </a:rPr>
-              <a:t> Signature</a:t>
-            </a:r>
-            <a:r>
-              <a:rPr lang="en-US" sz="1650" dirty="0" spc="0" kern="0">
+              <a:t> trong</a:t>
+            </a:r>
+            <a:r>
+              <a:rPr lang="en-US" sz="1650" dirty="0" spc="-2" kern="0">
                 <a:solidFill>
                   <a:srgbClr val="9A98A0"/>
                 </a:solidFill>
@@ -5405,7 +6664,7 @@
                 <a:ea typeface="Be Vietnam Pro" pitchFamily="34" charset="-122"/>
                 <a:cs typeface="Be Vietnam Pro" pitchFamily="34" charset="-120"/>
               </a:rPr>
-              <a:t> Algorithm</a:t>
+              <a:t> header</a:t>
             </a:r>
             <a:endParaRPr lang="en-US" sz="1650" dirty="0"/>
           </a:p>
@@ -5413,14 +6672,14 @@
       </p:sp>
       <p:sp>
         <p:nvSpPr>
-          <p:cNvPr id="39" name="Text 37"/>
-          <p:cNvSpPr/>
-          <p:nvPr/>
-        </p:nvSpPr>
-        <p:spPr>
-          <a:xfrm>
-            <a:off x="5438775" y="6905625"/>
-            <a:ext cx="3238500" cy="590550"/>
+          <p:cNvPr id="68" name="Text 66"/>
+          <p:cNvSpPr/>
+          <p:nvPr/>
+        </p:nvSpPr>
+        <p:spPr>
+          <a:xfrm>
+            <a:off x="9486900" y="7029450"/>
+            <a:ext cx="7620000" cy="552450"/>
           </a:xfrm>
           <a:prstGeom prst="rect">
             <a:avLst/>
@@ -5429,17 +6688,17 @@
           <a:ln/>
         </p:spPr>
         <p:txBody>
-          <a:bodyPr wrap="square" lIns="0" tIns="12573" rIns="0" bIns="-12573" rtlCol="0" anchor="t"/>
+          <a:bodyPr wrap="square" lIns="0" tIns="11509" rIns="0" bIns="-11509" rtlCol="0" anchor="t"/>
           <a:lstStyle/>
           <a:p>
             <a:pPr algn="l" indent="0" marL="0">
               <a:lnSpc>
-                <a:spcPts val="2250"/>
+                <a:spcPts val="2063"/>
               </a:lnSpc>
               <a:buNone/>
             </a:pPr>
             <a:r>
-              <a:rPr lang="en-US" sz="1800" dirty="0" spc="-1" kern="0">
+              <a:rPr lang="en-US" sz="1650" dirty="0" spc="-2" kern="0">
                 <a:solidFill>
                   <a:srgbClr val="D8D3C4"/>
                 </a:solidFill>
@@ -5447,10 +6706,10 @@
                 <a:ea typeface="Be Vietnam Pro" pitchFamily="34" charset="-122"/>
                 <a:cs typeface="Be Vietnam Pro" pitchFamily="34" charset="-120"/>
               </a:rPr>
-              <a:t>Chữ</a:t>
-            </a:r>
-            <a:r>
-              <a:rPr lang="en-US" sz="1800" dirty="0" spc="0" kern="0">
+              <a:t>HS256:</a:t>
+            </a:r>
+            <a:r>
+              <a:rPr lang="en-US" sz="1650" dirty="0" spc="-13" kern="0">
                 <a:solidFill>
                   <a:srgbClr val="D8D3C4"/>
                 </a:solidFill>
@@ -5458,10 +6717,10 @@
                 <a:ea typeface="Be Vietnam Pro" pitchFamily="34" charset="-122"/>
                 <a:cs typeface="Be Vietnam Pro" pitchFamily="34" charset="-120"/>
               </a:rPr>
-              <a:t> ký</a:t>
-            </a:r>
-            <a:r>
-              <a:rPr lang="en-US" sz="1800" dirty="0" spc="-4" kern="0">
+              <a:t> HMAC</a:t>
+            </a:r>
+            <a:r>
+              <a:rPr lang="en-US" sz="1650" dirty="0" spc="-8" kern="0">
                 <a:solidFill>
                   <a:srgbClr val="D8D3C4"/>
                 </a:solidFill>
@@ -5469,10 +6728,10 @@
                 <a:ea typeface="Be Vietnam Pro" pitchFamily="34" charset="-122"/>
                 <a:cs typeface="Be Vietnam Pro" pitchFamily="34" charset="-120"/>
               </a:rPr>
-              <a:t> số:</a:t>
-            </a:r>
-            <a:r>
-              <a:rPr lang="en-US" sz="1800" dirty="0" spc="-1" kern="0">
+              <a:t> với</a:t>
+            </a:r>
+            <a:r>
+              <a:rPr lang="en-US" sz="1650" dirty="0" spc="0" kern="0">
                 <a:solidFill>
                   <a:srgbClr val="D8D3C4"/>
                 </a:solidFill>
@@ -5480,10 +6739,10 @@
                 <a:ea typeface="Be Vietnam Pro" pitchFamily="34" charset="-122"/>
                 <a:cs typeface="Be Vietnam Pro" pitchFamily="34" charset="-120"/>
               </a:rPr>
-              <a:t> khóa</a:t>
-            </a:r>
-            <a:r>
-              <a:rPr lang="en-US" sz="1800" dirty="0" spc="5" kern="0">
+              <a:t> SHA-256</a:t>
+            </a:r>
+            <a:r>
+              <a:rPr lang="en-US" sz="1650" dirty="0" spc="1" kern="0">
                 <a:solidFill>
                   <a:srgbClr val="D8D3C4"/>
                 </a:solidFill>
@@ -5491,10 +6750,10 @@
                 <a:ea typeface="Be Vietnam Pro" pitchFamily="34" charset="-122"/>
                 <a:cs typeface="Be Vietnam Pro" pitchFamily="34" charset="-120"/>
               </a:rPr>
-              <a:t> riêng</a:t>
-            </a:r>
-            <a:r>
-              <a:rPr lang="en-US" sz="1800" dirty="0" spc="-1" kern="0">
+              <a:t> ·</a:t>
+            </a:r>
+            <a:r>
+              <a:rPr lang="en-US" sz="1650" dirty="0" spc="-3" kern="0">
                 <a:solidFill>
                   <a:srgbClr val="D8D3C4"/>
                 </a:solidFill>
@@ -5502,10 +6761,10 @@
                 <a:ea typeface="Be Vietnam Pro" pitchFamily="34" charset="-122"/>
                 <a:cs typeface="Be Vietnam Pro" pitchFamily="34" charset="-120"/>
               </a:rPr>
-              <a:t> ký, khóa</a:t>
-            </a:r>
-            <a:r>
-              <a:rPr lang="en-US" sz="1800" dirty="0" spc="-2" kern="0">
+              <a:t> ES256:</a:t>
+            </a:r>
+            <a:r>
+              <a:rPr lang="en-US" sz="1650" dirty="0" spc="-5" kern="0">
                 <a:solidFill>
                   <a:srgbClr val="D8D3C4"/>
                 </a:solidFill>
@@ -5513,10 +6772,10 @@
                 <a:ea typeface="Be Vietnam Pro" pitchFamily="34" charset="-122"/>
                 <a:cs typeface="Be Vietnam Pro" pitchFamily="34" charset="-120"/>
               </a:rPr>
-              <a:t> công</a:t>
-            </a:r>
-            <a:r>
-              <a:rPr lang="en-US" sz="1800" dirty="0" spc="1" kern="0">
+              <a:t> ECDSA</a:t>
+            </a:r>
+            <a:r>
+              <a:rPr lang="en-US" sz="1650" dirty="0" spc="1" kern="0">
                 <a:solidFill>
                   <a:srgbClr val="D8D3C4"/>
                 </a:solidFill>
@@ -5524,10 +6783,10 @@
                 <a:ea typeface="Be Vietnam Pro" pitchFamily="34" charset="-122"/>
                 <a:cs typeface="Be Vietnam Pro" pitchFamily="34" charset="-120"/>
               </a:rPr>
-              <a:t> khai</a:t>
-            </a:r>
-            <a:r>
-              <a:rPr lang="en-US" sz="1800" dirty="0" spc="-1" kern="0">
+              <a:t> ·</a:t>
+            </a:r>
+            <a:r>
+              <a:rPr lang="en-US" sz="1650" dirty="0" spc="-2" kern="0">
                 <a:solidFill>
                   <a:srgbClr val="D8D3C4"/>
                 </a:solidFill>
@@ -5535,179 +6794,18 @@
                 <a:ea typeface="Be Vietnam Pro" pitchFamily="34" charset="-122"/>
                 <a:cs typeface="Be Vietnam Pro" pitchFamily="34" charset="-120"/>
               </a:rPr>
-              <a:t> kiểm.</a:t>
-            </a:r>
-            <a:endParaRPr lang="en-US" sz="1800" dirty="0"/>
-          </a:p>
-        </p:txBody>
-      </p:sp>
-      <p:sp>
-        <p:nvSpPr>
-          <p:cNvPr id="40" name="Shape 38"/>
-          <p:cNvSpPr/>
-          <p:nvPr/>
-        </p:nvSpPr>
-        <p:spPr>
-          <a:xfrm>
-            <a:off x="9277350" y="5191125"/>
-            <a:ext cx="3914775" cy="2381250"/>
-          </a:xfrm>
-          <a:prstGeom prst="roundRect">
-            <a:avLst>
-              <a:gd name="adj" fmla="val 9600"/>
-            </a:avLst>
-          </a:prstGeom>
-          <a:solidFill>
-            <a:srgbClr val="1E212B"/>
-          </a:solidFill>
-          <a:ln/>
-        </p:spPr>
-      </p:sp>
-      <p:sp>
-        <p:nvSpPr>
-          <p:cNvPr id="41" name="Shape 39"/>
-          <p:cNvSpPr/>
-          <p:nvPr/>
-        </p:nvSpPr>
-        <p:spPr>
-          <a:xfrm>
-            <a:off x="9544050" y="5438775"/>
-            <a:ext cx="152400" cy="152400"/>
-          </a:xfrm>
-          <a:prstGeom prst="ellipse">
-            <a:avLst/>
-          </a:prstGeom>
-          <a:solidFill>
-            <a:srgbClr val="1E212B"/>
-          </a:solidFill>
-          <a:ln w="28575">
-            <a:solidFill>
-              <a:srgbClr val="FF6A4D"/>
-            </a:solidFill>
-            <a:prstDash val="solid"/>
-          </a:ln>
-        </p:spPr>
-      </p:sp>
-      <p:sp>
-        <p:nvSpPr>
-          <p:cNvPr id="42" name="Connector line-1792337941687-17608542"/>
-          <p:cNvSpPr/>
-          <p:nvPr/>
-        </p:nvSpPr>
-        <p:spPr>
-          <a:xfrm>
-            <a:off x="9696450" y="5514975"/>
-            <a:ext cx="3152775" cy="0"/>
-          </a:xfrm>
-          <a:prstGeom prst="line">
-            <a:avLst/>
-          </a:prstGeom>
-          <a:noFill/>
-          <a:ln w="28575">
-            <a:solidFill>
-              <a:srgbClr val="FF6A4D"/>
-            </a:solidFill>
-            <a:prstDash val="solid"/>
-            <a:headEnd type="none"/>
-            <a:tailEnd type="none"/>
-          </a:ln>
-        </p:spPr>
-      </p:sp>
-      <p:sp>
-        <p:nvSpPr>
-          <p:cNvPr id="43" name="Text 41"/>
-          <p:cNvSpPr/>
-          <p:nvPr/>
-        </p:nvSpPr>
-        <p:spPr>
-          <a:xfrm>
-            <a:off x="9620250" y="5686425"/>
-            <a:ext cx="3238500" cy="628650"/>
-          </a:xfrm>
-          <a:prstGeom prst="rect">
-            <a:avLst/>
-          </a:prstGeom>
-          <a:noFill/>
-          <a:ln/>
-        </p:spPr>
-        <p:txBody>
-          <a:bodyPr wrap="square" lIns="0" tIns="0" rIns="0" bIns="0" rtlCol="0" anchor="t"/>
-          <a:lstStyle/>
-          <a:p>
-            <a:pPr algn="l" indent="0" marL="0">
-              <a:buNone/>
-            </a:pPr>
-            <a:r>
-              <a:rPr lang="en-US" sz="3900" dirty="0" spc="7" kern="0">
-                <a:solidFill>
-                  <a:srgbClr val="FF6A4D"/>
-                </a:solidFill>
-                <a:latin typeface="Bricolage Grotesque ExtraBold" pitchFamily="34" charset="0"/>
-                <a:ea typeface="Bricolage Grotesque ExtraBold" pitchFamily="34" charset="-122"/>
-                <a:cs typeface="Bricolage Grotesque ExtraBold" pitchFamily="34" charset="-120"/>
-              </a:rPr>
-              <a:t>JWE</a:t>
-            </a:r>
-            <a:endParaRPr lang="en-US" sz="3900" dirty="0"/>
-          </a:p>
-        </p:txBody>
-      </p:sp>
-      <p:sp>
-        <p:nvSpPr>
-          <p:cNvPr id="44" name="Text 42"/>
-          <p:cNvSpPr/>
-          <p:nvPr/>
-        </p:nvSpPr>
-        <p:spPr>
-          <a:xfrm>
-            <a:off x="9620250" y="6334125"/>
-            <a:ext cx="3238500" cy="533400"/>
-          </a:xfrm>
-          <a:prstGeom prst="rect">
-            <a:avLst/>
-          </a:prstGeom>
-          <a:noFill/>
-          <a:ln/>
-        </p:spPr>
-        <p:txBody>
-          <a:bodyPr wrap="square" lIns="0" tIns="0" rIns="0" bIns="0" rtlCol="0" anchor="t"/>
-          <a:lstStyle/>
-          <a:p>
-            <a:pPr algn="l" indent="0" marL="0">
-              <a:buNone/>
-            </a:pPr>
-            <a:r>
-              <a:rPr lang="en-US" sz="1650" dirty="0" spc="6" kern="0">
-                <a:solidFill>
-                  <a:srgbClr val="9A98A0"/>
-                </a:solidFill>
-                <a:latin typeface="Be Vietnam Pro" pitchFamily="34" charset="0"/>
-                <a:ea typeface="Be Vietnam Pro" pitchFamily="34" charset="-122"/>
-                <a:cs typeface="Be Vietnam Pro" pitchFamily="34" charset="-120"/>
-              </a:rPr>
-              <a:t>JSON</a:t>
-            </a:r>
-            <a:r>
-              <a:rPr lang="en-US" sz="1650" dirty="0" spc="-18" kern="0">
-                <a:solidFill>
-                  <a:srgbClr val="9A98A0"/>
-                </a:solidFill>
-                <a:latin typeface="Be Vietnam Pro" pitchFamily="34" charset="0"/>
-                <a:ea typeface="Be Vietnam Pro" pitchFamily="34" charset="-122"/>
-                <a:cs typeface="Be Vietnam Pro" pitchFamily="34" charset="-120"/>
-              </a:rPr>
-              <a:t> Web</a:t>
-            </a:r>
-            <a:r>
-              <a:rPr lang="en-US" sz="1650" dirty="0" spc="-2" kern="0">
-                <a:solidFill>
-                  <a:srgbClr val="9A98A0"/>
-                </a:solidFill>
-                <a:latin typeface="Be Vietnam Pro" pitchFamily="34" charset="0"/>
-                <a:ea typeface="Be Vietnam Pro" pitchFamily="34" charset="-122"/>
-                <a:cs typeface="Be Vietnam Pro" pitchFamily="34" charset="-120"/>
-              </a:rPr>
-              <a:t> Encryption</a:t>
+              <a:t> RS256:</a:t>
+            </a:r>
+            <a:r>
+              <a:rPr lang="en-US" sz="1650" dirty="0" spc="-11" kern="0">
+                <a:solidFill>
+                  <a:srgbClr val="D8D3C4"/>
+                </a:solidFill>
+                <a:latin typeface="Be Vietnam Pro" pitchFamily="34" charset="0"/>
+                <a:ea typeface="Be Vietnam Pro" pitchFamily="34" charset="-122"/>
+                <a:cs typeface="Be Vietnam Pro" pitchFamily="34" charset="-120"/>
+              </a:rPr>
+              <a:t> RSA</a:t>
             </a:r>
             <a:endParaRPr lang="en-US" sz="1650" dirty="0"/>
           </a:p>
@@ -5715,809 +6813,7 @@
       </p:sp>
       <p:sp>
         <p:nvSpPr>
-          <p:cNvPr id="45" name="Text 43"/>
-          <p:cNvSpPr/>
-          <p:nvPr/>
-        </p:nvSpPr>
-        <p:spPr>
-          <a:xfrm>
-            <a:off x="9620250" y="6905625"/>
-            <a:ext cx="3238500" cy="590550"/>
-          </a:xfrm>
-          <a:prstGeom prst="rect">
-            <a:avLst/>
-          </a:prstGeom>
-          <a:noFill/>
-          <a:ln/>
-        </p:spPr>
-        <p:txBody>
-          <a:bodyPr wrap="square" lIns="0" tIns="12573" rIns="0" bIns="-12573" rtlCol="0" anchor="t"/>
-          <a:lstStyle/>
-          <a:p>
-            <a:pPr algn="l" indent="0" marL="0">
-              <a:lnSpc>
-                <a:spcPts val="2250"/>
-              </a:lnSpc>
-              <a:buNone/>
-            </a:pPr>
-            <a:r>
-              <a:rPr lang="en-US" sz="1800" dirty="0" spc="-3" kern="0">
-                <a:solidFill>
-                  <a:srgbClr val="D8D3C4"/>
-                </a:solidFill>
-                <a:latin typeface="Be Vietnam Pro" pitchFamily="34" charset="0"/>
-                <a:ea typeface="Be Vietnam Pro" pitchFamily="34" charset="-122"/>
-                <a:cs typeface="Be Vietnam Pro" pitchFamily="34" charset="-120"/>
-              </a:rPr>
-              <a:t>dạng</a:t>
-            </a:r>
-            <a:r>
-              <a:rPr lang="en-US" sz="1800" dirty="0" spc="7" kern="0">
-                <a:solidFill>
-                  <a:srgbClr val="D8D3C4"/>
-                </a:solidFill>
-                <a:latin typeface="Be Vietnam Pro" pitchFamily="34" charset="0"/>
-                <a:ea typeface="Be Vietnam Pro" pitchFamily="34" charset="-122"/>
-                <a:cs typeface="Be Vietnam Pro" pitchFamily="34" charset="-120"/>
-              </a:rPr>
-              <a:t> JWT</a:t>
-            </a:r>
-            <a:r>
-              <a:rPr lang="en-US" sz="1800" dirty="0" spc="-1" kern="0">
-                <a:solidFill>
-                  <a:srgbClr val="D8D3C4"/>
-                </a:solidFill>
-                <a:latin typeface="Be Vietnam Pro" pitchFamily="34" charset="0"/>
-                <a:ea typeface="Be Vietnam Pro" pitchFamily="34" charset="-122"/>
-                <a:cs typeface="Be Vietnam Pro" pitchFamily="34" charset="-120"/>
-              </a:rPr>
-              <a:t> mã</a:t>
-            </a:r>
-            <a:r>
-              <a:rPr lang="en-US" sz="1800" dirty="0" spc="-2" kern="0">
-                <a:solidFill>
-                  <a:srgbClr val="D8D3C4"/>
-                </a:solidFill>
-                <a:latin typeface="Be Vietnam Pro" pitchFamily="34" charset="0"/>
-                <a:ea typeface="Be Vietnam Pro" pitchFamily="34" charset="-122"/>
-                <a:cs typeface="Be Vietnam Pro" pitchFamily="34" charset="-120"/>
-              </a:rPr>
-              <a:t> hóa,</a:t>
-            </a:r>
-            <a:r>
-              <a:rPr lang="en-US" sz="1800" dirty="0" spc="0" kern="0">
-                <a:solidFill>
-                  <a:srgbClr val="D8D3C4"/>
-                </a:solidFill>
-                <a:latin typeface="Be Vietnam Pro" pitchFamily="34" charset="0"/>
-                <a:ea typeface="Be Vietnam Pro" pitchFamily="34" charset="-122"/>
-                <a:cs typeface="Be Vietnam Pro" pitchFamily="34" charset="-120"/>
-              </a:rPr>
-              <a:t> cấu</a:t>
-            </a:r>
-            <a:r>
-              <a:rPr lang="en-US" sz="1800" dirty="0" spc="2" kern="0">
-                <a:solidFill>
-                  <a:srgbClr val="D8D3C4"/>
-                </a:solidFill>
-                <a:latin typeface="Be Vietnam Pro" pitchFamily="34" charset="0"/>
-                <a:ea typeface="Be Vietnam Pro" pitchFamily="34" charset="-122"/>
-                <a:cs typeface="Be Vietnam Pro" pitchFamily="34" charset="-120"/>
-              </a:rPr>
-              <a:t> trúc</a:t>
-            </a:r>
-            <a:r>
-              <a:rPr lang="en-US" sz="1800" dirty="0" spc="0" kern="0">
-                <a:solidFill>
-                  <a:srgbClr val="D8D3C4"/>
-                </a:solidFill>
-                <a:latin typeface="Be Vietnam Pro" pitchFamily="34" charset="0"/>
-                <a:ea typeface="Be Vietnam Pro" pitchFamily="34" charset="-122"/>
-                <a:cs typeface="Be Vietnam Pro" pitchFamily="34" charset="-120"/>
-              </a:rPr>
-              <a:t> khác</a:t>
-            </a:r>
-            <a:endParaRPr lang="en-US" sz="1800" dirty="0"/>
-          </a:p>
-        </p:txBody>
-      </p:sp>
-      <p:sp>
-        <p:nvSpPr>
-          <p:cNvPr id="46" name="Shape 44"/>
-          <p:cNvSpPr/>
-          <p:nvPr/>
-        </p:nvSpPr>
-        <p:spPr>
-          <a:xfrm>
-            <a:off x="13458825" y="5191125"/>
-            <a:ext cx="3914775" cy="2381250"/>
-          </a:xfrm>
-          <a:prstGeom prst="roundRect">
-            <a:avLst>
-              <a:gd name="adj" fmla="val 9600"/>
-            </a:avLst>
-          </a:prstGeom>
-          <a:solidFill>
-            <a:srgbClr val="1E212B"/>
-          </a:solidFill>
-          <a:ln/>
-        </p:spPr>
-      </p:sp>
-      <p:sp>
-        <p:nvSpPr>
-          <p:cNvPr id="47" name="Shape 45"/>
-          <p:cNvSpPr/>
-          <p:nvPr/>
-        </p:nvSpPr>
-        <p:spPr>
-          <a:xfrm>
-            <a:off x="13725525" y="5438775"/>
-            <a:ext cx="152400" cy="152400"/>
-          </a:xfrm>
-          <a:prstGeom prst="ellipse">
-            <a:avLst/>
-          </a:prstGeom>
-          <a:solidFill>
-            <a:srgbClr val="1E212B"/>
-          </a:solidFill>
-          <a:ln w="28575">
-            <a:solidFill>
-              <a:srgbClr val="9A98A0"/>
-            </a:solidFill>
-            <a:prstDash val="solid"/>
-          </a:ln>
-        </p:spPr>
-      </p:sp>
-      <p:sp>
-        <p:nvSpPr>
-          <p:cNvPr id="48" name="Connector line-1792337941693-310185199"/>
-          <p:cNvSpPr/>
-          <p:nvPr/>
-        </p:nvSpPr>
-        <p:spPr>
-          <a:xfrm>
-            <a:off x="13877925" y="5514975"/>
-            <a:ext cx="3152775" cy="0"/>
-          </a:xfrm>
-          <a:prstGeom prst="line">
-            <a:avLst/>
-          </a:prstGeom>
-          <a:noFill/>
-          <a:ln w="28575">
-            <a:solidFill>
-              <a:srgbClr val="9A98A0"/>
-            </a:solidFill>
-            <a:prstDash val="solid"/>
-            <a:headEnd type="none"/>
-            <a:tailEnd type="none"/>
-          </a:ln>
-        </p:spPr>
-      </p:sp>
-      <p:sp>
-        <p:nvSpPr>
-          <p:cNvPr id="49" name="Text 47"/>
-          <p:cNvSpPr/>
-          <p:nvPr/>
-        </p:nvSpPr>
-        <p:spPr>
-          <a:xfrm>
-            <a:off x="13801725" y="5686425"/>
-            <a:ext cx="3238500" cy="628650"/>
-          </a:xfrm>
-          <a:prstGeom prst="rect">
-            <a:avLst/>
-          </a:prstGeom>
-          <a:noFill/>
-          <a:ln/>
-        </p:spPr>
-        <p:txBody>
-          <a:bodyPr wrap="square" lIns="0" tIns="0" rIns="0" bIns="0" rtlCol="0" anchor="t"/>
-          <a:lstStyle/>
-          <a:p>
-            <a:pPr algn="l" indent="0" marL="0">
-              <a:buNone/>
-            </a:pPr>
-            <a:r>
-              <a:rPr lang="en-US" sz="3900" dirty="0" spc="-95" kern="0">
-                <a:solidFill>
-                  <a:srgbClr val="F3EEE3"/>
-                </a:solidFill>
-                <a:latin typeface="Bricolage Grotesque ExtraBold" pitchFamily="34" charset="0"/>
-                <a:ea typeface="Bricolage Grotesque ExtraBold" pitchFamily="34" charset="-122"/>
-                <a:cs typeface="Bricolage Grotesque ExtraBold" pitchFamily="34" charset="-120"/>
-              </a:rPr>
-              <a:t>OWASP</a:t>
-            </a:r>
-            <a:endParaRPr lang="en-US" sz="3900" dirty="0"/>
-          </a:p>
-        </p:txBody>
-      </p:sp>
-      <p:sp>
-        <p:nvSpPr>
-          <p:cNvPr id="50" name="Text 48"/>
-          <p:cNvSpPr/>
-          <p:nvPr/>
-        </p:nvSpPr>
-        <p:spPr>
-          <a:xfrm>
-            <a:off x="13801725" y="6334125"/>
-            <a:ext cx="3238500" cy="533400"/>
-          </a:xfrm>
-          <a:prstGeom prst="rect">
-            <a:avLst/>
-          </a:prstGeom>
-          <a:noFill/>
-          <a:ln/>
-        </p:spPr>
-        <p:txBody>
-          <a:bodyPr wrap="square" lIns="0" tIns="0" rIns="0" bIns="0" rtlCol="0" anchor="t"/>
-          <a:lstStyle/>
-          <a:p>
-            <a:pPr algn="l" indent="0" marL="0">
-              <a:buNone/>
-            </a:pPr>
-            <a:r>
-              <a:rPr lang="en-US" sz="1650" dirty="0" spc="-3" kern="0">
-                <a:solidFill>
-                  <a:srgbClr val="9A98A0"/>
-                </a:solidFill>
-                <a:latin typeface="Be Vietnam Pro" pitchFamily="34" charset="0"/>
-                <a:ea typeface="Be Vietnam Pro" pitchFamily="34" charset="-122"/>
-                <a:cs typeface="Be Vietnam Pro" pitchFamily="34" charset="-120"/>
-              </a:rPr>
-              <a:t>Open</a:t>
-            </a:r>
-            <a:r>
-              <a:rPr lang="en-US" sz="1650" dirty="0" spc="-8" kern="0">
-                <a:solidFill>
-                  <a:srgbClr val="9A98A0"/>
-                </a:solidFill>
-                <a:latin typeface="Be Vietnam Pro" pitchFamily="34" charset="0"/>
-                <a:ea typeface="Be Vietnam Pro" pitchFamily="34" charset="-122"/>
-                <a:cs typeface="Be Vietnam Pro" pitchFamily="34" charset="-120"/>
-              </a:rPr>
-              <a:t> Worldwide</a:t>
-            </a:r>
-            <a:r>
-              <a:rPr lang="en-US" sz="1650" dirty="0" spc="-4" kern="0">
-                <a:solidFill>
-                  <a:srgbClr val="9A98A0"/>
-                </a:solidFill>
-                <a:latin typeface="Be Vietnam Pro" pitchFamily="34" charset="0"/>
-                <a:ea typeface="Be Vietnam Pro" pitchFamily="34" charset="-122"/>
-                <a:cs typeface="Be Vietnam Pro" pitchFamily="34" charset="-120"/>
-              </a:rPr>
-              <a:t> Application</a:t>
-            </a:r>
-            <a:r>
-              <a:rPr lang="en-US" sz="1650" dirty="0" spc="1" kern="0">
-                <a:solidFill>
-                  <a:srgbClr val="9A98A0"/>
-                </a:solidFill>
-                <a:latin typeface="Be Vietnam Pro" pitchFamily="34" charset="0"/>
-                <a:ea typeface="Be Vietnam Pro" pitchFamily="34" charset="-122"/>
-                <a:cs typeface="Be Vietnam Pro" pitchFamily="34" charset="-120"/>
-              </a:rPr>
-              <a:t> Security</a:t>
-            </a:r>
-            <a:r>
-              <a:rPr lang="en-US" sz="1650" dirty="0" spc="-16" kern="0">
-                <a:solidFill>
-                  <a:srgbClr val="9A98A0"/>
-                </a:solidFill>
-                <a:latin typeface="Be Vietnam Pro" pitchFamily="34" charset="0"/>
-                <a:ea typeface="Be Vietnam Pro" pitchFamily="34" charset="-122"/>
-                <a:cs typeface="Be Vietnam Pro" pitchFamily="34" charset="-120"/>
-              </a:rPr>
-              <a:t> Project</a:t>
-            </a:r>
-            <a:endParaRPr lang="en-US" sz="1650" dirty="0"/>
-          </a:p>
-        </p:txBody>
-      </p:sp>
-      <p:sp>
-        <p:nvSpPr>
-          <p:cNvPr id="51" name="Text 49"/>
-          <p:cNvSpPr/>
-          <p:nvPr/>
-        </p:nvSpPr>
-        <p:spPr>
-          <a:xfrm>
-            <a:off x="13801725" y="6905625"/>
-            <a:ext cx="3238500" cy="590550"/>
-          </a:xfrm>
-          <a:prstGeom prst="rect">
-            <a:avLst/>
-          </a:prstGeom>
-          <a:noFill/>
-          <a:ln/>
-        </p:spPr>
-        <p:txBody>
-          <a:bodyPr wrap="square" lIns="0" tIns="12573" rIns="0" bIns="-12573" rtlCol="0" anchor="t"/>
-          <a:lstStyle/>
-          <a:p>
-            <a:pPr algn="l" indent="0" marL="0">
-              <a:lnSpc>
-                <a:spcPts val="2250"/>
-              </a:lnSpc>
-              <a:buNone/>
-            </a:pPr>
-            <a:r>
-              <a:rPr lang="en-US" sz="1800" dirty="0" spc="-84" kern="0">
-                <a:solidFill>
-                  <a:srgbClr val="D8D3C4"/>
-                </a:solidFill>
-                <a:latin typeface="Be Vietnam Pro" pitchFamily="34" charset="0"/>
-                <a:ea typeface="Be Vietnam Pro" pitchFamily="34" charset="-122"/>
-                <a:cs typeface="Be Vietnam Pro" pitchFamily="34" charset="-120"/>
-              </a:rPr>
-              <a:t>Tổ</a:t>
-            </a:r>
-            <a:r>
-              <a:rPr lang="en-US" sz="1800" dirty="0" spc="7" kern="0">
-                <a:solidFill>
-                  <a:srgbClr val="D8D3C4"/>
-                </a:solidFill>
-                <a:latin typeface="Be Vietnam Pro" pitchFamily="34" charset="0"/>
-                <a:ea typeface="Be Vietnam Pro" pitchFamily="34" charset="-122"/>
-                <a:cs typeface="Be Vietnam Pro" pitchFamily="34" charset="-120"/>
-              </a:rPr>
-              <a:t> chức</a:t>
-            </a:r>
-            <a:r>
-              <a:rPr lang="en-US" sz="1800" dirty="0" spc="-1" kern="0">
-                <a:solidFill>
-                  <a:srgbClr val="D8D3C4"/>
-                </a:solidFill>
-                <a:latin typeface="Be Vietnam Pro" pitchFamily="34" charset="0"/>
-                <a:ea typeface="Be Vietnam Pro" pitchFamily="34" charset="-122"/>
-                <a:cs typeface="Be Vietnam Pro" pitchFamily="34" charset="-120"/>
-              </a:rPr>
-              <a:t> cộng</a:t>
-            </a:r>
-            <a:r>
-              <a:rPr lang="en-US" sz="1800" dirty="0" spc="5" kern="0">
-                <a:solidFill>
-                  <a:srgbClr val="D8D3C4"/>
-                </a:solidFill>
-                <a:latin typeface="Be Vietnam Pro" pitchFamily="34" charset="0"/>
-                <a:ea typeface="Be Vietnam Pro" pitchFamily="34" charset="-122"/>
-                <a:cs typeface="Be Vietnam Pro" pitchFamily="34" charset="-120"/>
-              </a:rPr>
-              <a:t> đồng</a:t>
-            </a:r>
-            <a:r>
-              <a:rPr lang="en-US" sz="1800" dirty="0" spc="-12" kern="0">
-                <a:solidFill>
-                  <a:srgbClr val="D8D3C4"/>
-                </a:solidFill>
-                <a:latin typeface="Be Vietnam Pro" pitchFamily="34" charset="0"/>
-                <a:ea typeface="Be Vietnam Pro" pitchFamily="34" charset="-122"/>
-                <a:cs typeface="Be Vietnam Pro" pitchFamily="34" charset="-120"/>
-              </a:rPr>
-              <a:t> về</a:t>
-            </a:r>
-            <a:r>
-              <a:rPr lang="en-US" sz="1800" dirty="0" spc="-1" kern="0">
-                <a:solidFill>
-                  <a:srgbClr val="D8D3C4"/>
-                </a:solidFill>
-                <a:latin typeface="Be Vietnam Pro" pitchFamily="34" charset="0"/>
-                <a:ea typeface="Be Vietnam Pro" pitchFamily="34" charset="-122"/>
-                <a:cs typeface="Be Vietnam Pro" pitchFamily="34" charset="-120"/>
-              </a:rPr>
-              <a:t> bảo</a:t>
-            </a:r>
-            <a:r>
-              <a:rPr lang="en-US" sz="1800" dirty="0" spc="-11" kern="0">
-                <a:solidFill>
-                  <a:srgbClr val="D8D3C4"/>
-                </a:solidFill>
-                <a:latin typeface="Be Vietnam Pro" pitchFamily="34" charset="0"/>
-                <a:ea typeface="Be Vietnam Pro" pitchFamily="34" charset="-122"/>
-                <a:cs typeface="Be Vietnam Pro" pitchFamily="34" charset="-120"/>
-              </a:rPr>
-              <a:t> mật</a:t>
-            </a:r>
-            <a:r>
-              <a:rPr lang="en-US" sz="1800" dirty="0" spc="16" kern="0">
-                <a:solidFill>
-                  <a:srgbClr val="D8D3C4"/>
-                </a:solidFill>
-                <a:latin typeface="Be Vietnam Pro" pitchFamily="34" charset="0"/>
-                <a:ea typeface="Be Vietnam Pro" pitchFamily="34" charset="-122"/>
-                <a:cs typeface="Be Vietnam Pro" pitchFamily="34" charset="-120"/>
-              </a:rPr>
-              <a:t> ứng</a:t>
-            </a:r>
-            <a:r>
-              <a:rPr lang="en-US" sz="1800" dirty="0" spc="-1" kern="0">
-                <a:solidFill>
-                  <a:srgbClr val="D8D3C4"/>
-                </a:solidFill>
-                <a:latin typeface="Be Vietnam Pro" pitchFamily="34" charset="0"/>
-                <a:ea typeface="Be Vietnam Pro" pitchFamily="34" charset="-122"/>
-                <a:cs typeface="Be Vietnam Pro" pitchFamily="34" charset="-120"/>
-              </a:rPr>
-              <a:t> dụng.</a:t>
-            </a:r>
-            <a:endParaRPr lang="en-US" sz="1800" dirty="0"/>
-          </a:p>
-        </p:txBody>
-      </p:sp>
-      <p:sp>
-        <p:nvSpPr>
-          <p:cNvPr id="52" name="Text 50"/>
-          <p:cNvSpPr/>
-          <p:nvPr/>
-        </p:nvSpPr>
-        <p:spPr>
-          <a:xfrm>
-            <a:off x="914400" y="7905750"/>
-            <a:ext cx="9525000" cy="285750"/>
-          </a:xfrm>
-          <a:prstGeom prst="rect">
-            <a:avLst/>
-          </a:prstGeom>
-          <a:noFill/>
-          <a:ln/>
-        </p:spPr>
-        <p:txBody>
-          <a:bodyPr wrap="square" lIns="0" tIns="0" rIns="0" bIns="0" rtlCol="0" anchor="t"/>
-          <a:lstStyle/>
-          <a:p>
-            <a:pPr algn="l" indent="0" marL="0">
-              <a:buNone/>
-            </a:pPr>
-            <a:r>
-              <a:rPr lang="en-US" sz="1800" b="1" spc="300" kern="0" dirty="0">
-                <a:solidFill>
-                  <a:srgbClr val="FF6A4D"/>
-                </a:solidFill>
-                <a:latin typeface="Be Vietnam Pro" pitchFamily="34" charset="0"/>
-                <a:ea typeface="Be Vietnam Pro" pitchFamily="34" charset="-122"/>
-                <a:cs typeface="Be Vietnam Pro" pitchFamily="34" charset="-120"/>
-              </a:rPr>
-              <a:t>NGUỒN ĐỐI</a:t>
-            </a:r>
-            <a:r>
-              <a:rPr lang="en-US" sz="1800" b="1" spc="302" kern="0" dirty="0">
-                <a:solidFill>
-                  <a:srgbClr val="FF6A4D"/>
-                </a:solidFill>
-                <a:latin typeface="Be Vietnam Pro" pitchFamily="34" charset="0"/>
-                <a:ea typeface="Be Vietnam Pro" pitchFamily="34" charset="-122"/>
-                <a:cs typeface="Be Vietnam Pro" pitchFamily="34" charset="-120"/>
-              </a:rPr>
-              <a:t> CHIẾU</a:t>
-            </a:r>
-            <a:endParaRPr lang="en-US" sz="1800" dirty="0"/>
-          </a:p>
-        </p:txBody>
-      </p:sp>
-      <p:sp>
-        <p:nvSpPr>
-          <p:cNvPr id="53" name="Text 51"/>
-          <p:cNvSpPr/>
-          <p:nvPr/>
-        </p:nvSpPr>
-        <p:spPr>
-          <a:xfrm>
-            <a:off x="914400" y="8248650"/>
-            <a:ext cx="16459200" cy="381000"/>
-          </a:xfrm>
-          <a:prstGeom prst="rect">
-            <a:avLst/>
-          </a:prstGeom>
-          <a:noFill/>
-          <a:ln/>
-        </p:spPr>
-        <p:txBody>
-          <a:bodyPr wrap="square" lIns="0" tIns="0" rIns="0" bIns="0" rtlCol="0" anchor="t"/>
-          <a:lstStyle/>
-          <a:p>
-            <a:pPr algn="l" indent="0" marL="0">
-              <a:buNone/>
-            </a:pPr>
-            <a:r>
-              <a:rPr lang="en-US" sz="2100" dirty="0" spc="-6" kern="0">
-                <a:solidFill>
-                  <a:srgbClr val="F3EEE3"/>
-                </a:solidFill>
-                <a:latin typeface="Be Vietnam Pro" pitchFamily="34" charset="0"/>
-                <a:ea typeface="Be Vietnam Pro" pitchFamily="34" charset="-122"/>
-                <a:cs typeface="Be Vietnam Pro" pitchFamily="34" charset="-120"/>
-              </a:rPr>
-              <a:t>ByteByteGo</a:t>
-            </a:r>
-            <a:r>
-              <a:rPr lang="en-US" sz="2100" dirty="0" spc="-7" kern="0">
-                <a:solidFill>
-                  <a:srgbClr val="F3EEE3"/>
-                </a:solidFill>
-                <a:latin typeface="Be Vietnam Pro" pitchFamily="34" charset="0"/>
-                <a:ea typeface="Be Vietnam Pro" pitchFamily="34" charset="-122"/>
-                <a:cs typeface="Be Vietnam Pro" pitchFamily="34" charset="-120"/>
-              </a:rPr>
-              <a:t> system-design-101 ·</a:t>
-            </a:r>
-            <a:r>
-              <a:rPr lang="en-US" sz="2100" dirty="0" spc="-48" kern="0">
-                <a:solidFill>
-                  <a:srgbClr val="F3EEE3"/>
-                </a:solidFill>
-                <a:latin typeface="Be Vietnam Pro" pitchFamily="34" charset="0"/>
-                <a:ea typeface="Be Vietnam Pro" pitchFamily="34" charset="-122"/>
-                <a:cs typeface="Be Vietnam Pro" pitchFamily="34" charset="-120"/>
-              </a:rPr>
-              <a:t> OWASP</a:t>
-            </a:r>
-            <a:r>
-              <a:rPr lang="en-US" sz="2100" dirty="0" spc="4" kern="0">
-                <a:solidFill>
-                  <a:srgbClr val="F3EEE3"/>
-                </a:solidFill>
-                <a:latin typeface="Be Vietnam Pro" pitchFamily="34" charset="0"/>
-                <a:ea typeface="Be Vietnam Pro" pitchFamily="34" charset="-122"/>
-                <a:cs typeface="Be Vietnam Pro" pitchFamily="34" charset="-120"/>
-              </a:rPr>
-              <a:t> JSON</a:t>
-            </a:r>
-            <a:r>
-              <a:rPr lang="en-US" sz="2100" dirty="0" spc="-27" kern="0">
-                <a:solidFill>
-                  <a:srgbClr val="F3EEE3"/>
-                </a:solidFill>
-                <a:latin typeface="Be Vietnam Pro" pitchFamily="34" charset="0"/>
-                <a:ea typeface="Be Vietnam Pro" pitchFamily="34" charset="-122"/>
-                <a:cs typeface="Be Vietnam Pro" pitchFamily="34" charset="-120"/>
-              </a:rPr>
-              <a:t> Web</a:t>
-            </a:r>
-            <a:r>
-              <a:rPr lang="en-US" sz="2100" dirty="0" spc="-48" kern="0">
-                <a:solidFill>
-                  <a:srgbClr val="F3EEE3"/>
-                </a:solidFill>
-                <a:latin typeface="Be Vietnam Pro" pitchFamily="34" charset="0"/>
-                <a:ea typeface="Be Vietnam Pro" pitchFamily="34" charset="-122"/>
-                <a:cs typeface="Be Vietnam Pro" pitchFamily="34" charset="-120"/>
-              </a:rPr>
-              <a:t> Token</a:t>
-            </a:r>
-            <a:r>
-              <a:rPr lang="en-US" sz="2100" dirty="0" spc="-10" kern="0">
-                <a:solidFill>
-                  <a:srgbClr val="F3EEE3"/>
-                </a:solidFill>
-                <a:latin typeface="Be Vietnam Pro" pitchFamily="34" charset="0"/>
-                <a:ea typeface="Be Vietnam Pro" pitchFamily="34" charset="-122"/>
-                <a:cs typeface="Be Vietnam Pro" pitchFamily="34" charset="-120"/>
-              </a:rPr>
-              <a:t> Cheat</a:t>
-            </a:r>
-            <a:r>
-              <a:rPr lang="en-US" sz="2100" dirty="0" spc="-9" kern="0">
-                <a:solidFill>
-                  <a:srgbClr val="F3EEE3"/>
-                </a:solidFill>
-                <a:latin typeface="Be Vietnam Pro" pitchFamily="34" charset="0"/>
-                <a:ea typeface="Be Vietnam Pro" pitchFamily="34" charset="-122"/>
-                <a:cs typeface="Be Vietnam Pro" pitchFamily="34" charset="-120"/>
-              </a:rPr>
-              <a:t> Sheet</a:t>
-            </a:r>
-            <a:r>
-              <a:rPr lang="en-US" sz="2100" dirty="0" spc="-3" kern="0">
-                <a:solidFill>
-                  <a:srgbClr val="F3EEE3"/>
-                </a:solidFill>
-                <a:latin typeface="Be Vietnam Pro" pitchFamily="34" charset="0"/>
-                <a:ea typeface="Be Vietnam Pro" pitchFamily="34" charset="-122"/>
-                <a:cs typeface="Be Vietnam Pro" pitchFamily="34" charset="-120"/>
-              </a:rPr>
-              <a:t> ·</a:t>
-            </a:r>
-            <a:r>
-              <a:rPr lang="en-US" sz="2100" dirty="0" spc="7" kern="0">
-                <a:solidFill>
-                  <a:srgbClr val="F3EEE3"/>
-                </a:solidFill>
-                <a:latin typeface="Be Vietnam Pro" pitchFamily="34" charset="0"/>
-                <a:ea typeface="Be Vietnam Pro" pitchFamily="34" charset="-122"/>
-                <a:cs typeface="Be Vietnam Pro" pitchFamily="34" charset="-120"/>
-              </a:rPr>
-              <a:t> PyJWT</a:t>
-            </a:r>
-            <a:r>
-              <a:rPr lang="en-US" sz="2100" dirty="0" spc="-4" kern="0">
-                <a:solidFill>
-                  <a:srgbClr val="F3EEE3"/>
-                </a:solidFill>
-                <a:latin typeface="Be Vietnam Pro" pitchFamily="34" charset="0"/>
-                <a:ea typeface="Be Vietnam Pro" pitchFamily="34" charset="-122"/>
-                <a:cs typeface="Be Vietnam Pro" pitchFamily="34" charset="-120"/>
-              </a:rPr>
-              <a:t> docs</a:t>
-            </a:r>
-            <a:r>
-              <a:rPr lang="en-US" sz="2100" dirty="0" spc="-3" kern="0">
-                <a:solidFill>
-                  <a:srgbClr val="F3EEE3"/>
-                </a:solidFill>
-                <a:latin typeface="Be Vietnam Pro" pitchFamily="34" charset="0"/>
-                <a:ea typeface="Be Vietnam Pro" pitchFamily="34" charset="-122"/>
-                <a:cs typeface="Be Vietnam Pro" pitchFamily="34" charset="-120"/>
-              </a:rPr>
-              <a:t> ·</a:t>
-            </a:r>
-            <a:r>
-              <a:rPr lang="en-US" sz="2100" dirty="0" spc="1" kern="0">
-                <a:solidFill>
-                  <a:srgbClr val="F3EEE3"/>
-                </a:solidFill>
-                <a:latin typeface="Be Vietnam Pro" pitchFamily="34" charset="0"/>
-                <a:ea typeface="Be Vietnam Pro" pitchFamily="34" charset="-122"/>
-                <a:cs typeface="Be Vietnam Pro" pitchFamily="34" charset="-120"/>
-              </a:rPr>
-              <a:t> MDN</a:t>
-            </a:r>
-            <a:r>
-              <a:rPr lang="en-US" sz="2100" dirty="0" spc="-4" kern="0">
-                <a:solidFill>
-                  <a:srgbClr val="F3EEE3"/>
-                </a:solidFill>
-                <a:latin typeface="Be Vietnam Pro" pitchFamily="34" charset="0"/>
-                <a:ea typeface="Be Vietnam Pro" pitchFamily="34" charset="-122"/>
-                <a:cs typeface="Be Vietnam Pro" pitchFamily="34" charset="-120"/>
-              </a:rPr>
-              <a:t> Base64</a:t>
-            </a:r>
-            <a:endParaRPr lang="en-US" sz="2100" dirty="0"/>
-          </a:p>
-        </p:txBody>
-      </p:sp>
-      <p:sp>
-        <p:nvSpPr>
-          <p:cNvPr id="54" name="Text 52"/>
-          <p:cNvSpPr/>
-          <p:nvPr/>
-        </p:nvSpPr>
-        <p:spPr>
-          <a:xfrm>
-            <a:off x="914400" y="8724900"/>
-            <a:ext cx="16459200" cy="285750"/>
-          </a:xfrm>
-          <a:prstGeom prst="rect">
-            <a:avLst/>
-          </a:prstGeom>
-          <a:noFill/>
-          <a:ln/>
-        </p:spPr>
-        <p:txBody>
-          <a:bodyPr wrap="square" lIns="0" tIns="0" rIns="0" bIns="0" rtlCol="0" anchor="t"/>
-          <a:lstStyle/>
-          <a:p>
-            <a:pPr algn="l" indent="0" marL="0">
-              <a:buNone/>
-            </a:pPr>
-            <a:r>
-              <a:rPr lang="en-US" sz="1650" dirty="0" spc="1" kern="0">
-                <a:solidFill>
-                  <a:srgbClr val="9A98A0"/>
-                </a:solidFill>
-                <a:latin typeface="Be Vietnam Pro" pitchFamily="34" charset="0"/>
-                <a:ea typeface="Be Vietnam Pro" pitchFamily="34" charset="-122"/>
-                <a:cs typeface="Be Vietnam Pro" pitchFamily="34" charset="-120"/>
-              </a:rPr>
-              <a:t>Đã</a:t>
-            </a:r>
-            <a:r>
-              <a:rPr lang="en-US" sz="1650" dirty="0" spc="10" kern="0">
-                <a:solidFill>
-                  <a:srgbClr val="9A98A0"/>
-                </a:solidFill>
-                <a:latin typeface="Be Vietnam Pro" pitchFamily="34" charset="0"/>
-                <a:ea typeface="Be Vietnam Pro" pitchFamily="34" charset="-122"/>
-                <a:cs typeface="Be Vietnam Pro" pitchFamily="34" charset="-120"/>
-              </a:rPr>
-              <a:t> đối</a:t>
-            </a:r>
-            <a:r>
-              <a:rPr lang="en-US" sz="1650" dirty="0" spc="1" kern="0">
-                <a:solidFill>
-                  <a:srgbClr val="9A98A0"/>
-                </a:solidFill>
-                <a:latin typeface="Be Vietnam Pro" pitchFamily="34" charset="0"/>
-                <a:ea typeface="Be Vietnam Pro" pitchFamily="34" charset="-122"/>
-                <a:cs typeface="Be Vietnam Pro" pitchFamily="34" charset="-120"/>
-              </a:rPr>
-              <a:t> chiếu</a:t>
-            </a:r>
-            <a:r>
-              <a:rPr lang="en-US" sz="1650" dirty="0" spc="-12" kern="0">
-                <a:solidFill>
-                  <a:srgbClr val="9A98A0"/>
-                </a:solidFill>
-                <a:latin typeface="Be Vietnam Pro" pitchFamily="34" charset="0"/>
-                <a:ea typeface="Be Vietnam Pro" pitchFamily="34" charset="-122"/>
-                <a:cs typeface="Be Vietnam Pro" pitchFamily="34" charset="-120"/>
-              </a:rPr>
-              <a:t> ngày</a:t>
-            </a:r>
-            <a:r>
-              <a:rPr lang="en-US" sz="1650" dirty="0" spc="0" kern="0">
-                <a:solidFill>
-                  <a:srgbClr val="9A98A0"/>
-                </a:solidFill>
-                <a:latin typeface="Be Vietnam Pro" pitchFamily="34" charset="0"/>
-                <a:ea typeface="Be Vietnam Pro" pitchFamily="34" charset="-122"/>
-                <a:cs typeface="Be Vietnam Pro" pitchFamily="34" charset="-120"/>
-              </a:rPr>
-              <a:t> 2026-10-18. Hình</a:t>
-            </a:r>
-            <a:r>
-              <a:rPr lang="en-US" sz="1650" dirty="0" spc="-1" kern="0">
-                <a:solidFill>
-                  <a:srgbClr val="9A98A0"/>
-                </a:solidFill>
-                <a:latin typeface="Be Vietnam Pro" pitchFamily="34" charset="0"/>
-                <a:ea typeface="Be Vietnam Pro" pitchFamily="34" charset="-122"/>
-                <a:cs typeface="Be Vietnam Pro" pitchFamily="34" charset="-120"/>
-              </a:rPr>
-              <a:t> minh họa</a:t>
-            </a:r>
-            <a:r>
-              <a:rPr lang="en-US" sz="1650" dirty="0" spc="1" kern="0">
-                <a:solidFill>
-                  <a:srgbClr val="9A98A0"/>
-                </a:solidFill>
-                <a:latin typeface="Be Vietnam Pro" pitchFamily="34" charset="0"/>
-                <a:ea typeface="Be Vietnam Pro" pitchFamily="34" charset="-122"/>
-                <a:cs typeface="Be Vietnam Pro" pitchFamily="34" charset="-120"/>
-              </a:rPr>
-              <a:t> là</a:t>
-            </a:r>
-            <a:r>
-              <a:rPr lang="en-US" sz="1650" dirty="0" spc="0" kern="0">
-                <a:solidFill>
-                  <a:srgbClr val="9A98A0"/>
-                </a:solidFill>
-                <a:latin typeface="Be Vietnam Pro" pitchFamily="34" charset="0"/>
-                <a:ea typeface="Be Vietnam Pro" pitchFamily="34" charset="-122"/>
-                <a:cs typeface="Be Vietnam Pro" pitchFamily="34" charset="-120"/>
-              </a:rPr>
-              <a:t> thiết</a:t>
-            </a:r>
-            <a:r>
-              <a:rPr lang="en-US" sz="1650" dirty="0" spc="-20" kern="0">
-                <a:solidFill>
-                  <a:srgbClr val="9A98A0"/>
-                </a:solidFill>
-                <a:latin typeface="Be Vietnam Pro" pitchFamily="34" charset="0"/>
-                <a:ea typeface="Be Vietnam Pro" pitchFamily="34" charset="-122"/>
-                <a:cs typeface="Be Vietnam Pro" pitchFamily="34" charset="-120"/>
-              </a:rPr>
-              <a:t> kế</a:t>
-            </a:r>
-            <a:r>
-              <a:rPr lang="en-US" sz="1650" dirty="0" spc="0" kern="0">
-                <a:solidFill>
-                  <a:srgbClr val="9A98A0"/>
-                </a:solidFill>
-                <a:latin typeface="Be Vietnam Pro" pitchFamily="34" charset="0"/>
-                <a:ea typeface="Be Vietnam Pro" pitchFamily="34" charset="-122"/>
-                <a:cs typeface="Be Vietnam Pro" pitchFamily="34" charset="-120"/>
-              </a:rPr>
-              <a:t> mới.</a:t>
-            </a:r>
-            <a:endParaRPr lang="en-US" sz="1650" dirty="0"/>
-          </a:p>
-        </p:txBody>
-      </p:sp>
-      <p:sp>
-        <p:nvSpPr>
-          <p:cNvPr id="55" name="Connector line-1792337941703-700982757"/>
+          <p:cNvPr id="69" name="Connector line-1792388047774-629785808"/>
           <p:cNvSpPr/>
           <p:nvPr/>
         </p:nvSpPr>
@@ -6544,7 +6840,7 @@
       </p:sp>
       <p:sp>
         <p:nvSpPr>
-          <p:cNvPr id="56" name="Shape 54"/>
+          <p:cNvPr id="70" name="Shape 68"/>
           <p:cNvSpPr/>
           <p:nvPr/>
         </p:nvSpPr>
@@ -6564,7 +6860,7 @@
       </p:sp>
       <p:sp>
         <p:nvSpPr>
-          <p:cNvPr id="57" name="Shape 55"/>
+          <p:cNvPr id="71" name="Shape 69"/>
           <p:cNvSpPr/>
           <p:nvPr/>
         </p:nvSpPr>
@@ -6584,7 +6880,7 @@
       </p:sp>
       <p:sp>
         <p:nvSpPr>
-          <p:cNvPr id="58" name="Shape 56"/>
+          <p:cNvPr id="72" name="Shape 70"/>
           <p:cNvSpPr/>
           <p:nvPr/>
         </p:nvSpPr>
@@ -6604,7 +6900,7 @@
       </p:sp>
       <p:sp>
         <p:nvSpPr>
-          <p:cNvPr id="59" name="Shape 57"/>
+          <p:cNvPr id="73" name="Shape 71"/>
           <p:cNvSpPr/>
           <p:nvPr/>
         </p:nvSpPr>
@@ -6624,7 +6920,7 @@
       </p:sp>
       <p:sp>
         <p:nvSpPr>
-          <p:cNvPr id="60" name="Shape 58"/>
+          <p:cNvPr id="74" name="Shape 72"/>
           <p:cNvSpPr/>
           <p:nvPr/>
         </p:nvSpPr>
@@ -6644,7 +6940,7 @@
       </p:sp>
       <p:sp>
         <p:nvSpPr>
-          <p:cNvPr id="61" name="Shape 59"/>
+          <p:cNvPr id="75" name="Shape 73"/>
           <p:cNvSpPr/>
           <p:nvPr/>
         </p:nvSpPr>
@@ -6664,7 +6960,7 @@
       </p:sp>
       <p:sp>
         <p:nvSpPr>
-          <p:cNvPr id="62" name="Shape 60"/>
+          <p:cNvPr id="76" name="Shape 74"/>
           <p:cNvSpPr/>
           <p:nvPr/>
         </p:nvSpPr>
@@ -6684,7 +6980,7 @@
       </p:sp>
       <p:sp>
         <p:nvSpPr>
-          <p:cNvPr id="63" name="Shape 61"/>
+          <p:cNvPr id="77" name="Shape 75"/>
           <p:cNvSpPr/>
           <p:nvPr/>
         </p:nvSpPr>
@@ -6704,7 +7000,7 @@
       </p:sp>
       <p:sp>
         <p:nvSpPr>
-          <p:cNvPr id="64" name="Shape 62"/>
+          <p:cNvPr id="78" name="Shape 76"/>
           <p:cNvSpPr/>
           <p:nvPr/>
         </p:nvSpPr>
@@ -6724,7 +7020,7 @@
       </p:sp>
       <p:sp>
         <p:nvSpPr>
-          <p:cNvPr id="65" name="Shape 63"/>
+          <p:cNvPr id="79" name="Shape 77"/>
           <p:cNvSpPr/>
           <p:nvPr/>
         </p:nvSpPr>
@@ -6744,14 +7040,14 @@
       </p:sp>
       <p:sp>
         <p:nvSpPr>
-          <p:cNvPr id="66" name="Text 64"/>
-          <p:cNvSpPr/>
-          <p:nvPr/>
-        </p:nvSpPr>
-        <p:spPr>
-          <a:xfrm>
-            <a:off x="914400" y="9715500"/>
-            <a:ext cx="7620000" cy="285750"/>
+          <p:cNvPr id="80" name="Text 78"/>
+          <p:cNvSpPr/>
+          <p:nvPr/>
+        </p:nvSpPr>
+        <p:spPr>
+          <a:xfrm>
+            <a:off x="914400" y="7867650"/>
+            <a:ext cx="9525000" cy="285750"/>
           </a:xfrm>
           <a:prstGeom prst="rect">
             <a:avLst/>
@@ -6767,6 +7063,282 @@
               <a:buNone/>
             </a:pPr>
             <a:r>
+              <a:rPr lang="en-US" sz="1800" b="1" spc="300" kern="0" dirty="0">
+                <a:solidFill>
+                  <a:srgbClr val="FF6A4D"/>
+                </a:solidFill>
+                <a:latin typeface="Be Vietnam Pro" pitchFamily="34" charset="0"/>
+                <a:ea typeface="Be Vietnam Pro" pitchFamily="34" charset="-122"/>
+                <a:cs typeface="Be Vietnam Pro" pitchFamily="34" charset="-120"/>
+              </a:rPr>
+              <a:t>NGUỒN ĐỐI</a:t>
+            </a:r>
+            <a:r>
+              <a:rPr lang="en-US" sz="1800" b="1" spc="302" kern="0" dirty="0">
+                <a:solidFill>
+                  <a:srgbClr val="FF6A4D"/>
+                </a:solidFill>
+                <a:latin typeface="Be Vietnam Pro" pitchFamily="34" charset="0"/>
+                <a:ea typeface="Be Vietnam Pro" pitchFamily="34" charset="-122"/>
+                <a:cs typeface="Be Vietnam Pro" pitchFamily="34" charset="-120"/>
+              </a:rPr>
+              <a:t> CHIẾU</a:t>
+            </a:r>
+            <a:endParaRPr lang="en-US" sz="1800" dirty="0"/>
+          </a:p>
+        </p:txBody>
+      </p:sp>
+      <p:sp>
+        <p:nvSpPr>
+          <p:cNvPr id="81" name="Text 79"/>
+          <p:cNvSpPr/>
+          <p:nvPr/>
+        </p:nvSpPr>
+        <p:spPr>
+          <a:xfrm>
+            <a:off x="914400" y="8229600"/>
+            <a:ext cx="16459200" cy="342900"/>
+          </a:xfrm>
+          <a:prstGeom prst="rect">
+            <a:avLst/>
+          </a:prstGeom>
+          <a:noFill/>
+          <a:ln/>
+        </p:spPr>
+        <p:txBody>
+          <a:bodyPr wrap="square" lIns="0" tIns="0" rIns="0" bIns="0" rtlCol="0" anchor="t"/>
+          <a:lstStyle/>
+          <a:p>
+            <a:pPr algn="l" indent="0" marL="0">
+              <a:buNone/>
+            </a:pPr>
+            <a:r>
+              <a:rPr lang="en-US" sz="1950" dirty="0" spc="-3" kern="0">
+                <a:solidFill>
+                  <a:srgbClr val="F3EEE3"/>
+                </a:solidFill>
+                <a:latin typeface="Be Vietnam Pro" pitchFamily="34" charset="0"/>
+                <a:ea typeface="Be Vietnam Pro" pitchFamily="34" charset="-122"/>
+                <a:cs typeface="Be Vietnam Pro" pitchFamily="34" charset="-120"/>
+              </a:rPr>
+              <a:t>ByteByteGo</a:t>
+            </a:r>
+            <a:r>
+              <a:rPr lang="en-US" sz="1950" dirty="0" spc="-5" kern="0">
+                <a:solidFill>
+                  <a:srgbClr val="F3EEE3"/>
+                </a:solidFill>
+                <a:latin typeface="Be Vietnam Pro" pitchFamily="34" charset="0"/>
+                <a:ea typeface="Be Vietnam Pro" pitchFamily="34" charset="-122"/>
+                <a:cs typeface="Be Vietnam Pro" pitchFamily="34" charset="-120"/>
+              </a:rPr>
+              <a:t> system-design-101</a:t>
+            </a:r>
+            <a:r>
+              <a:rPr lang="en-US" sz="1950" dirty="0" spc="1" kern="0">
+                <a:solidFill>
+                  <a:srgbClr val="F3EEE3"/>
+                </a:solidFill>
+                <a:latin typeface="Be Vietnam Pro" pitchFamily="34" charset="0"/>
+                <a:ea typeface="Be Vietnam Pro" pitchFamily="34" charset="-122"/>
+                <a:cs typeface="Be Vietnam Pro" pitchFamily="34" charset="-120"/>
+              </a:rPr>
+              <a:t> ·</a:t>
+            </a:r>
+            <a:r>
+              <a:rPr lang="en-US" sz="1950" dirty="0" spc="-43" kern="0">
+                <a:solidFill>
+                  <a:srgbClr val="F3EEE3"/>
+                </a:solidFill>
+                <a:latin typeface="Be Vietnam Pro" pitchFamily="34" charset="0"/>
+                <a:ea typeface="Be Vietnam Pro" pitchFamily="34" charset="-122"/>
+                <a:cs typeface="Be Vietnam Pro" pitchFamily="34" charset="-120"/>
+              </a:rPr>
+              <a:t> OWASP</a:t>
+            </a:r>
+            <a:r>
+              <a:rPr lang="en-US" sz="1950" dirty="0" spc="5" kern="0">
+                <a:solidFill>
+                  <a:srgbClr val="F3EEE3"/>
+                </a:solidFill>
+                <a:latin typeface="Be Vietnam Pro" pitchFamily="34" charset="0"/>
+                <a:ea typeface="Be Vietnam Pro" pitchFamily="34" charset="-122"/>
+                <a:cs typeface="Be Vietnam Pro" pitchFamily="34" charset="-120"/>
+              </a:rPr>
+              <a:t> JSON</a:t>
+            </a:r>
+            <a:r>
+              <a:rPr lang="en-US" sz="1950" dirty="0" spc="-22" kern="0">
+                <a:solidFill>
+                  <a:srgbClr val="F3EEE3"/>
+                </a:solidFill>
+                <a:latin typeface="Be Vietnam Pro" pitchFamily="34" charset="0"/>
+                <a:ea typeface="Be Vietnam Pro" pitchFamily="34" charset="-122"/>
+                <a:cs typeface="Be Vietnam Pro" pitchFamily="34" charset="-120"/>
+              </a:rPr>
+              <a:t> Web</a:t>
+            </a:r>
+            <a:r>
+              <a:rPr lang="en-US" sz="1950" dirty="0" spc="-42" kern="0">
+                <a:solidFill>
+                  <a:srgbClr val="F3EEE3"/>
+                </a:solidFill>
+                <a:latin typeface="Be Vietnam Pro" pitchFamily="34" charset="0"/>
+                <a:ea typeface="Be Vietnam Pro" pitchFamily="34" charset="-122"/>
+                <a:cs typeface="Be Vietnam Pro" pitchFamily="34" charset="-120"/>
+              </a:rPr>
+              <a:t> Token</a:t>
+            </a:r>
+            <a:r>
+              <a:rPr lang="en-US" sz="1950" dirty="0" spc="-8" kern="0">
+                <a:solidFill>
+                  <a:srgbClr val="F3EEE3"/>
+                </a:solidFill>
+                <a:latin typeface="Be Vietnam Pro" pitchFamily="34" charset="0"/>
+                <a:ea typeface="Be Vietnam Pro" pitchFamily="34" charset="-122"/>
+                <a:cs typeface="Be Vietnam Pro" pitchFamily="34" charset="-120"/>
+              </a:rPr>
+              <a:t> Cheat</a:t>
+            </a:r>
+            <a:r>
+              <a:rPr lang="en-US" sz="1950" dirty="0" spc="-4" kern="0">
+                <a:solidFill>
+                  <a:srgbClr val="F3EEE3"/>
+                </a:solidFill>
+                <a:latin typeface="Be Vietnam Pro" pitchFamily="34" charset="0"/>
+                <a:ea typeface="Be Vietnam Pro" pitchFamily="34" charset="-122"/>
+                <a:cs typeface="Be Vietnam Pro" pitchFamily="34" charset="-120"/>
+              </a:rPr>
+              <a:t> Sheet</a:t>
+            </a:r>
+            <a:r>
+              <a:rPr lang="en-US" sz="1950" dirty="0" spc="-2" kern="0">
+                <a:solidFill>
+                  <a:srgbClr val="F3EEE3"/>
+                </a:solidFill>
+                <a:latin typeface="Be Vietnam Pro" pitchFamily="34" charset="0"/>
+                <a:ea typeface="Be Vietnam Pro" pitchFamily="34" charset="-122"/>
+                <a:cs typeface="Be Vietnam Pro" pitchFamily="34" charset="-120"/>
+              </a:rPr>
+              <a:t> ·</a:t>
+            </a:r>
+            <a:r>
+              <a:rPr lang="en-US" sz="1950" dirty="0" spc="6" kern="0">
+                <a:solidFill>
+                  <a:srgbClr val="F3EEE3"/>
+                </a:solidFill>
+                <a:latin typeface="Be Vietnam Pro" pitchFamily="34" charset="0"/>
+                <a:ea typeface="Be Vietnam Pro" pitchFamily="34" charset="-122"/>
+                <a:cs typeface="Be Vietnam Pro" pitchFamily="34" charset="-120"/>
+              </a:rPr>
+              <a:t> PyJWT</a:t>
+            </a:r>
+            <a:r>
+              <a:rPr lang="en-US" sz="1950" dirty="0" spc="-2" kern="0">
+                <a:solidFill>
+                  <a:srgbClr val="F3EEE3"/>
+                </a:solidFill>
+                <a:latin typeface="Be Vietnam Pro" pitchFamily="34" charset="0"/>
+                <a:ea typeface="Be Vietnam Pro" pitchFamily="34" charset="-122"/>
+                <a:cs typeface="Be Vietnam Pro" pitchFamily="34" charset="-120"/>
+              </a:rPr>
+              <a:t> docs</a:t>
+            </a:r>
+            <a:r>
+              <a:rPr lang="en-US" sz="1950" dirty="0" spc="-3" kern="0">
+                <a:solidFill>
+                  <a:srgbClr val="F3EEE3"/>
+                </a:solidFill>
+                <a:latin typeface="Be Vietnam Pro" pitchFamily="34" charset="0"/>
+                <a:ea typeface="Be Vietnam Pro" pitchFamily="34" charset="-122"/>
+                <a:cs typeface="Be Vietnam Pro" pitchFamily="34" charset="-120"/>
+              </a:rPr>
+              <a:t> ·</a:t>
+            </a:r>
+            <a:r>
+              <a:rPr lang="en-US" sz="1950" dirty="0" spc="-1" kern="0">
+                <a:solidFill>
+                  <a:srgbClr val="F3EEE3"/>
+                </a:solidFill>
+                <a:latin typeface="Be Vietnam Pro" pitchFamily="34" charset="0"/>
+                <a:ea typeface="Be Vietnam Pro" pitchFamily="34" charset="-122"/>
+                <a:cs typeface="Be Vietnam Pro" pitchFamily="34" charset="-120"/>
+              </a:rPr>
+              <a:t> MDN</a:t>
+            </a:r>
+            <a:r>
+              <a:rPr lang="en-US" sz="1950" dirty="0" spc="-3" kern="0">
+                <a:solidFill>
+                  <a:srgbClr val="F3EEE3"/>
+                </a:solidFill>
+                <a:latin typeface="Be Vietnam Pro" pitchFamily="34" charset="0"/>
+                <a:ea typeface="Be Vietnam Pro" pitchFamily="34" charset="-122"/>
+                <a:cs typeface="Be Vietnam Pro" pitchFamily="34" charset="-120"/>
+              </a:rPr>
+              <a:t> Base64</a:t>
+            </a:r>
+            <a:endParaRPr lang="en-US" sz="1950" dirty="0"/>
+          </a:p>
+        </p:txBody>
+      </p:sp>
+      <p:sp>
+        <p:nvSpPr>
+          <p:cNvPr id="82" name="Text 80"/>
+          <p:cNvSpPr/>
+          <p:nvPr/>
+        </p:nvSpPr>
+        <p:spPr>
+          <a:xfrm>
+            <a:off x="914400" y="8686800"/>
+            <a:ext cx="16459200" cy="285750"/>
+          </a:xfrm>
+          <a:prstGeom prst="rect">
+            <a:avLst/>
+          </a:prstGeom>
+          <a:noFill/>
+          <a:ln/>
+        </p:spPr>
+        <p:txBody>
+          <a:bodyPr wrap="square" lIns="0" tIns="0" rIns="0" bIns="0" rtlCol="0" anchor="t"/>
+          <a:lstStyle/>
+          <a:p>
+            <a:pPr algn="l" indent="0" marL="0">
+              <a:buNone/>
+            </a:pPr>
+            <a:r>
+              <a:rPr lang="en-US" sz="1650" dirty="0" spc="1" kern="0">
+                <a:solidFill>
+                  <a:srgbClr val="9A98A0"/>
+                </a:solidFill>
+                <a:latin typeface="Be Vietnam Pro" pitchFamily="34" charset="0"/>
+                <a:ea typeface="Be Vietnam Pro" pitchFamily="34" charset="-122"/>
+                <a:cs typeface="Be Vietnam Pro" pitchFamily="34" charset="-120"/>
+              </a:rPr>
+              <a:t>Đã</a:t>
+            </a:r>
+            <a:r>
+              <a:rPr lang="en-US" sz="1650" dirty="0" spc="10" kern="0">
+                <a:solidFill>
+                  <a:srgbClr val="9A98A0"/>
+                </a:solidFill>
+                <a:latin typeface="Be Vietnam Pro" pitchFamily="34" charset="0"/>
+                <a:ea typeface="Be Vietnam Pro" pitchFamily="34" charset="-122"/>
+                <a:cs typeface="Be Vietnam Pro" pitchFamily="34" charset="-120"/>
+              </a:rPr>
+              <a:t> đối</a:t>
+            </a:r>
+            <a:r>
+              <a:rPr lang="en-US" sz="1650" dirty="0" spc="1" kern="0">
+                <a:solidFill>
+                  <a:srgbClr val="9A98A0"/>
+                </a:solidFill>
+                <a:latin typeface="Be Vietnam Pro" pitchFamily="34" charset="0"/>
+                <a:ea typeface="Be Vietnam Pro" pitchFamily="34" charset="-122"/>
+                <a:cs typeface="Be Vietnam Pro" pitchFamily="34" charset="-120"/>
+              </a:rPr>
+              <a:t> chiếu</a:t>
+            </a:r>
+            <a:r>
               <a:rPr lang="en-US" sz="1650" dirty="0" spc="-12" kern="0">
                 <a:solidFill>
                   <a:srgbClr val="9A98A0"/>
@@ -6775,7 +7347,7 @@
                 <a:ea typeface="Be Vietnam Pro" pitchFamily="34" charset="-122"/>
                 <a:cs typeface="Be Vietnam Pro" pitchFamily="34" charset="-120"/>
               </a:rPr>
-              <a:t>System</a:t>
+              <a:t> ngày</a:t>
             </a:r>
             <a:r>
               <a:rPr lang="en-US" sz="1650" dirty="0" spc="0" kern="0">
@@ -6786,7 +7358,18 @@
                 <a:ea typeface="Be Vietnam Pro" pitchFamily="34" charset="-122"/>
                 <a:cs typeface="Be Vietnam Pro" pitchFamily="34" charset="-120"/>
               </a:rPr>
-              <a:t> Design</a:t>
+              <a:t> 2026-10-18. Hình</a:t>
+            </a:r>
+            <a:r>
+              <a:rPr lang="en-US" sz="1650" dirty="0" spc="-1" kern="0">
+                <a:solidFill>
+                  <a:srgbClr val="9A98A0"/>
+                </a:solidFill>
+                <a:latin typeface="Be Vietnam Pro" pitchFamily="34" charset="0"/>
+                <a:ea typeface="Be Vietnam Pro" pitchFamily="34" charset="-122"/>
+                <a:cs typeface="Be Vietnam Pro" pitchFamily="34" charset="-120"/>
+              </a:rPr>
+              <a:t> minh họa</a:t>
             </a:r>
             <a:r>
               <a:rPr lang="en-US" sz="1650" dirty="0" spc="1" kern="0">
@@ -6797,7 +7380,7 @@
                 <a:ea typeface="Be Vietnam Pro" pitchFamily="34" charset="-122"/>
                 <a:cs typeface="Be Vietnam Pro" pitchFamily="34" charset="-120"/>
               </a:rPr>
-              <a:t> 101</a:t>
+              <a:t> là</a:t>
             </a:r>
             <a:r>
               <a:rPr lang="en-US" sz="1650" dirty="0" spc="0" kern="0">
@@ -6808,10 +7391,10 @@
                 <a:ea typeface="Be Vietnam Pro" pitchFamily="34" charset="-122"/>
                 <a:cs typeface="Be Vietnam Pro" pitchFamily="34" charset="-120"/>
               </a:rPr>
-              <a:t> ·</a:t>
-            </a:r>
-            <a:r>
-              <a:rPr lang="en-US" sz="1650" dirty="0" spc="1" kern="0">
+              <a:t> thiết</a:t>
+            </a:r>
+            <a:r>
+              <a:rPr lang="en-US" sz="1650" dirty="0" spc="-20" kern="0">
                 <a:solidFill>
                   <a:srgbClr val="9A98A0"/>
                 </a:solidFill>
@@ -6819,10 +7402,10 @@
                 <a:ea typeface="Be Vietnam Pro" pitchFamily="34" charset="-122"/>
                 <a:cs typeface="Be Vietnam Pro" pitchFamily="34" charset="-120"/>
               </a:rPr>
-              <a:t> Bài</a:t>
-            </a:r>
-            <a:r>
-              <a:rPr lang="en-US" sz="1650" dirty="0" spc="2" kern="0">
+              <a:t> kế</a:t>
+            </a:r>
+            <a:r>
+              <a:rPr lang="en-US" sz="1650" dirty="0" spc="0" kern="0">
                 <a:solidFill>
                   <a:srgbClr val="9A98A0"/>
                 </a:solidFill>
@@ -6830,29 +7413,7 @@
                 <a:ea typeface="Be Vietnam Pro" pitchFamily="34" charset="-122"/>
                 <a:cs typeface="Be Vietnam Pro" pitchFamily="34" charset="-120"/>
               </a:rPr>
-              <a:t> 20</a:t>
-            </a:r>
-            <a:r>
-              <a:rPr lang="en-US" sz="1650" dirty="0" spc="0" kern="0">
-                <a:solidFill>
-                  <a:srgbClr val="9A98A0"/>
-                </a:solidFill>
-                <a:latin typeface="Be Vietnam Pro" pitchFamily="34" charset="0"/>
-                <a:ea typeface="Be Vietnam Pro" pitchFamily="34" charset="-122"/>
-                <a:cs typeface="Be Vietnam Pro" pitchFamily="34" charset="-120"/>
-              </a:rPr>
-              <a:t> ·</a:t>
-            </a:r>
-            <a:r>
-              <a:rPr lang="en-US" sz="1650" dirty="0" spc="2" kern="0">
-                <a:solidFill>
-                  <a:srgbClr val="9A98A0"/>
-                </a:solidFill>
-                <a:latin typeface="Be Vietnam Pro" pitchFamily="34" charset="0"/>
-                <a:ea typeface="Be Vietnam Pro" pitchFamily="34" charset="-122"/>
-                <a:cs typeface="Be Vietnam Pro" pitchFamily="34" charset="-120"/>
-              </a:rPr>
-              <a:t> 10/10</a:t>
+              <a:t> mới.</a:t>
             </a:r>
             <a:endParaRPr lang="en-US" sz="1650" dirty="0"/>
           </a:p>
@@ -6860,7 +7421,123 @@
       </p:sp>
       <p:sp>
         <p:nvSpPr>
-          <p:cNvPr id="67" name="Shape 65"/>
+          <p:cNvPr id="83" name="Text 81"/>
+          <p:cNvSpPr/>
+          <p:nvPr/>
+        </p:nvSpPr>
+        <p:spPr>
+          <a:xfrm>
+            <a:off x="914400" y="9715500"/>
+            <a:ext cx="7620000" cy="285750"/>
+          </a:xfrm>
+          <a:prstGeom prst="rect">
+            <a:avLst/>
+          </a:prstGeom>
+          <a:noFill/>
+          <a:ln/>
+        </p:spPr>
+        <p:txBody>
+          <a:bodyPr wrap="square" lIns="0" tIns="0" rIns="0" bIns="0" rtlCol="0" anchor="t"/>
+          <a:lstStyle/>
+          <a:p>
+            <a:pPr algn="l" indent="0" marL="0">
+              <a:buNone/>
+            </a:pPr>
+            <a:r>
+              <a:rPr lang="en-US" sz="1650" dirty="0" spc="-12" kern="0">
+                <a:solidFill>
+                  <a:srgbClr val="9A98A0"/>
+                </a:solidFill>
+                <a:latin typeface="Be Vietnam Pro" pitchFamily="34" charset="0"/>
+                <a:ea typeface="Be Vietnam Pro" pitchFamily="34" charset="-122"/>
+                <a:cs typeface="Be Vietnam Pro" pitchFamily="34" charset="-120"/>
+              </a:rPr>
+              <a:t>System</a:t>
+            </a:r>
+            <a:r>
+              <a:rPr lang="en-US" sz="1650" dirty="0" spc="0" kern="0">
+                <a:solidFill>
+                  <a:srgbClr val="9A98A0"/>
+                </a:solidFill>
+                <a:latin typeface="Be Vietnam Pro" pitchFamily="34" charset="0"/>
+                <a:ea typeface="Be Vietnam Pro" pitchFamily="34" charset="-122"/>
+                <a:cs typeface="Be Vietnam Pro" pitchFamily="34" charset="-120"/>
+              </a:rPr>
+              <a:t> Design</a:t>
+            </a:r>
+            <a:r>
+              <a:rPr lang="en-US" sz="1650" dirty="0" spc="1" kern="0">
+                <a:solidFill>
+                  <a:srgbClr val="9A98A0"/>
+                </a:solidFill>
+                <a:latin typeface="Be Vietnam Pro" pitchFamily="34" charset="0"/>
+                <a:ea typeface="Be Vietnam Pro" pitchFamily="34" charset="-122"/>
+                <a:cs typeface="Be Vietnam Pro" pitchFamily="34" charset="-120"/>
+              </a:rPr>
+              <a:t> 101</a:t>
+            </a:r>
+            <a:r>
+              <a:rPr lang="en-US" sz="1650" dirty="0" spc="0" kern="0">
+                <a:solidFill>
+                  <a:srgbClr val="9A98A0"/>
+                </a:solidFill>
+                <a:latin typeface="Be Vietnam Pro" pitchFamily="34" charset="0"/>
+                <a:ea typeface="Be Vietnam Pro" pitchFamily="34" charset="-122"/>
+                <a:cs typeface="Be Vietnam Pro" pitchFamily="34" charset="-120"/>
+              </a:rPr>
+              <a:t> ·</a:t>
+            </a:r>
+            <a:r>
+              <a:rPr lang="en-US" sz="1650" dirty="0" spc="1" kern="0">
+                <a:solidFill>
+                  <a:srgbClr val="9A98A0"/>
+                </a:solidFill>
+                <a:latin typeface="Be Vietnam Pro" pitchFamily="34" charset="0"/>
+                <a:ea typeface="Be Vietnam Pro" pitchFamily="34" charset="-122"/>
+                <a:cs typeface="Be Vietnam Pro" pitchFamily="34" charset="-120"/>
+              </a:rPr>
+              <a:t> Bài</a:t>
+            </a:r>
+            <a:r>
+              <a:rPr lang="en-US" sz="1650" dirty="0" spc="2" kern="0">
+                <a:solidFill>
+                  <a:srgbClr val="9A98A0"/>
+                </a:solidFill>
+                <a:latin typeface="Be Vietnam Pro" pitchFamily="34" charset="0"/>
+                <a:ea typeface="Be Vietnam Pro" pitchFamily="34" charset="-122"/>
+                <a:cs typeface="Be Vietnam Pro" pitchFamily="34" charset="-120"/>
+              </a:rPr>
+              <a:t> 20</a:t>
+            </a:r>
+            <a:r>
+              <a:rPr lang="en-US" sz="1650" dirty="0" spc="0" kern="0">
+                <a:solidFill>
+                  <a:srgbClr val="9A98A0"/>
+                </a:solidFill>
+                <a:latin typeface="Be Vietnam Pro" pitchFamily="34" charset="0"/>
+                <a:ea typeface="Be Vietnam Pro" pitchFamily="34" charset="-122"/>
+                <a:cs typeface="Be Vietnam Pro" pitchFamily="34" charset="-120"/>
+              </a:rPr>
+              <a:t> ·</a:t>
+            </a:r>
+            <a:r>
+              <a:rPr lang="en-US" sz="1650" dirty="0" spc="2" kern="0">
+                <a:solidFill>
+                  <a:srgbClr val="9A98A0"/>
+                </a:solidFill>
+                <a:latin typeface="Be Vietnam Pro" pitchFamily="34" charset="0"/>
+                <a:ea typeface="Be Vietnam Pro" pitchFamily="34" charset="-122"/>
+                <a:cs typeface="Be Vietnam Pro" pitchFamily="34" charset="-120"/>
+              </a:rPr>
+              <a:t> 10/10</a:t>
+            </a:r>
+            <a:endParaRPr lang="en-US" sz="1650" dirty="0"/>
+          </a:p>
+        </p:txBody>
+      </p:sp>
+      <p:sp>
+        <p:nvSpPr>
+          <p:cNvPr id="84" name="Shape 82"/>
           <p:cNvSpPr/>
           <p:nvPr/>
         </p:nvSpPr>
@@ -6884,7 +7561,7 @@
       </p:sp>
       <p:pic>
         <p:nvPicPr>
-          <p:cNvPr id="68" name="Moda image moda-export-watermark-2a4aae9a-6234-4692-8ba0-1dbbe1e91aa8" descr="">    </p:cNvPr>
+          <p:cNvPr id="85" name="Moda image moda-export-watermark-2a4aae9a-6234-4692-8ba0-1dbbe1e91aa8" descr="">    </p:cNvPr>
           <p:cNvPicPr>
             <a:picLocks noChangeAspect="1"/>
           </p:cNvPicPr>
